--- a/Digital/Presentacion.pptx
+++ b/Digital/Presentacion.pptx
@@ -378,7 +378,7 @@
             <a:pPr indent="0" algn="r">
               <a:buNone/>
             </a:pPr>
-            <a:fld id="{8DDDB7F7-753F-462E-A064-C1175AD567C6}" type="slidenum">
+            <a:fld id="{BBB3DF40-2BCA-412D-A8AA-0903927663CD}" type="slidenum">
               <a:rPr lang="en-US" sz="1400" b="0" u="none" strike="noStrike">
                 <a:solidFill>
                   <a:srgbClr val="000000"/>
@@ -425,7 +425,7 @@
       </p:grpSpPr>
       <p:sp>
         <p:nvSpPr>
-          <p:cNvPr id="405" name="PlaceHolder 1"/>
+          <p:cNvPr id="386" name="PlaceHolder 1"/>
           <p:cNvSpPr>
             <a:spLocks noGrp="1"/>
           </p:cNvSpPr>
@@ -436,19 +436,19 @@
         <p:spPr>
           <a:xfrm>
             <a:off x="685800" y="1143000"/>
-            <a:ext cx="5486040" cy="3085920"/>
-          </a:xfrm>
-          <a:prstGeom prst="rect">
-            <a:avLst/>
-          </a:prstGeom>
-          <a:ln w="0">
-            <a:noFill/>
-          </a:ln>
-        </p:spPr>
-      </p:sp>
-      <p:sp>
-        <p:nvSpPr>
-          <p:cNvPr id="406" name="PlaceHolder 2"/>
+            <a:ext cx="5485680" cy="3085560"/>
+          </a:xfrm>
+          <a:prstGeom prst="rect">
+            <a:avLst/>
+          </a:prstGeom>
+          <a:ln w="0">
+            <a:noFill/>
+          </a:ln>
+        </p:spPr>
+      </p:sp>
+      <p:sp>
+        <p:nvSpPr>
+          <p:cNvPr id="387" name="PlaceHolder 2"/>
           <p:cNvSpPr>
             <a:spLocks noGrp="1"/>
           </p:cNvSpPr>
@@ -459,7 +459,7 @@
         <p:spPr>
           <a:xfrm>
             <a:off x="685800" y="4400640"/>
-            <a:ext cx="5486040" cy="3600000"/>
+            <a:ext cx="5485680" cy="3599640"/>
           </a:xfrm>
           <a:prstGeom prst="rect">
             <a:avLst/>
@@ -490,7 +490,7 @@
       </p:sp>
       <p:sp>
         <p:nvSpPr>
-          <p:cNvPr id="407" name="PlaceHolder 3"/>
+          <p:cNvPr id="388" name="PlaceHolder 3"/>
           <p:cNvSpPr>
             <a:spLocks noGrp="1"/>
           </p:cNvSpPr>
@@ -501,7 +501,7 @@
         <p:spPr>
           <a:xfrm>
             <a:off x="3884760" y="8685360"/>
-            <a:ext cx="2971440" cy="458280"/>
+            <a:ext cx="2971080" cy="457920"/>
           </a:xfrm>
           <a:prstGeom prst="rect">
             <a:avLst/>
@@ -521,6 +521,9 @@
                 <a:spcPct val="100000"/>
               </a:lnSpc>
               <a:buNone/>
+              <a:tabLst>
+                <a:tab pos="0" algn="l"/>
+              </a:tabLst>
               <a:defRPr lang="en-US" sz="1200" b="0" u="none" strike="noStrike">
                 <a:solidFill>
                   <a:schemeClr val="dk1"/>
@@ -538,8 +541,11 @@
                 <a:spcPct val="100000"/>
               </a:lnSpc>
               <a:buNone/>
-            </a:pPr>
-            <a:fld id="{794DEEEE-CED7-4BD7-99C0-ADA8A87F6D63}" type="slidenum">
+              <a:tabLst>
+                <a:tab pos="0" algn="l"/>
+              </a:tabLst>
+            </a:pPr>
+            <a:fld id="{5404E5B1-DC2D-4C06-9C68-74B89AB61527}" type="slidenum">
               <a:rPr lang="en-US" sz="1200" b="0" u="none" strike="noStrike">
                 <a:solidFill>
                   <a:schemeClr val="dk1"/>
@@ -549,7 +555,7 @@
                 <a:latin typeface="+mn-lt"/>
                 <a:ea typeface="+mn-ea"/>
               </a:rPr>
-              <a:t>15</a:t>
+              <a:t>&lt;number&gt;</a:t>
             </a:fld>
             <a:endParaRPr lang="en-US" sz="1200" b="0" u="none" strike="noStrike">
               <a:solidFill>
@@ -586,7 +592,7 @@
       </p:grpSpPr>
       <p:sp>
         <p:nvSpPr>
-          <p:cNvPr id="432" name="PlaceHolder 1"/>
+          <p:cNvPr id="413" name="PlaceHolder 1"/>
           <p:cNvSpPr>
             <a:spLocks noGrp="1"/>
           </p:cNvSpPr>
@@ -597,19 +603,19 @@
         <p:spPr>
           <a:xfrm>
             <a:off x="685800" y="1143000"/>
-            <a:ext cx="5486040" cy="3085920"/>
-          </a:xfrm>
-          <a:prstGeom prst="rect">
-            <a:avLst/>
-          </a:prstGeom>
-          <a:ln w="0">
-            <a:noFill/>
-          </a:ln>
-        </p:spPr>
-      </p:sp>
-      <p:sp>
-        <p:nvSpPr>
-          <p:cNvPr id="433" name="PlaceHolder 2"/>
+            <a:ext cx="5485680" cy="3085560"/>
+          </a:xfrm>
+          <a:prstGeom prst="rect">
+            <a:avLst/>
+          </a:prstGeom>
+          <a:ln w="0">
+            <a:noFill/>
+          </a:ln>
+        </p:spPr>
+      </p:sp>
+      <p:sp>
+        <p:nvSpPr>
+          <p:cNvPr id="414" name="PlaceHolder 2"/>
           <p:cNvSpPr>
             <a:spLocks noGrp="1"/>
           </p:cNvSpPr>
@@ -620,7 +626,7 @@
         <p:spPr>
           <a:xfrm>
             <a:off x="685800" y="4400640"/>
-            <a:ext cx="5486040" cy="3600000"/>
+            <a:ext cx="5485680" cy="3599640"/>
           </a:xfrm>
           <a:prstGeom prst="rect">
             <a:avLst/>
@@ -651,7 +657,7 @@
       </p:sp>
       <p:sp>
         <p:nvSpPr>
-          <p:cNvPr id="434" name="PlaceHolder 3"/>
+          <p:cNvPr id="415" name="PlaceHolder 3"/>
           <p:cNvSpPr>
             <a:spLocks noGrp="1"/>
           </p:cNvSpPr>
@@ -662,7 +668,7 @@
         <p:spPr>
           <a:xfrm>
             <a:off x="3884760" y="8685360"/>
-            <a:ext cx="2971440" cy="458280"/>
+            <a:ext cx="2971080" cy="457920"/>
           </a:xfrm>
           <a:prstGeom prst="rect">
             <a:avLst/>
@@ -682,6 +688,9 @@
                 <a:spcPct val="100000"/>
               </a:lnSpc>
               <a:buNone/>
+              <a:tabLst>
+                <a:tab pos="0" algn="l"/>
+              </a:tabLst>
               <a:defRPr lang="en-US" sz="1200" b="0" u="none" strike="noStrike">
                 <a:solidFill>
                   <a:schemeClr val="dk1"/>
@@ -699,8 +708,11 @@
                 <a:spcPct val="100000"/>
               </a:lnSpc>
               <a:buNone/>
-            </a:pPr>
-            <a:fld id="{28D32D06-03F6-48E5-83BF-ED2E2DF4F580}" type="slidenum">
+              <a:tabLst>
+                <a:tab pos="0" algn="l"/>
+              </a:tabLst>
+            </a:pPr>
+            <a:fld id="{74BF3CB6-85F5-479B-8080-7FA1EED9ACEB}" type="slidenum">
               <a:rPr lang="en-US" sz="1200" b="0" u="none" strike="noStrike">
                 <a:solidFill>
                   <a:schemeClr val="dk1"/>
@@ -710,7 +722,7 @@
                 <a:latin typeface="+mn-lt"/>
                 <a:ea typeface="+mn-ea"/>
               </a:rPr>
-              <a:t>15</a:t>
+              <a:t>&lt;number&gt;</a:t>
             </a:fld>
             <a:endParaRPr lang="en-US" sz="1200" b="0" u="none" strike="noStrike">
               <a:solidFill>
@@ -747,7 +759,7 @@
       </p:grpSpPr>
       <p:sp>
         <p:nvSpPr>
-          <p:cNvPr id="435" name="PlaceHolder 1"/>
+          <p:cNvPr id="416" name="PlaceHolder 1"/>
           <p:cNvSpPr>
             <a:spLocks noGrp="1"/>
           </p:cNvSpPr>
@@ -758,19 +770,19 @@
         <p:spPr>
           <a:xfrm>
             <a:off x="685800" y="1143000"/>
-            <a:ext cx="5486040" cy="3085920"/>
-          </a:xfrm>
-          <a:prstGeom prst="rect">
-            <a:avLst/>
-          </a:prstGeom>
-          <a:ln w="0">
-            <a:noFill/>
-          </a:ln>
-        </p:spPr>
-      </p:sp>
-      <p:sp>
-        <p:nvSpPr>
-          <p:cNvPr id="436" name="PlaceHolder 2"/>
+            <a:ext cx="5485680" cy="3085560"/>
+          </a:xfrm>
+          <a:prstGeom prst="rect">
+            <a:avLst/>
+          </a:prstGeom>
+          <a:ln w="0">
+            <a:noFill/>
+          </a:ln>
+        </p:spPr>
+      </p:sp>
+      <p:sp>
+        <p:nvSpPr>
+          <p:cNvPr id="417" name="PlaceHolder 2"/>
           <p:cNvSpPr>
             <a:spLocks noGrp="1"/>
           </p:cNvSpPr>
@@ -781,7 +793,7 @@
         <p:spPr>
           <a:xfrm>
             <a:off x="685800" y="4400640"/>
-            <a:ext cx="5486040" cy="3600000"/>
+            <a:ext cx="5485680" cy="3599640"/>
           </a:xfrm>
           <a:prstGeom prst="rect">
             <a:avLst/>
@@ -812,7 +824,7 @@
       </p:sp>
       <p:sp>
         <p:nvSpPr>
-          <p:cNvPr id="437" name="PlaceHolder 3"/>
+          <p:cNvPr id="418" name="PlaceHolder 3"/>
           <p:cNvSpPr>
             <a:spLocks noGrp="1"/>
           </p:cNvSpPr>
@@ -823,7 +835,7 @@
         <p:spPr>
           <a:xfrm>
             <a:off x="3884760" y="8685360"/>
-            <a:ext cx="2971440" cy="458280"/>
+            <a:ext cx="2971080" cy="457920"/>
           </a:xfrm>
           <a:prstGeom prst="rect">
             <a:avLst/>
@@ -843,6 +855,9 @@
                 <a:spcPct val="100000"/>
               </a:lnSpc>
               <a:buNone/>
+              <a:tabLst>
+                <a:tab pos="0" algn="l"/>
+              </a:tabLst>
               <a:defRPr lang="en-US" sz="1200" b="0" u="none" strike="noStrike">
                 <a:solidFill>
                   <a:schemeClr val="dk1"/>
@@ -860,8 +875,11 @@
                 <a:spcPct val="100000"/>
               </a:lnSpc>
               <a:buNone/>
-            </a:pPr>
-            <a:fld id="{2FF4911E-B8CC-4221-9E79-D4F300391376}" type="slidenum">
+              <a:tabLst>
+                <a:tab pos="0" algn="l"/>
+              </a:tabLst>
+            </a:pPr>
+            <a:fld id="{3C469F85-AB34-4CF9-B630-2621E1DE09B7}" type="slidenum">
               <a:rPr lang="en-US" sz="1200" b="0" u="none" strike="noStrike">
                 <a:solidFill>
                   <a:schemeClr val="dk1"/>
@@ -871,7 +889,7 @@
                 <a:latin typeface="+mn-lt"/>
                 <a:ea typeface="+mn-ea"/>
               </a:rPr>
-              <a:t>15</a:t>
+              <a:t>&lt;number&gt;</a:t>
             </a:fld>
             <a:endParaRPr lang="en-US" sz="1200" b="0" u="none" strike="noStrike">
               <a:solidFill>
@@ -908,7 +926,7 @@
       </p:grpSpPr>
       <p:sp>
         <p:nvSpPr>
-          <p:cNvPr id="438" name="PlaceHolder 1"/>
+          <p:cNvPr id="419" name="PlaceHolder 1"/>
           <p:cNvSpPr>
             <a:spLocks noGrp="1"/>
           </p:cNvSpPr>
@@ -919,19 +937,19 @@
         <p:spPr>
           <a:xfrm>
             <a:off x="685800" y="1143000"/>
-            <a:ext cx="5486040" cy="3085920"/>
-          </a:xfrm>
-          <a:prstGeom prst="rect">
-            <a:avLst/>
-          </a:prstGeom>
-          <a:ln w="0">
-            <a:noFill/>
-          </a:ln>
-        </p:spPr>
-      </p:sp>
-      <p:sp>
-        <p:nvSpPr>
-          <p:cNvPr id="439" name="PlaceHolder 2"/>
+            <a:ext cx="5485680" cy="3085560"/>
+          </a:xfrm>
+          <a:prstGeom prst="rect">
+            <a:avLst/>
+          </a:prstGeom>
+          <a:ln w="0">
+            <a:noFill/>
+          </a:ln>
+        </p:spPr>
+      </p:sp>
+      <p:sp>
+        <p:nvSpPr>
+          <p:cNvPr id="420" name="PlaceHolder 2"/>
           <p:cNvSpPr>
             <a:spLocks noGrp="1"/>
           </p:cNvSpPr>
@@ -942,7 +960,7 @@
         <p:spPr>
           <a:xfrm>
             <a:off x="685800" y="4400640"/>
-            <a:ext cx="5486040" cy="3600000"/>
+            <a:ext cx="5485680" cy="3599640"/>
           </a:xfrm>
           <a:prstGeom prst="rect">
             <a:avLst/>
@@ -973,7 +991,7 @@
       </p:sp>
       <p:sp>
         <p:nvSpPr>
-          <p:cNvPr id="440" name="PlaceHolder 3"/>
+          <p:cNvPr id="421" name="PlaceHolder 3"/>
           <p:cNvSpPr>
             <a:spLocks noGrp="1"/>
           </p:cNvSpPr>
@@ -984,7 +1002,7 @@
         <p:spPr>
           <a:xfrm>
             <a:off x="3884760" y="8685360"/>
-            <a:ext cx="2971440" cy="458280"/>
+            <a:ext cx="2971080" cy="457920"/>
           </a:xfrm>
           <a:prstGeom prst="rect">
             <a:avLst/>
@@ -1004,6 +1022,9 @@
                 <a:spcPct val="100000"/>
               </a:lnSpc>
               <a:buNone/>
+              <a:tabLst>
+                <a:tab pos="0" algn="l"/>
+              </a:tabLst>
               <a:defRPr lang="en-US" sz="1200" b="0" u="none" strike="noStrike">
                 <a:solidFill>
                   <a:schemeClr val="dk1"/>
@@ -1021,8 +1042,11 @@
                 <a:spcPct val="100000"/>
               </a:lnSpc>
               <a:buNone/>
-            </a:pPr>
-            <a:fld id="{B0729449-AAE9-4A49-B8CC-2B2217214503}" type="slidenum">
+              <a:tabLst>
+                <a:tab pos="0" algn="l"/>
+              </a:tabLst>
+            </a:pPr>
+            <a:fld id="{125A80F7-C545-4D0E-901D-80559023B683}" type="slidenum">
               <a:rPr lang="en-US" sz="1200" b="0" u="none" strike="noStrike">
                 <a:solidFill>
                   <a:schemeClr val="dk1"/>
@@ -1032,7 +1056,7 @@
                 <a:latin typeface="+mn-lt"/>
                 <a:ea typeface="+mn-ea"/>
               </a:rPr>
-              <a:t>15</a:t>
+              <a:t>&lt;number&gt;</a:t>
             </a:fld>
             <a:endParaRPr lang="en-US" sz="1200" b="0" u="none" strike="noStrike">
               <a:solidFill>
@@ -1069,7 +1093,7 @@
       </p:grpSpPr>
       <p:sp>
         <p:nvSpPr>
-          <p:cNvPr id="441" name="PlaceHolder 1"/>
+          <p:cNvPr id="422" name="PlaceHolder 1"/>
           <p:cNvSpPr>
             <a:spLocks noGrp="1"/>
           </p:cNvSpPr>
@@ -1080,19 +1104,19 @@
         <p:spPr>
           <a:xfrm>
             <a:off x="685800" y="1143000"/>
-            <a:ext cx="5486040" cy="3085920"/>
-          </a:xfrm>
-          <a:prstGeom prst="rect">
-            <a:avLst/>
-          </a:prstGeom>
-          <a:ln w="0">
-            <a:noFill/>
-          </a:ln>
-        </p:spPr>
-      </p:sp>
-      <p:sp>
-        <p:nvSpPr>
-          <p:cNvPr id="442" name="PlaceHolder 2"/>
+            <a:ext cx="5485680" cy="3085560"/>
+          </a:xfrm>
+          <a:prstGeom prst="rect">
+            <a:avLst/>
+          </a:prstGeom>
+          <a:ln w="0">
+            <a:noFill/>
+          </a:ln>
+        </p:spPr>
+      </p:sp>
+      <p:sp>
+        <p:nvSpPr>
+          <p:cNvPr id="423" name="PlaceHolder 2"/>
           <p:cNvSpPr>
             <a:spLocks noGrp="1"/>
           </p:cNvSpPr>
@@ -1103,7 +1127,7 @@
         <p:spPr>
           <a:xfrm>
             <a:off x="685800" y="4400640"/>
-            <a:ext cx="5486040" cy="3600000"/>
+            <a:ext cx="5485680" cy="3599640"/>
           </a:xfrm>
           <a:prstGeom prst="rect">
             <a:avLst/>
@@ -1134,7 +1158,7 @@
       </p:sp>
       <p:sp>
         <p:nvSpPr>
-          <p:cNvPr id="443" name="PlaceHolder 3"/>
+          <p:cNvPr id="424" name="PlaceHolder 3"/>
           <p:cNvSpPr>
             <a:spLocks noGrp="1"/>
           </p:cNvSpPr>
@@ -1145,7 +1169,7 @@
         <p:spPr>
           <a:xfrm>
             <a:off x="3884760" y="8685360"/>
-            <a:ext cx="2971440" cy="458280"/>
+            <a:ext cx="2971080" cy="457920"/>
           </a:xfrm>
           <a:prstGeom prst="rect">
             <a:avLst/>
@@ -1165,6 +1189,9 @@
                 <a:spcPct val="100000"/>
               </a:lnSpc>
               <a:buNone/>
+              <a:tabLst>
+                <a:tab pos="0" algn="l"/>
+              </a:tabLst>
               <a:defRPr lang="en-US" sz="1200" b="0" u="none" strike="noStrike">
                 <a:solidFill>
                   <a:schemeClr val="dk1"/>
@@ -1182,8 +1209,11 @@
                 <a:spcPct val="100000"/>
               </a:lnSpc>
               <a:buNone/>
-            </a:pPr>
-            <a:fld id="{A305766C-BCE6-41EF-95A7-9290F32E6F5F}" type="slidenum">
+              <a:tabLst>
+                <a:tab pos="0" algn="l"/>
+              </a:tabLst>
+            </a:pPr>
+            <a:fld id="{6F8705F9-6E97-41DF-9869-1943F9F3BDE2}" type="slidenum">
               <a:rPr lang="en-US" sz="1200" b="0" u="none" strike="noStrike">
                 <a:solidFill>
                   <a:schemeClr val="dk1"/>
@@ -1193,7 +1223,7 @@
                 <a:latin typeface="+mn-lt"/>
                 <a:ea typeface="+mn-ea"/>
               </a:rPr>
-              <a:t>15</a:t>
+              <a:t>&lt;number&gt;</a:t>
             </a:fld>
             <a:endParaRPr lang="en-US" sz="1200" b="0" u="none" strike="noStrike">
               <a:solidFill>
@@ -1230,7 +1260,7 @@
       </p:grpSpPr>
       <p:sp>
         <p:nvSpPr>
-          <p:cNvPr id="444" name="PlaceHolder 1"/>
+          <p:cNvPr id="425" name="PlaceHolder 1"/>
           <p:cNvSpPr>
             <a:spLocks noGrp="1"/>
           </p:cNvSpPr>
@@ -1241,19 +1271,19 @@
         <p:spPr>
           <a:xfrm>
             <a:off x="685800" y="1143000"/>
-            <a:ext cx="5486040" cy="3085920"/>
-          </a:xfrm>
-          <a:prstGeom prst="rect">
-            <a:avLst/>
-          </a:prstGeom>
-          <a:ln w="0">
-            <a:noFill/>
-          </a:ln>
-        </p:spPr>
-      </p:sp>
-      <p:sp>
-        <p:nvSpPr>
-          <p:cNvPr id="445" name="PlaceHolder 2"/>
+            <a:ext cx="5485680" cy="3085560"/>
+          </a:xfrm>
+          <a:prstGeom prst="rect">
+            <a:avLst/>
+          </a:prstGeom>
+          <a:ln w="0">
+            <a:noFill/>
+          </a:ln>
+        </p:spPr>
+      </p:sp>
+      <p:sp>
+        <p:nvSpPr>
+          <p:cNvPr id="426" name="PlaceHolder 2"/>
           <p:cNvSpPr>
             <a:spLocks noGrp="1"/>
           </p:cNvSpPr>
@@ -1264,7 +1294,7 @@
         <p:spPr>
           <a:xfrm>
             <a:off x="685800" y="4400640"/>
-            <a:ext cx="5486040" cy="3600000"/>
+            <a:ext cx="5485680" cy="3599640"/>
           </a:xfrm>
           <a:prstGeom prst="rect">
             <a:avLst/>
@@ -1295,7 +1325,7 @@
       </p:sp>
       <p:sp>
         <p:nvSpPr>
-          <p:cNvPr id="446" name="PlaceHolder 3"/>
+          <p:cNvPr id="427" name="PlaceHolder 3"/>
           <p:cNvSpPr>
             <a:spLocks noGrp="1"/>
           </p:cNvSpPr>
@@ -1306,7 +1336,7 @@
         <p:spPr>
           <a:xfrm>
             <a:off x="3884760" y="8685360"/>
-            <a:ext cx="2971440" cy="458280"/>
+            <a:ext cx="2971080" cy="457920"/>
           </a:xfrm>
           <a:prstGeom prst="rect">
             <a:avLst/>
@@ -1326,6 +1356,9 @@
                 <a:spcPct val="100000"/>
               </a:lnSpc>
               <a:buNone/>
+              <a:tabLst>
+                <a:tab pos="0" algn="l"/>
+              </a:tabLst>
               <a:defRPr lang="en-US" sz="1200" b="0" u="none" strike="noStrike">
                 <a:solidFill>
                   <a:schemeClr val="dk1"/>
@@ -1343,8 +1376,11 @@
                 <a:spcPct val="100000"/>
               </a:lnSpc>
               <a:buNone/>
-            </a:pPr>
-            <a:fld id="{4C7C3974-56F8-430B-A9BE-0EED53D9DB2D}" type="slidenum">
+              <a:tabLst>
+                <a:tab pos="0" algn="l"/>
+              </a:tabLst>
+            </a:pPr>
+            <a:fld id="{E1CBFD80-33EC-4C34-BFAA-3EFAABF7B73E}" type="slidenum">
               <a:rPr lang="en-US" sz="1200" b="0" u="none" strike="noStrike">
                 <a:solidFill>
                   <a:schemeClr val="dk1"/>
@@ -1354,7 +1390,7 @@
                 <a:latin typeface="+mn-lt"/>
                 <a:ea typeface="+mn-ea"/>
               </a:rPr>
-              <a:t>15</a:t>
+              <a:t>&lt;number&gt;</a:t>
             </a:fld>
             <a:endParaRPr lang="en-US" sz="1200" b="0" u="none" strike="noStrike">
               <a:solidFill>
@@ -1391,7 +1427,7 @@
       </p:grpSpPr>
       <p:sp>
         <p:nvSpPr>
-          <p:cNvPr id="447" name="PlaceHolder 1"/>
+          <p:cNvPr id="428" name="PlaceHolder 1"/>
           <p:cNvSpPr>
             <a:spLocks noGrp="1"/>
           </p:cNvSpPr>
@@ -1402,19 +1438,19 @@
         <p:spPr>
           <a:xfrm>
             <a:off x="685800" y="1143000"/>
-            <a:ext cx="5486040" cy="3085920"/>
-          </a:xfrm>
-          <a:prstGeom prst="rect">
-            <a:avLst/>
-          </a:prstGeom>
-          <a:ln w="0">
-            <a:noFill/>
-          </a:ln>
-        </p:spPr>
-      </p:sp>
-      <p:sp>
-        <p:nvSpPr>
-          <p:cNvPr id="448" name="PlaceHolder 2"/>
+            <a:ext cx="5485680" cy="3085560"/>
+          </a:xfrm>
+          <a:prstGeom prst="rect">
+            <a:avLst/>
+          </a:prstGeom>
+          <a:ln w="0">
+            <a:noFill/>
+          </a:ln>
+        </p:spPr>
+      </p:sp>
+      <p:sp>
+        <p:nvSpPr>
+          <p:cNvPr id="429" name="PlaceHolder 2"/>
           <p:cNvSpPr>
             <a:spLocks noGrp="1"/>
           </p:cNvSpPr>
@@ -1425,7 +1461,7 @@
         <p:spPr>
           <a:xfrm>
             <a:off x="685800" y="4400640"/>
-            <a:ext cx="5486040" cy="3600000"/>
+            <a:ext cx="5485680" cy="3599640"/>
           </a:xfrm>
           <a:prstGeom prst="rect">
             <a:avLst/>
@@ -1456,7 +1492,7 @@
       </p:sp>
       <p:sp>
         <p:nvSpPr>
-          <p:cNvPr id="449" name="PlaceHolder 3"/>
+          <p:cNvPr id="430" name="PlaceHolder 3"/>
           <p:cNvSpPr>
             <a:spLocks noGrp="1"/>
           </p:cNvSpPr>
@@ -1467,7 +1503,7 @@
         <p:spPr>
           <a:xfrm>
             <a:off x="3884760" y="8685360"/>
-            <a:ext cx="2971440" cy="458280"/>
+            <a:ext cx="2971080" cy="457920"/>
           </a:xfrm>
           <a:prstGeom prst="rect">
             <a:avLst/>
@@ -1487,6 +1523,9 @@
                 <a:spcPct val="100000"/>
               </a:lnSpc>
               <a:buNone/>
+              <a:tabLst>
+                <a:tab pos="0" algn="l"/>
+              </a:tabLst>
               <a:defRPr lang="en-US" sz="1200" b="0" u="none" strike="noStrike">
                 <a:solidFill>
                   <a:schemeClr val="dk1"/>
@@ -1504,8 +1543,11 @@
                 <a:spcPct val="100000"/>
               </a:lnSpc>
               <a:buNone/>
-            </a:pPr>
-            <a:fld id="{7771A789-F15F-4B4D-9A34-B5B3847A3080}" type="slidenum">
+              <a:tabLst>
+                <a:tab pos="0" algn="l"/>
+              </a:tabLst>
+            </a:pPr>
+            <a:fld id="{C1140CE3-7EF7-466A-A283-B31ECBB54947}" type="slidenum">
               <a:rPr lang="en-US" sz="1200" b="0" u="none" strike="noStrike">
                 <a:solidFill>
                   <a:schemeClr val="dk1"/>
@@ -1515,7 +1557,7 @@
                 <a:latin typeface="+mn-lt"/>
                 <a:ea typeface="+mn-ea"/>
               </a:rPr>
-              <a:t>15</a:t>
+              <a:t>&lt;number&gt;</a:t>
             </a:fld>
             <a:endParaRPr lang="en-US" sz="1200" b="0" u="none" strike="noStrike">
               <a:solidFill>
@@ -1552,7 +1594,7 @@
       </p:grpSpPr>
       <p:sp>
         <p:nvSpPr>
-          <p:cNvPr id="408" name="PlaceHolder 1"/>
+          <p:cNvPr id="389" name="PlaceHolder 1"/>
           <p:cNvSpPr>
             <a:spLocks noGrp="1"/>
           </p:cNvSpPr>
@@ -1563,19 +1605,19 @@
         <p:spPr>
           <a:xfrm>
             <a:off x="685800" y="1143000"/>
-            <a:ext cx="5486040" cy="3085920"/>
-          </a:xfrm>
-          <a:prstGeom prst="rect">
-            <a:avLst/>
-          </a:prstGeom>
-          <a:ln w="0">
-            <a:noFill/>
-          </a:ln>
-        </p:spPr>
-      </p:sp>
-      <p:sp>
-        <p:nvSpPr>
-          <p:cNvPr id="409" name="PlaceHolder 2"/>
+            <a:ext cx="5485680" cy="3085560"/>
+          </a:xfrm>
+          <a:prstGeom prst="rect">
+            <a:avLst/>
+          </a:prstGeom>
+          <a:ln w="0">
+            <a:noFill/>
+          </a:ln>
+        </p:spPr>
+      </p:sp>
+      <p:sp>
+        <p:nvSpPr>
+          <p:cNvPr id="390" name="PlaceHolder 2"/>
           <p:cNvSpPr>
             <a:spLocks noGrp="1"/>
           </p:cNvSpPr>
@@ -1586,7 +1628,7 @@
         <p:spPr>
           <a:xfrm>
             <a:off x="685800" y="4400640"/>
-            <a:ext cx="5486040" cy="3600000"/>
+            <a:ext cx="5485680" cy="3599640"/>
           </a:xfrm>
           <a:prstGeom prst="rect">
             <a:avLst/>
@@ -1617,7 +1659,7 @@
       </p:sp>
       <p:sp>
         <p:nvSpPr>
-          <p:cNvPr id="410" name="PlaceHolder 3"/>
+          <p:cNvPr id="391" name="PlaceHolder 3"/>
           <p:cNvSpPr>
             <a:spLocks noGrp="1"/>
           </p:cNvSpPr>
@@ -1628,7 +1670,7 @@
         <p:spPr>
           <a:xfrm>
             <a:off x="3884760" y="8685360"/>
-            <a:ext cx="2971440" cy="458280"/>
+            <a:ext cx="2971080" cy="457920"/>
           </a:xfrm>
           <a:prstGeom prst="rect">
             <a:avLst/>
@@ -1648,6 +1690,9 @@
                 <a:spcPct val="100000"/>
               </a:lnSpc>
               <a:buNone/>
+              <a:tabLst>
+                <a:tab pos="0" algn="l"/>
+              </a:tabLst>
               <a:defRPr lang="en-US" sz="1200" b="0" u="none" strike="noStrike">
                 <a:solidFill>
                   <a:schemeClr val="dk1"/>
@@ -1665,8 +1710,11 @@
                 <a:spcPct val="100000"/>
               </a:lnSpc>
               <a:buNone/>
-            </a:pPr>
-            <a:fld id="{B05CFD48-FB1D-466F-8AF1-FB81FA9C76B5}" type="slidenum">
+              <a:tabLst>
+                <a:tab pos="0" algn="l"/>
+              </a:tabLst>
+            </a:pPr>
+            <a:fld id="{4CF39DCB-BB9E-46DB-8AEE-B594C79F2AF6}" type="slidenum">
               <a:rPr lang="en-US" sz="1200" b="0" u="none" strike="noStrike">
                 <a:solidFill>
                   <a:schemeClr val="dk1"/>
@@ -1676,7 +1724,7 @@
                 <a:latin typeface="+mn-lt"/>
                 <a:ea typeface="+mn-ea"/>
               </a:rPr>
-              <a:t>15</a:t>
+              <a:t>&lt;number&gt;</a:t>
             </a:fld>
             <a:endParaRPr lang="en-US" sz="1200" b="0" u="none" strike="noStrike">
               <a:solidFill>
@@ -1713,7 +1761,7 @@
       </p:grpSpPr>
       <p:sp>
         <p:nvSpPr>
-          <p:cNvPr id="411" name="PlaceHolder 1"/>
+          <p:cNvPr id="392" name="PlaceHolder 1"/>
           <p:cNvSpPr>
             <a:spLocks noGrp="1"/>
           </p:cNvSpPr>
@@ -1724,19 +1772,19 @@
         <p:spPr>
           <a:xfrm>
             <a:off x="685800" y="1143000"/>
-            <a:ext cx="5486040" cy="3085920"/>
-          </a:xfrm>
-          <a:prstGeom prst="rect">
-            <a:avLst/>
-          </a:prstGeom>
-          <a:ln w="0">
-            <a:noFill/>
-          </a:ln>
-        </p:spPr>
-      </p:sp>
-      <p:sp>
-        <p:nvSpPr>
-          <p:cNvPr id="412" name="PlaceHolder 2"/>
+            <a:ext cx="5485680" cy="3085560"/>
+          </a:xfrm>
+          <a:prstGeom prst="rect">
+            <a:avLst/>
+          </a:prstGeom>
+          <a:ln w="0">
+            <a:noFill/>
+          </a:ln>
+        </p:spPr>
+      </p:sp>
+      <p:sp>
+        <p:nvSpPr>
+          <p:cNvPr id="393" name="PlaceHolder 2"/>
           <p:cNvSpPr>
             <a:spLocks noGrp="1"/>
           </p:cNvSpPr>
@@ -1747,7 +1795,7 @@
         <p:spPr>
           <a:xfrm>
             <a:off x="685800" y="4400640"/>
-            <a:ext cx="5486040" cy="3600000"/>
+            <a:ext cx="5485680" cy="3599640"/>
           </a:xfrm>
           <a:prstGeom prst="rect">
             <a:avLst/>
@@ -1778,7 +1826,7 @@
       </p:sp>
       <p:sp>
         <p:nvSpPr>
-          <p:cNvPr id="413" name="PlaceHolder 3"/>
+          <p:cNvPr id="394" name="PlaceHolder 3"/>
           <p:cNvSpPr>
             <a:spLocks noGrp="1"/>
           </p:cNvSpPr>
@@ -1789,7 +1837,7 @@
         <p:spPr>
           <a:xfrm>
             <a:off x="3884760" y="8685360"/>
-            <a:ext cx="2971440" cy="458280"/>
+            <a:ext cx="2971080" cy="457920"/>
           </a:xfrm>
           <a:prstGeom prst="rect">
             <a:avLst/>
@@ -1809,6 +1857,9 @@
                 <a:spcPct val="100000"/>
               </a:lnSpc>
               <a:buNone/>
+              <a:tabLst>
+                <a:tab pos="0" algn="l"/>
+              </a:tabLst>
               <a:defRPr lang="en-US" sz="1200" b="0" u="none" strike="noStrike">
                 <a:solidFill>
                   <a:schemeClr val="dk1"/>
@@ -1826,8 +1877,11 @@
                 <a:spcPct val="100000"/>
               </a:lnSpc>
               <a:buNone/>
-            </a:pPr>
-            <a:fld id="{A1493834-E811-4880-8CE9-85764F970DEA}" type="slidenum">
+              <a:tabLst>
+                <a:tab pos="0" algn="l"/>
+              </a:tabLst>
+            </a:pPr>
+            <a:fld id="{5AB33575-FA41-4EC5-B1BD-6E344A6AF8BC}" type="slidenum">
               <a:rPr lang="en-US" sz="1200" b="0" u="none" strike="noStrike">
                 <a:solidFill>
                   <a:schemeClr val="dk1"/>
@@ -1837,7 +1891,7 @@
                 <a:latin typeface="+mn-lt"/>
                 <a:ea typeface="+mn-ea"/>
               </a:rPr>
-              <a:t>15</a:t>
+              <a:t>&lt;number&gt;</a:t>
             </a:fld>
             <a:endParaRPr lang="en-US" sz="1200" b="0" u="none" strike="noStrike">
               <a:solidFill>
@@ -1874,7 +1928,7 @@
       </p:grpSpPr>
       <p:sp>
         <p:nvSpPr>
-          <p:cNvPr id="414" name="PlaceHolder 1"/>
+          <p:cNvPr id="395" name="PlaceHolder 1"/>
           <p:cNvSpPr>
             <a:spLocks noGrp="1"/>
           </p:cNvSpPr>
@@ -1885,19 +1939,19 @@
         <p:spPr>
           <a:xfrm>
             <a:off x="685800" y="1143000"/>
-            <a:ext cx="5486040" cy="3085920"/>
-          </a:xfrm>
-          <a:prstGeom prst="rect">
-            <a:avLst/>
-          </a:prstGeom>
-          <a:ln w="0">
-            <a:noFill/>
-          </a:ln>
-        </p:spPr>
-      </p:sp>
-      <p:sp>
-        <p:nvSpPr>
-          <p:cNvPr id="415" name="PlaceHolder 2"/>
+            <a:ext cx="5485680" cy="3085560"/>
+          </a:xfrm>
+          <a:prstGeom prst="rect">
+            <a:avLst/>
+          </a:prstGeom>
+          <a:ln w="0">
+            <a:noFill/>
+          </a:ln>
+        </p:spPr>
+      </p:sp>
+      <p:sp>
+        <p:nvSpPr>
+          <p:cNvPr id="396" name="PlaceHolder 2"/>
           <p:cNvSpPr>
             <a:spLocks noGrp="1"/>
           </p:cNvSpPr>
@@ -1908,7 +1962,7 @@
         <p:spPr>
           <a:xfrm>
             <a:off x="685800" y="4400640"/>
-            <a:ext cx="5486040" cy="3600000"/>
+            <a:ext cx="5485680" cy="3599640"/>
           </a:xfrm>
           <a:prstGeom prst="rect">
             <a:avLst/>
@@ -1939,7 +1993,7 @@
       </p:sp>
       <p:sp>
         <p:nvSpPr>
-          <p:cNvPr id="416" name="PlaceHolder 3"/>
+          <p:cNvPr id="397" name="PlaceHolder 3"/>
           <p:cNvSpPr>
             <a:spLocks noGrp="1"/>
           </p:cNvSpPr>
@@ -1950,7 +2004,7 @@
         <p:spPr>
           <a:xfrm>
             <a:off x="3884760" y="8685360"/>
-            <a:ext cx="2971440" cy="458280"/>
+            <a:ext cx="2971080" cy="457920"/>
           </a:xfrm>
           <a:prstGeom prst="rect">
             <a:avLst/>
@@ -1970,6 +2024,9 @@
                 <a:spcPct val="100000"/>
               </a:lnSpc>
               <a:buNone/>
+              <a:tabLst>
+                <a:tab pos="0" algn="l"/>
+              </a:tabLst>
               <a:defRPr lang="en-US" sz="1200" b="0" u="none" strike="noStrike">
                 <a:solidFill>
                   <a:schemeClr val="dk1"/>
@@ -1987,8 +2044,11 @@
                 <a:spcPct val="100000"/>
               </a:lnSpc>
               <a:buNone/>
-            </a:pPr>
-            <a:fld id="{CAB3BD25-2880-4F14-942A-29BDB212E8E1}" type="slidenum">
+              <a:tabLst>
+                <a:tab pos="0" algn="l"/>
+              </a:tabLst>
+            </a:pPr>
+            <a:fld id="{75D39239-67A5-4C8E-9D5C-2DBFE31F6F1C}" type="slidenum">
               <a:rPr lang="en-US" sz="1200" b="0" u="none" strike="noStrike">
                 <a:solidFill>
                   <a:schemeClr val="dk1"/>
@@ -1998,7 +2058,7 @@
                 <a:latin typeface="+mn-lt"/>
                 <a:ea typeface="+mn-ea"/>
               </a:rPr>
-              <a:t>15</a:t>
+              <a:t>&lt;number&gt;</a:t>
             </a:fld>
             <a:endParaRPr lang="en-US" sz="1200" b="0" u="none" strike="noStrike">
               <a:solidFill>
@@ -2035,7 +2095,7 @@
       </p:grpSpPr>
       <p:sp>
         <p:nvSpPr>
-          <p:cNvPr id="417" name="PlaceHolder 1"/>
+          <p:cNvPr id="398" name="PlaceHolder 1"/>
           <p:cNvSpPr>
             <a:spLocks noGrp="1"/>
           </p:cNvSpPr>
@@ -2046,19 +2106,19 @@
         <p:spPr>
           <a:xfrm>
             <a:off x="685800" y="1143000"/>
-            <a:ext cx="5486040" cy="3085920"/>
-          </a:xfrm>
-          <a:prstGeom prst="rect">
-            <a:avLst/>
-          </a:prstGeom>
-          <a:ln w="0">
-            <a:noFill/>
-          </a:ln>
-        </p:spPr>
-      </p:sp>
-      <p:sp>
-        <p:nvSpPr>
-          <p:cNvPr id="418" name="PlaceHolder 2"/>
+            <a:ext cx="5485680" cy="3085560"/>
+          </a:xfrm>
+          <a:prstGeom prst="rect">
+            <a:avLst/>
+          </a:prstGeom>
+          <a:ln w="0">
+            <a:noFill/>
+          </a:ln>
+        </p:spPr>
+      </p:sp>
+      <p:sp>
+        <p:nvSpPr>
+          <p:cNvPr id="399" name="PlaceHolder 2"/>
           <p:cNvSpPr>
             <a:spLocks noGrp="1"/>
           </p:cNvSpPr>
@@ -2069,7 +2129,7 @@
         <p:spPr>
           <a:xfrm>
             <a:off x="685800" y="4400640"/>
-            <a:ext cx="5486040" cy="3600000"/>
+            <a:ext cx="5485680" cy="3599640"/>
           </a:xfrm>
           <a:prstGeom prst="rect">
             <a:avLst/>
@@ -2100,7 +2160,7 @@
       </p:sp>
       <p:sp>
         <p:nvSpPr>
-          <p:cNvPr id="419" name="PlaceHolder 3"/>
+          <p:cNvPr id="400" name="PlaceHolder 3"/>
           <p:cNvSpPr>
             <a:spLocks noGrp="1"/>
           </p:cNvSpPr>
@@ -2111,7 +2171,7 @@
         <p:spPr>
           <a:xfrm>
             <a:off x="3884760" y="8685360"/>
-            <a:ext cx="2971440" cy="458280"/>
+            <a:ext cx="2971080" cy="457920"/>
           </a:xfrm>
           <a:prstGeom prst="rect">
             <a:avLst/>
@@ -2131,6 +2191,9 @@
                 <a:spcPct val="100000"/>
               </a:lnSpc>
               <a:buNone/>
+              <a:tabLst>
+                <a:tab pos="0" algn="l"/>
+              </a:tabLst>
               <a:defRPr lang="en-US" sz="1200" b="0" u="none" strike="noStrike">
                 <a:solidFill>
                   <a:schemeClr val="dk1"/>
@@ -2148,8 +2211,11 @@
                 <a:spcPct val="100000"/>
               </a:lnSpc>
               <a:buNone/>
-            </a:pPr>
-            <a:fld id="{08F70AD8-E5E8-492F-94CE-74B664EE3432}" type="slidenum">
+              <a:tabLst>
+                <a:tab pos="0" algn="l"/>
+              </a:tabLst>
+            </a:pPr>
+            <a:fld id="{DB784E87-0754-4D90-A46B-13380931AF7E}" type="slidenum">
               <a:rPr lang="en-US" sz="1200" b="0" u="none" strike="noStrike">
                 <a:solidFill>
                   <a:schemeClr val="dk1"/>
@@ -2159,7 +2225,7 @@
                 <a:latin typeface="+mn-lt"/>
                 <a:ea typeface="+mn-ea"/>
               </a:rPr>
-              <a:t>15</a:t>
+              <a:t>&lt;number&gt;</a:t>
             </a:fld>
             <a:endParaRPr lang="en-US" sz="1200" b="0" u="none" strike="noStrike">
               <a:solidFill>
@@ -2196,7 +2262,7 @@
       </p:grpSpPr>
       <p:sp>
         <p:nvSpPr>
-          <p:cNvPr id="420" name="PlaceHolder 1"/>
+          <p:cNvPr id="401" name="PlaceHolder 1"/>
           <p:cNvSpPr>
             <a:spLocks noGrp="1"/>
           </p:cNvSpPr>
@@ -2207,19 +2273,19 @@
         <p:spPr>
           <a:xfrm>
             <a:off x="685800" y="1143000"/>
-            <a:ext cx="5486040" cy="3085920"/>
-          </a:xfrm>
-          <a:prstGeom prst="rect">
-            <a:avLst/>
-          </a:prstGeom>
-          <a:ln w="0">
-            <a:noFill/>
-          </a:ln>
-        </p:spPr>
-      </p:sp>
-      <p:sp>
-        <p:nvSpPr>
-          <p:cNvPr id="421" name="PlaceHolder 2"/>
+            <a:ext cx="5485680" cy="3085560"/>
+          </a:xfrm>
+          <a:prstGeom prst="rect">
+            <a:avLst/>
+          </a:prstGeom>
+          <a:ln w="0">
+            <a:noFill/>
+          </a:ln>
+        </p:spPr>
+      </p:sp>
+      <p:sp>
+        <p:nvSpPr>
+          <p:cNvPr id="402" name="PlaceHolder 2"/>
           <p:cNvSpPr>
             <a:spLocks noGrp="1"/>
           </p:cNvSpPr>
@@ -2230,7 +2296,7 @@
         <p:spPr>
           <a:xfrm>
             <a:off x="685800" y="4400640"/>
-            <a:ext cx="5486040" cy="3600000"/>
+            <a:ext cx="5485680" cy="3599640"/>
           </a:xfrm>
           <a:prstGeom prst="rect">
             <a:avLst/>
@@ -2261,7 +2327,7 @@
       </p:sp>
       <p:sp>
         <p:nvSpPr>
-          <p:cNvPr id="422" name="PlaceHolder 3"/>
+          <p:cNvPr id="403" name="PlaceHolder 3"/>
           <p:cNvSpPr>
             <a:spLocks noGrp="1"/>
           </p:cNvSpPr>
@@ -2272,7 +2338,7 @@
         <p:spPr>
           <a:xfrm>
             <a:off x="3884760" y="8685360"/>
-            <a:ext cx="2971440" cy="458280"/>
+            <a:ext cx="2971080" cy="457920"/>
           </a:xfrm>
           <a:prstGeom prst="rect">
             <a:avLst/>
@@ -2292,6 +2358,9 @@
                 <a:spcPct val="100000"/>
               </a:lnSpc>
               <a:buNone/>
+              <a:tabLst>
+                <a:tab pos="0" algn="l"/>
+              </a:tabLst>
               <a:defRPr lang="en-US" sz="1200" b="0" u="none" strike="noStrike">
                 <a:solidFill>
                   <a:schemeClr val="dk1"/>
@@ -2309,8 +2378,11 @@
                 <a:spcPct val="100000"/>
               </a:lnSpc>
               <a:buNone/>
-            </a:pPr>
-            <a:fld id="{552C961E-2B1F-40C2-A557-774AE18E216F}" type="slidenum">
+              <a:tabLst>
+                <a:tab pos="0" algn="l"/>
+              </a:tabLst>
+            </a:pPr>
+            <a:fld id="{C4DC5D4B-DC6C-46E2-B4B1-CB8940AD6952}" type="slidenum">
               <a:rPr lang="en-US" sz="1200" b="0" u="none" strike="noStrike">
                 <a:solidFill>
                   <a:schemeClr val="dk1"/>
@@ -2320,7 +2392,7 @@
                 <a:latin typeface="+mn-lt"/>
                 <a:ea typeface="+mn-ea"/>
               </a:rPr>
-              <a:t>15</a:t>
+              <a:t>&lt;number&gt;</a:t>
             </a:fld>
             <a:endParaRPr lang="en-US" sz="1200" b="0" u="none" strike="noStrike">
               <a:solidFill>
@@ -2357,7 +2429,7 @@
       </p:grpSpPr>
       <p:sp>
         <p:nvSpPr>
-          <p:cNvPr id="423" name="PlaceHolder 1"/>
+          <p:cNvPr id="404" name="PlaceHolder 1"/>
           <p:cNvSpPr>
             <a:spLocks noGrp="1"/>
           </p:cNvSpPr>
@@ -2368,19 +2440,19 @@
         <p:spPr>
           <a:xfrm>
             <a:off x="685800" y="1143000"/>
-            <a:ext cx="5486040" cy="3085920"/>
-          </a:xfrm>
-          <a:prstGeom prst="rect">
-            <a:avLst/>
-          </a:prstGeom>
-          <a:ln w="0">
-            <a:noFill/>
-          </a:ln>
-        </p:spPr>
-      </p:sp>
-      <p:sp>
-        <p:nvSpPr>
-          <p:cNvPr id="424" name="PlaceHolder 2"/>
+            <a:ext cx="5485680" cy="3085560"/>
+          </a:xfrm>
+          <a:prstGeom prst="rect">
+            <a:avLst/>
+          </a:prstGeom>
+          <a:ln w="0">
+            <a:noFill/>
+          </a:ln>
+        </p:spPr>
+      </p:sp>
+      <p:sp>
+        <p:nvSpPr>
+          <p:cNvPr id="405" name="PlaceHolder 2"/>
           <p:cNvSpPr>
             <a:spLocks noGrp="1"/>
           </p:cNvSpPr>
@@ -2391,7 +2463,7 @@
         <p:spPr>
           <a:xfrm>
             <a:off x="685800" y="4400640"/>
-            <a:ext cx="5486040" cy="3600000"/>
+            <a:ext cx="5485680" cy="3599640"/>
           </a:xfrm>
           <a:prstGeom prst="rect">
             <a:avLst/>
@@ -2422,7 +2494,7 @@
       </p:sp>
       <p:sp>
         <p:nvSpPr>
-          <p:cNvPr id="425" name="PlaceHolder 3"/>
+          <p:cNvPr id="406" name="PlaceHolder 3"/>
           <p:cNvSpPr>
             <a:spLocks noGrp="1"/>
           </p:cNvSpPr>
@@ -2433,7 +2505,7 @@
         <p:spPr>
           <a:xfrm>
             <a:off x="3884760" y="8685360"/>
-            <a:ext cx="2971440" cy="458280"/>
+            <a:ext cx="2971080" cy="457920"/>
           </a:xfrm>
           <a:prstGeom prst="rect">
             <a:avLst/>
@@ -2453,6 +2525,9 @@
                 <a:spcPct val="100000"/>
               </a:lnSpc>
               <a:buNone/>
+              <a:tabLst>
+                <a:tab pos="0" algn="l"/>
+              </a:tabLst>
               <a:defRPr lang="en-US" sz="1200" b="0" u="none" strike="noStrike">
                 <a:solidFill>
                   <a:schemeClr val="dk1"/>
@@ -2470,8 +2545,11 @@
                 <a:spcPct val="100000"/>
               </a:lnSpc>
               <a:buNone/>
-            </a:pPr>
-            <a:fld id="{3776B381-4640-43F6-9AC6-666F4D4792D5}" type="slidenum">
+              <a:tabLst>
+                <a:tab pos="0" algn="l"/>
+              </a:tabLst>
+            </a:pPr>
+            <a:fld id="{B7A77B1D-F660-4418-BC8A-0AFFD9641995}" type="slidenum">
               <a:rPr lang="en-US" sz="1200" b="0" u="none" strike="noStrike">
                 <a:solidFill>
                   <a:schemeClr val="dk1"/>
@@ -2481,7 +2559,7 @@
                 <a:latin typeface="+mn-lt"/>
                 <a:ea typeface="+mn-ea"/>
               </a:rPr>
-              <a:t>15</a:t>
+              <a:t>&lt;number&gt;</a:t>
             </a:fld>
             <a:endParaRPr lang="en-US" sz="1200" b="0" u="none" strike="noStrike">
               <a:solidFill>
@@ -2518,7 +2596,7 @@
       </p:grpSpPr>
       <p:sp>
         <p:nvSpPr>
-          <p:cNvPr id="426" name="PlaceHolder 1"/>
+          <p:cNvPr id="407" name="PlaceHolder 1"/>
           <p:cNvSpPr>
             <a:spLocks noGrp="1"/>
           </p:cNvSpPr>
@@ -2529,19 +2607,19 @@
         <p:spPr>
           <a:xfrm>
             <a:off x="685800" y="1143000"/>
-            <a:ext cx="5486040" cy="3085920"/>
-          </a:xfrm>
-          <a:prstGeom prst="rect">
-            <a:avLst/>
-          </a:prstGeom>
-          <a:ln w="0">
-            <a:noFill/>
-          </a:ln>
-        </p:spPr>
-      </p:sp>
-      <p:sp>
-        <p:nvSpPr>
-          <p:cNvPr id="427" name="PlaceHolder 2"/>
+            <a:ext cx="5485680" cy="3085560"/>
+          </a:xfrm>
+          <a:prstGeom prst="rect">
+            <a:avLst/>
+          </a:prstGeom>
+          <a:ln w="0">
+            <a:noFill/>
+          </a:ln>
+        </p:spPr>
+      </p:sp>
+      <p:sp>
+        <p:nvSpPr>
+          <p:cNvPr id="408" name="PlaceHolder 2"/>
           <p:cNvSpPr>
             <a:spLocks noGrp="1"/>
           </p:cNvSpPr>
@@ -2552,7 +2630,7 @@
         <p:spPr>
           <a:xfrm>
             <a:off x="685800" y="4400640"/>
-            <a:ext cx="5486040" cy="3600000"/>
+            <a:ext cx="5485680" cy="3599640"/>
           </a:xfrm>
           <a:prstGeom prst="rect">
             <a:avLst/>
@@ -2583,7 +2661,7 @@
       </p:sp>
       <p:sp>
         <p:nvSpPr>
-          <p:cNvPr id="428" name="PlaceHolder 3"/>
+          <p:cNvPr id="409" name="PlaceHolder 3"/>
           <p:cNvSpPr>
             <a:spLocks noGrp="1"/>
           </p:cNvSpPr>
@@ -2594,7 +2672,7 @@
         <p:spPr>
           <a:xfrm>
             <a:off x="3884760" y="8685360"/>
-            <a:ext cx="2971440" cy="458280"/>
+            <a:ext cx="2971080" cy="457920"/>
           </a:xfrm>
           <a:prstGeom prst="rect">
             <a:avLst/>
@@ -2614,6 +2692,9 @@
                 <a:spcPct val="100000"/>
               </a:lnSpc>
               <a:buNone/>
+              <a:tabLst>
+                <a:tab pos="0" algn="l"/>
+              </a:tabLst>
               <a:defRPr lang="en-US" sz="1200" b="0" u="none" strike="noStrike">
                 <a:solidFill>
                   <a:schemeClr val="dk1"/>
@@ -2631,8 +2712,11 @@
                 <a:spcPct val="100000"/>
               </a:lnSpc>
               <a:buNone/>
-            </a:pPr>
-            <a:fld id="{FACF0882-C46B-4B0A-9357-E11040D52D90}" type="slidenum">
+              <a:tabLst>
+                <a:tab pos="0" algn="l"/>
+              </a:tabLst>
+            </a:pPr>
+            <a:fld id="{95443001-5689-460E-A09D-E7EA1D6A7995}" type="slidenum">
               <a:rPr lang="en-US" sz="1200" b="0" u="none" strike="noStrike">
                 <a:solidFill>
                   <a:schemeClr val="dk1"/>
@@ -2642,7 +2726,7 @@
                 <a:latin typeface="+mn-lt"/>
                 <a:ea typeface="+mn-ea"/>
               </a:rPr>
-              <a:t>15</a:t>
+              <a:t>&lt;number&gt;</a:t>
             </a:fld>
             <a:endParaRPr lang="en-US" sz="1200" b="0" u="none" strike="noStrike">
               <a:solidFill>
@@ -2679,7 +2763,7 @@
       </p:grpSpPr>
       <p:sp>
         <p:nvSpPr>
-          <p:cNvPr id="429" name="PlaceHolder 1"/>
+          <p:cNvPr id="410" name="PlaceHolder 1"/>
           <p:cNvSpPr>
             <a:spLocks noGrp="1"/>
           </p:cNvSpPr>
@@ -2690,19 +2774,19 @@
         <p:spPr>
           <a:xfrm>
             <a:off x="685800" y="1143000"/>
-            <a:ext cx="5486040" cy="3085920"/>
-          </a:xfrm>
-          <a:prstGeom prst="rect">
-            <a:avLst/>
-          </a:prstGeom>
-          <a:ln w="0">
-            <a:noFill/>
-          </a:ln>
-        </p:spPr>
-      </p:sp>
-      <p:sp>
-        <p:nvSpPr>
-          <p:cNvPr id="430" name="PlaceHolder 2"/>
+            <a:ext cx="5485680" cy="3085560"/>
+          </a:xfrm>
+          <a:prstGeom prst="rect">
+            <a:avLst/>
+          </a:prstGeom>
+          <a:ln w="0">
+            <a:noFill/>
+          </a:ln>
+        </p:spPr>
+      </p:sp>
+      <p:sp>
+        <p:nvSpPr>
+          <p:cNvPr id="411" name="PlaceHolder 2"/>
           <p:cNvSpPr>
             <a:spLocks noGrp="1"/>
           </p:cNvSpPr>
@@ -2713,7 +2797,7 @@
         <p:spPr>
           <a:xfrm>
             <a:off x="685800" y="4400640"/>
-            <a:ext cx="5486040" cy="3600000"/>
+            <a:ext cx="5485680" cy="3599640"/>
           </a:xfrm>
           <a:prstGeom prst="rect">
             <a:avLst/>
@@ -2744,7 +2828,7 @@
       </p:sp>
       <p:sp>
         <p:nvSpPr>
-          <p:cNvPr id="431" name="PlaceHolder 3"/>
+          <p:cNvPr id="412" name="PlaceHolder 3"/>
           <p:cNvSpPr>
             <a:spLocks noGrp="1"/>
           </p:cNvSpPr>
@@ -2755,7 +2839,7 @@
         <p:spPr>
           <a:xfrm>
             <a:off x="3884760" y="8685360"/>
-            <a:ext cx="2971440" cy="458280"/>
+            <a:ext cx="2971080" cy="457920"/>
           </a:xfrm>
           <a:prstGeom prst="rect">
             <a:avLst/>
@@ -2775,6 +2859,9 @@
                 <a:spcPct val="100000"/>
               </a:lnSpc>
               <a:buNone/>
+              <a:tabLst>
+                <a:tab pos="0" algn="l"/>
+              </a:tabLst>
               <a:defRPr lang="en-US" sz="1200" b="0" u="none" strike="noStrike">
                 <a:solidFill>
                   <a:schemeClr val="dk1"/>
@@ -2792,8 +2879,11 @@
                 <a:spcPct val="100000"/>
               </a:lnSpc>
               <a:buNone/>
-            </a:pPr>
-            <a:fld id="{BE91095E-7FE9-49AE-B57C-BC80C5C0668B}" type="slidenum">
+              <a:tabLst>
+                <a:tab pos="0" algn="l"/>
+              </a:tabLst>
+            </a:pPr>
+            <a:fld id="{0E5E11D1-C0C8-41DA-91F4-5743C8F4FBE7}" type="slidenum">
               <a:rPr lang="en-US" sz="1200" b="0" u="none" strike="noStrike">
                 <a:solidFill>
                   <a:schemeClr val="dk1"/>
@@ -2803,7 +2893,7 @@
                 <a:latin typeface="+mn-lt"/>
                 <a:ea typeface="+mn-ea"/>
               </a:rPr>
-              <a:t>15</a:t>
+              <a:t>&lt;number&gt;</a:t>
             </a:fld>
             <a:endParaRPr lang="en-US" sz="1200" b="0" u="none" strike="noStrike">
               <a:solidFill>
@@ -2897,6 +2987,9 @@
           <a:lstStyle>
             <a:lvl1pPr indent="0" algn="l">
               <a:buNone/>
+              <a:tabLst>
+                <a:tab pos="0" algn="l"/>
+              </a:tabLst>
               <a:defRPr lang="en-US" sz="1800" b="0" u="none" strike="noStrike">
                 <a:solidFill>
                   <a:schemeClr val="dk1"/>
@@ -2910,6 +3003,9 @@
           <a:p>
             <a:pPr indent="0" algn="l">
               <a:buNone/>
+              <a:tabLst>
+                <a:tab pos="0" algn="l"/>
+              </a:tabLst>
             </a:pPr>
             <a:r>
               <a:rPr lang="en-US" sz="1800" b="0" u="none" strike="noStrike">
@@ -3096,7 +3192,7 @@
             </a:lvl7pPr>
           </a:lstStyle>
           <a:p>
-            <a:pPr marL="432000" indent="-324000" algn="l">
+            <a:pPr indent="-324000" algn="l">
               <a:spcBef>
                 <a:spcPts val="1417"/>
               </a:spcBef>
@@ -3363,7 +3459,7 @@
         <p:spPr>
           <a:xfrm>
             <a:off x="1047600" y="952560"/>
-            <a:ext cx="16678080" cy="397800"/>
+            <a:ext cx="16677720" cy="397440"/>
           </a:xfrm>
           <a:prstGeom prst="rect">
             <a:avLst/>
@@ -3402,19 +3498,7 @@
                 <a:latin typeface="Courier New"/>
                 <a:ea typeface="Courier New"/>
               </a:rPr>
-              <a:t>PROYECTO PARTE I · IEE3753 </a:t>
-            </a:r>
-            <a:r>
-              <a:rPr lang="en-US" sz="2100" b="0" u="none" spc="337" strike="noStrike">
-                <a:solidFill>
-                  <a:srgbClr val="F7AD30"/>
-                </a:solidFill>
-                <a:effectLst/>
-                <a:uFillTx/>
-                <a:latin typeface="Courier New"/>
-                <a:ea typeface="Courier New"/>
-              </a:rPr>
-              <a:t>2026</a:t>
+              <a:t>PROYECTO PARTE I · IEE3753 2026</a:t>
             </a:r>
             <a:endParaRPr lang="en-US" sz="2100" b="0" u="none" strike="noStrike">
               <a:solidFill>
@@ -3436,7 +3520,7 @@
         <p:spPr>
           <a:xfrm>
             <a:off x="1047600" y="1541160"/>
-            <a:ext cx="2095200" cy="18720"/>
+            <a:ext cx="2094840" cy="18360"/>
           </a:xfrm>
           <a:prstGeom prst="rect">
             <a:avLst/>
@@ -3479,7 +3563,7 @@
         <p:spPr>
           <a:xfrm>
             <a:off x="1047600" y="3865320"/>
-            <a:ext cx="16678080" cy="1958040"/>
+            <a:ext cx="16677720" cy="1957680"/>
           </a:xfrm>
           <a:prstGeom prst="rect">
             <a:avLst/>
@@ -3564,7 +3648,7 @@
         <p:spPr>
           <a:xfrm>
             <a:off x="1047600" y="8014320"/>
-            <a:ext cx="2636640" cy="346320"/>
+            <a:ext cx="2636280" cy="345960"/>
           </a:xfrm>
           <a:prstGeom prst="rect">
             <a:avLst/>
@@ -3625,7 +3709,7 @@
         <p:spPr>
           <a:xfrm>
             <a:off x="4370040" y="8014320"/>
-            <a:ext cx="2801520" cy="346320"/>
+            <a:ext cx="2801160" cy="345960"/>
           </a:xfrm>
           <a:prstGeom prst="rect">
             <a:avLst/>
@@ -3686,7 +3770,7 @@
         <p:spPr>
           <a:xfrm>
             <a:off x="8614440" y="8014320"/>
-            <a:ext cx="1676160" cy="346320"/>
+            <a:ext cx="1675800" cy="345960"/>
           </a:xfrm>
           <a:prstGeom prst="rect">
             <a:avLst/>
@@ -3747,7 +3831,7 @@
         <p:spPr>
           <a:xfrm>
             <a:off x="1047600" y="8399160"/>
-            <a:ext cx="2636640" cy="397800"/>
+            <a:ext cx="2636280" cy="397440"/>
           </a:xfrm>
           <a:prstGeom prst="rect">
             <a:avLst/>
@@ -3808,7 +3892,7 @@
         <p:spPr>
           <a:xfrm>
             <a:off x="4370040" y="8399160"/>
-            <a:ext cx="2801520" cy="397800"/>
+            <a:ext cx="2801160" cy="397440"/>
           </a:xfrm>
           <a:prstGeom prst="rect">
             <a:avLst/>
@@ -3847,19 +3931,7 @@
                 <a:latin typeface="Courier New"/>
                 <a:ea typeface="Courier New"/>
               </a:rPr>
-              <a:t>GF180MCU </a:t>
-            </a:r>
-            <a:r>
-              <a:rPr lang="en-US" sz="2100" b="0" u="none" strike="noStrike">
-                <a:solidFill>
-                  <a:srgbClr val="F3F2EE"/>
-                </a:solidFill>
-                <a:effectLst/>
-                <a:uFillTx/>
-                <a:latin typeface="Courier New"/>
-                <a:ea typeface="Courier New"/>
-              </a:rPr>
-              <a:t>· 180 nm</a:t>
+              <a:t>GF180MCU · 180 nm</a:t>
             </a:r>
             <a:endParaRPr lang="en-US" sz="2100" b="0" u="none" strike="noStrike">
               <a:solidFill>
@@ -3881,7 +3953,7 @@
         <p:spPr>
           <a:xfrm>
             <a:off x="8614440" y="8399160"/>
-            <a:ext cx="1676160" cy="397800"/>
+            <a:ext cx="1675800" cy="397440"/>
           </a:xfrm>
           <a:prstGeom prst="rect">
             <a:avLst/>
@@ -3942,7 +4014,7 @@
         <p:spPr>
           <a:xfrm>
             <a:off x="1047600" y="9140040"/>
-            <a:ext cx="16678080" cy="346320"/>
+            <a:ext cx="16677720" cy="345960"/>
           </a:xfrm>
           <a:prstGeom prst="rect">
             <a:avLst/>
@@ -3981,7 +4053,19 @@
                 <a:latin typeface="Courier New"/>
                 <a:ea typeface="Courier New"/>
               </a:rPr>
-              <a:t>INTEGRANTES · Vicente Florez · Mateo de la Cuadra · Alonso Rivera</a:t>
+              <a:t>INTEGRANTES · Vicente Florez · Mateo </a:t>
+            </a:r>
+            <a:r>
+              <a:rPr lang="en-US" sz="1800" b="0" u="none" spc="145" strike="noStrike">
+                <a:solidFill>
+                  <a:srgbClr val="7C8186"/>
+                </a:solidFill>
+                <a:effectLst/>
+                <a:uFillTx/>
+                <a:latin typeface="Courier New"/>
+                <a:ea typeface="Courier New"/>
+              </a:rPr>
+              <a:t>de la Cuadra · Alonso Rivera</a:t>
             </a:r>
             <a:endParaRPr lang="en-US" sz="1800" b="0" u="none" strike="noStrike">
               <a:solidFill>
@@ -4040,7 +4124,7 @@
         <p:spPr>
           <a:xfrm>
             <a:off x="1047600" y="419040"/>
-            <a:ext cx="6633000" cy="346320"/>
+            <a:ext cx="6632640" cy="345960"/>
           </a:xfrm>
           <a:prstGeom prst="rect">
             <a:avLst/>
@@ -4113,7 +4197,7 @@
         <p:spPr>
           <a:xfrm>
             <a:off x="14605560" y="419040"/>
-            <a:ext cx="2713320" cy="346320"/>
+            <a:ext cx="2712960" cy="345960"/>
           </a:xfrm>
           <a:prstGeom prst="rect">
             <a:avLst/>
@@ -4174,7 +4258,7 @@
         <p:spPr>
           <a:xfrm>
             <a:off x="1047600" y="952560"/>
-            <a:ext cx="16678080" cy="708480"/>
+            <a:ext cx="16677720" cy="708120"/>
           </a:xfrm>
           <a:prstGeom prst="rect">
             <a:avLst/>
@@ -4213,19 +4297,7 @@
                 <a:latin typeface="Arial"/>
                 <a:ea typeface="Arial"/>
               </a:rPr>
-              <a:t>Las cuatro fases, paso a </a:t>
-            </a:r>
-            <a:r>
-              <a:rPr lang="en-US" sz="4800" b="1" u="none" spc="-71" strike="noStrike">
-                <a:solidFill>
-                  <a:srgbClr val="F3F2EE"/>
-                </a:solidFill>
-                <a:effectLst/>
-                <a:uFillTx/>
-                <a:latin typeface="Arial"/>
-                <a:ea typeface="Arial"/>
-              </a:rPr>
-              <a:t>paso</a:t>
+              <a:t>Las cuatro fases, paso a paso</a:t>
             </a:r>
             <a:endParaRPr lang="en-US" sz="4800" b="0" u="none" strike="noStrike">
               <a:solidFill>
@@ -4247,7 +4319,7 @@
         <p:spPr>
           <a:xfrm>
             <a:off x="1047600" y="2118240"/>
-            <a:ext cx="16192080" cy="919440"/>
+            <a:ext cx="16191720" cy="919080"/>
           </a:xfrm>
           <a:prstGeom prst="roundRect">
             <a:avLst>
@@ -4292,7 +4364,7 @@
         <p:spPr>
           <a:xfrm>
             <a:off x="1047600" y="3030840"/>
-            <a:ext cx="16192080" cy="9000"/>
+            <a:ext cx="16191720" cy="8640"/>
           </a:xfrm>
           <a:prstGeom prst="rect">
             <a:avLst/>
@@ -4335,7 +4407,7 @@
         <p:spPr>
           <a:xfrm>
             <a:off x="1047600" y="2118240"/>
-            <a:ext cx="16192080" cy="9000"/>
+            <a:ext cx="16191720" cy="8640"/>
           </a:xfrm>
           <a:prstGeom prst="rect">
             <a:avLst/>
@@ -4378,7 +4450,7 @@
         <p:spPr>
           <a:xfrm>
             <a:off x="1047600" y="2118240"/>
-            <a:ext cx="28080" cy="919440"/>
+            <a:ext cx="27720" cy="919080"/>
           </a:xfrm>
           <a:prstGeom prst="rect">
             <a:avLst/>
@@ -4397,7 +4469,7 @@
           <a:fontRef idx="minor"/>
         </p:style>
         <p:txBody>
-          <a:bodyPr lIns="90000" tIns="45000" rIns="90000" bIns="45000" anchor="t">
+          <a:bodyPr lIns="14040" tIns="45000" rIns="14040" bIns="45000" anchor="t">
             <a:noAutofit/>
           </a:bodyPr>
           <a:p>
@@ -4421,7 +4493,7 @@
         <p:spPr>
           <a:xfrm>
             <a:off x="17233200" y="2118240"/>
-            <a:ext cx="9000" cy="919440"/>
+            <a:ext cx="8640" cy="919080"/>
           </a:xfrm>
           <a:prstGeom prst="rect">
             <a:avLst/>
@@ -4440,7 +4512,7 @@
           <a:fontRef idx="minor"/>
         </p:style>
         <p:txBody>
-          <a:bodyPr lIns="90000" tIns="45000" rIns="90000" bIns="45000" anchor="t">
+          <a:bodyPr lIns="4320" tIns="45000" rIns="4320" bIns="45000" anchor="t">
             <a:noAutofit/>
           </a:bodyPr>
           <a:p>
@@ -4464,7 +4536,7 @@
         <p:spPr>
           <a:xfrm>
             <a:off x="1380960" y="2373120"/>
-            <a:ext cx="742680" cy="423360"/>
+            <a:ext cx="742320" cy="423000"/>
           </a:xfrm>
           <a:prstGeom prst="rect">
             <a:avLst/>
@@ -4525,7 +4597,7 @@
         <p:spPr>
           <a:xfrm>
             <a:off x="2352600" y="2373120"/>
-            <a:ext cx="933120" cy="423360"/>
+            <a:ext cx="932760" cy="423000"/>
           </a:xfrm>
           <a:prstGeom prst="rect">
             <a:avLst/>
@@ -4586,7 +4658,7 @@
         <p:spPr>
           <a:xfrm>
             <a:off x="12559680" y="2448720"/>
-            <a:ext cx="4499280" cy="372240"/>
+            <a:ext cx="4498920" cy="371880"/>
           </a:xfrm>
           <a:prstGeom prst="rect">
             <a:avLst/>
@@ -4647,7 +4719,7 @@
         <p:spPr>
           <a:xfrm>
             <a:off x="1047600" y="3209400"/>
-            <a:ext cx="16192080" cy="919440"/>
+            <a:ext cx="16191720" cy="919080"/>
           </a:xfrm>
           <a:prstGeom prst="roundRect">
             <a:avLst>
@@ -4692,7 +4764,7 @@
         <p:spPr>
           <a:xfrm>
             <a:off x="1047600" y="4122000"/>
-            <a:ext cx="16192080" cy="9000"/>
+            <a:ext cx="16191720" cy="8640"/>
           </a:xfrm>
           <a:prstGeom prst="rect">
             <a:avLst/>
@@ -4735,7 +4807,7 @@
         <p:spPr>
           <a:xfrm>
             <a:off x="1047600" y="3209400"/>
-            <a:ext cx="16192080" cy="9000"/>
+            <a:ext cx="16191720" cy="8640"/>
           </a:xfrm>
           <a:prstGeom prst="rect">
             <a:avLst/>
@@ -4778,7 +4850,7 @@
         <p:spPr>
           <a:xfrm>
             <a:off x="1047600" y="3209400"/>
-            <a:ext cx="28080" cy="919440"/>
+            <a:ext cx="27720" cy="919080"/>
           </a:xfrm>
           <a:prstGeom prst="rect">
             <a:avLst/>
@@ -4797,7 +4869,7 @@
           <a:fontRef idx="minor"/>
         </p:style>
         <p:txBody>
-          <a:bodyPr lIns="90000" tIns="45000" rIns="90000" bIns="45000" anchor="t">
+          <a:bodyPr lIns="14040" tIns="45000" rIns="14040" bIns="45000" anchor="t">
             <a:noAutofit/>
           </a:bodyPr>
           <a:p>
@@ -4821,7 +4893,7 @@
         <p:spPr>
           <a:xfrm>
             <a:off x="17233200" y="3209400"/>
-            <a:ext cx="9000" cy="919440"/>
+            <a:ext cx="8640" cy="919080"/>
           </a:xfrm>
           <a:prstGeom prst="rect">
             <a:avLst/>
@@ -4840,7 +4912,7 @@
           <a:fontRef idx="minor"/>
         </p:style>
         <p:txBody>
-          <a:bodyPr lIns="90000" tIns="45000" rIns="90000" bIns="45000" anchor="t">
+          <a:bodyPr lIns="4320" tIns="45000" rIns="4320" bIns="45000" anchor="t">
             <a:noAutofit/>
           </a:bodyPr>
           <a:p>
@@ -4864,7 +4936,7 @@
         <p:spPr>
           <a:xfrm>
             <a:off x="1380960" y="3464280"/>
-            <a:ext cx="742680" cy="423360"/>
+            <a:ext cx="742320" cy="423000"/>
           </a:xfrm>
           <a:prstGeom prst="rect">
             <a:avLst/>
@@ -4925,7 +4997,7 @@
         <p:spPr>
           <a:xfrm>
             <a:off x="2352600" y="3464280"/>
-            <a:ext cx="8531280" cy="423360"/>
+            <a:ext cx="8530920" cy="423000"/>
           </a:xfrm>
           <a:prstGeom prst="rect">
             <a:avLst/>
@@ -4986,7 +5058,7 @@
         <p:spPr>
           <a:xfrm>
             <a:off x="14277600" y="3504240"/>
-            <a:ext cx="2729880" cy="407880"/>
+            <a:ext cx="2729520" cy="407520"/>
           </a:xfrm>
           <a:prstGeom prst="rect">
             <a:avLst/>
@@ -5071,7 +5143,7 @@
         <p:spPr>
           <a:xfrm>
             <a:off x="1047600" y="4300560"/>
-            <a:ext cx="16192080" cy="919440"/>
+            <a:ext cx="16191720" cy="919080"/>
           </a:xfrm>
           <a:prstGeom prst="roundRect">
             <a:avLst>
@@ -5116,7 +5188,7 @@
         <p:spPr>
           <a:xfrm>
             <a:off x="1047600" y="5213160"/>
-            <a:ext cx="16192080" cy="9000"/>
+            <a:ext cx="16191720" cy="8640"/>
           </a:xfrm>
           <a:prstGeom prst="rect">
             <a:avLst/>
@@ -5159,7 +5231,7 @@
         <p:spPr>
           <a:xfrm>
             <a:off x="1047600" y="4300560"/>
-            <a:ext cx="16192080" cy="9000"/>
+            <a:ext cx="16191720" cy="8640"/>
           </a:xfrm>
           <a:prstGeom prst="rect">
             <a:avLst/>
@@ -5202,7 +5274,7 @@
         <p:spPr>
           <a:xfrm>
             <a:off x="1047600" y="4300560"/>
-            <a:ext cx="28080" cy="919440"/>
+            <a:ext cx="27720" cy="919080"/>
           </a:xfrm>
           <a:prstGeom prst="rect">
             <a:avLst/>
@@ -5221,7 +5293,7 @@
           <a:fontRef idx="minor"/>
         </p:style>
         <p:txBody>
-          <a:bodyPr lIns="90000" tIns="45000" rIns="90000" bIns="45000" anchor="t">
+          <a:bodyPr lIns="14040" tIns="45000" rIns="14040" bIns="45000" anchor="t">
             <a:noAutofit/>
           </a:bodyPr>
           <a:p>
@@ -5245,7 +5317,7 @@
         <p:spPr>
           <a:xfrm>
             <a:off x="17233200" y="4300560"/>
-            <a:ext cx="9000" cy="919440"/>
+            <a:ext cx="8640" cy="919080"/>
           </a:xfrm>
           <a:prstGeom prst="rect">
             <a:avLst/>
@@ -5264,7 +5336,7 @@
           <a:fontRef idx="minor"/>
         </p:style>
         <p:txBody>
-          <a:bodyPr lIns="90000" tIns="45000" rIns="90000" bIns="45000" anchor="t">
+          <a:bodyPr lIns="4320" tIns="45000" rIns="4320" bIns="45000" anchor="t">
             <a:noAutofit/>
           </a:bodyPr>
           <a:p>
@@ -5288,7 +5360,7 @@
         <p:spPr>
           <a:xfrm>
             <a:off x="1380960" y="4555440"/>
-            <a:ext cx="742680" cy="423360"/>
+            <a:ext cx="742320" cy="423000"/>
           </a:xfrm>
           <a:prstGeom prst="rect">
             <a:avLst/>
@@ -5349,7 +5421,7 @@
         <p:spPr>
           <a:xfrm>
             <a:off x="2352600" y="4555440"/>
-            <a:ext cx="7239960" cy="423360"/>
+            <a:ext cx="7239600" cy="423000"/>
           </a:xfrm>
           <a:prstGeom prst="rect">
             <a:avLst/>
@@ -5410,7 +5482,7 @@
         <p:spPr>
           <a:xfrm>
             <a:off x="13254840" y="4631040"/>
-            <a:ext cx="3783240" cy="372240"/>
+            <a:ext cx="3782880" cy="371880"/>
           </a:xfrm>
           <a:prstGeom prst="rect">
             <a:avLst/>
@@ -5471,7 +5543,7 @@
         <p:spPr>
           <a:xfrm>
             <a:off x="1047600" y="5391720"/>
-            <a:ext cx="16192080" cy="919440"/>
+            <a:ext cx="16191720" cy="919080"/>
           </a:xfrm>
           <a:prstGeom prst="roundRect">
             <a:avLst>
@@ -5516,7 +5588,7 @@
         <p:spPr>
           <a:xfrm>
             <a:off x="1047600" y="6303960"/>
-            <a:ext cx="16192080" cy="9000"/>
+            <a:ext cx="16191720" cy="8640"/>
           </a:xfrm>
           <a:prstGeom prst="rect">
             <a:avLst/>
@@ -5559,7 +5631,7 @@
         <p:spPr>
           <a:xfrm>
             <a:off x="1047600" y="5391720"/>
-            <a:ext cx="16192080" cy="9000"/>
+            <a:ext cx="16191720" cy="8640"/>
           </a:xfrm>
           <a:prstGeom prst="rect">
             <a:avLst/>
@@ -5602,7 +5674,7 @@
         <p:spPr>
           <a:xfrm>
             <a:off x="1047600" y="5391720"/>
-            <a:ext cx="28080" cy="919440"/>
+            <a:ext cx="27720" cy="919080"/>
           </a:xfrm>
           <a:prstGeom prst="rect">
             <a:avLst/>
@@ -5621,7 +5693,7 @@
           <a:fontRef idx="minor"/>
         </p:style>
         <p:txBody>
-          <a:bodyPr lIns="90000" tIns="45000" rIns="90000" bIns="45000" anchor="t">
+          <a:bodyPr lIns="14040" tIns="45000" rIns="14040" bIns="45000" anchor="t">
             <a:noAutofit/>
           </a:bodyPr>
           <a:p>
@@ -5645,7 +5717,7 @@
         <p:spPr>
           <a:xfrm>
             <a:off x="17233200" y="5391720"/>
-            <a:ext cx="9000" cy="919440"/>
+            <a:ext cx="8640" cy="919080"/>
           </a:xfrm>
           <a:prstGeom prst="rect">
             <a:avLst/>
@@ -5664,7 +5736,7 @@
           <a:fontRef idx="minor"/>
         </p:style>
         <p:txBody>
-          <a:bodyPr lIns="90000" tIns="45000" rIns="90000" bIns="45000" anchor="t">
+          <a:bodyPr lIns="4320" tIns="45000" rIns="4320" bIns="45000" anchor="t">
             <a:noAutofit/>
           </a:bodyPr>
           <a:p>
@@ -5688,7 +5760,7 @@
         <p:spPr>
           <a:xfrm>
             <a:off x="1380960" y="5646600"/>
-            <a:ext cx="742680" cy="423360"/>
+            <a:ext cx="742320" cy="423000"/>
           </a:xfrm>
           <a:prstGeom prst="rect">
             <a:avLst/>
@@ -5749,7 +5821,7 @@
         <p:spPr>
           <a:xfrm>
             <a:off x="2352600" y="5646600"/>
-            <a:ext cx="8531280" cy="423360"/>
+            <a:ext cx="8530920" cy="423000"/>
           </a:xfrm>
           <a:prstGeom prst="rect">
             <a:avLst/>
@@ -5810,7 +5882,7 @@
         <p:spPr>
           <a:xfrm>
             <a:off x="14277600" y="5686560"/>
-            <a:ext cx="2729880" cy="407880"/>
+            <a:ext cx="2729520" cy="407520"/>
           </a:xfrm>
           <a:prstGeom prst="rect">
             <a:avLst/>
@@ -5895,7 +5967,7 @@
         <p:spPr>
           <a:xfrm>
             <a:off x="1047600" y="6654240"/>
-            <a:ext cx="16678080" cy="407880"/>
+            <a:ext cx="16677720" cy="407520"/>
           </a:xfrm>
           <a:prstGeom prst="rect">
             <a:avLst/>
@@ -6041,7 +6113,7 @@
         <p:spPr>
           <a:xfrm>
             <a:off x="1047600" y="419040"/>
-            <a:ext cx="5728320" cy="346320"/>
+            <a:ext cx="5727960" cy="345960"/>
           </a:xfrm>
           <a:prstGeom prst="rect">
             <a:avLst/>
@@ -6114,7 +6186,7 @@
         <p:spPr>
           <a:xfrm>
             <a:off x="10946520" y="419040"/>
-            <a:ext cx="6482160" cy="346320"/>
+            <a:ext cx="6481800" cy="345960"/>
           </a:xfrm>
           <a:prstGeom prst="rect">
             <a:avLst/>
@@ -6175,7 +6247,7 @@
         <p:spPr>
           <a:xfrm>
             <a:off x="1047600" y="952560"/>
-            <a:ext cx="16678080" cy="708480"/>
+            <a:ext cx="16677720" cy="708120"/>
           </a:xfrm>
           <a:prstGeom prst="rect">
             <a:avLst/>
@@ -6260,7 +6332,7 @@
         <p:spPr>
           <a:xfrm>
             <a:off x="1409760" y="2514600"/>
-            <a:ext cx="6740640" cy="457200"/>
+            <a:ext cx="6740280" cy="456840"/>
           </a:xfrm>
           <a:prstGeom prst="rect">
             <a:avLst/>
@@ -6393,7 +6465,7 @@
         <p:spPr>
           <a:xfrm>
             <a:off x="1409760" y="3405960"/>
-            <a:ext cx="6134040" cy="452160"/>
+            <a:ext cx="6133680" cy="451800"/>
           </a:xfrm>
           <a:prstGeom prst="rect">
             <a:avLst/>
@@ -6466,7 +6538,7 @@
         <p:spPr>
           <a:xfrm>
             <a:off x="1409760" y="3717000"/>
-            <a:ext cx="6729840" cy="397800"/>
+            <a:ext cx="6729480" cy="397440"/>
           </a:xfrm>
           <a:prstGeom prst="rect">
             <a:avLst/>
@@ -6527,7 +6599,7 @@
         <p:spPr>
           <a:xfrm>
             <a:off x="1409760" y="4678200"/>
-            <a:ext cx="6362640" cy="1036800"/>
+            <a:ext cx="6362280" cy="1036440"/>
           </a:xfrm>
           <a:prstGeom prst="rect">
             <a:avLst/>
@@ -6624,7 +6696,7 @@
         <p:spPr>
           <a:xfrm>
             <a:off x="4862160" y="4592520"/>
-            <a:ext cx="1436040" cy="452160"/>
+            <a:ext cx="1435680" cy="451800"/>
           </a:xfrm>
           <a:prstGeom prst="rect">
             <a:avLst/>
@@ -6643,6 +6715,88 @@
         <p:txBody>
           <a:bodyPr lIns="25560" tIns="25560" rIns="25560" bIns="25560" anchor="t">
             <a:normAutofit/>
+          </a:bodyPr>
+          <a:p>
+            <a:endParaRPr lang="en-US" sz="1800" b="0" u="none" strike="noStrike">
+              <a:solidFill>
+                <a:srgbClr val="FFFFFF"/>
+              </a:solidFill>
+              <a:effectLst/>
+              <a:uFillTx/>
+              <a:latin typeface="Arial"/>
+            </a:endParaRPr>
+          </a:p>
+        </p:txBody>
+      </p:sp>
+      <p:sp>
+        <p:nvSpPr>
+          <p:cNvPr id="337" name="Text 11"/>
+          <p:cNvSpPr/>
+          <p:nvPr/>
+        </p:nvSpPr>
+        <p:spPr>
+          <a:xfrm>
+            <a:off x="1409760" y="4678200"/>
+            <a:ext cx="6458760" cy="810360"/>
+          </a:xfrm>
+          <a:prstGeom prst="rect">
+            <a:avLst/>
+          </a:prstGeom>
+          <a:noFill/>
+          <a:ln w="0">
+            <a:noFill/>
+          </a:ln>
+        </p:spPr>
+        <p:style>
+          <a:lnRef idx="0"/>
+          <a:fillRef idx="0"/>
+          <a:effectRef idx="0"/>
+          <a:fontRef idx="minor"/>
+        </p:style>
+        <p:txBody>
+          <a:bodyPr lIns="0" tIns="0" rIns="0" bIns="0" anchor="t">
+            <a:normAutofit/>
+          </a:bodyPr>
+          <a:p>
+            <a:endParaRPr lang="en-US" sz="1800" b="0" u="none" strike="noStrike">
+              <a:solidFill>
+                <a:srgbClr val="FFFFFF"/>
+              </a:solidFill>
+              <a:effectLst/>
+              <a:uFillTx/>
+              <a:latin typeface="Arial"/>
+            </a:endParaRPr>
+          </a:p>
+        </p:txBody>
+      </p:sp>
+      <p:sp>
+        <p:nvSpPr>
+          <p:cNvPr id="338" name="Text 12"/>
+          <p:cNvSpPr/>
+          <p:nvPr/>
+        </p:nvSpPr>
+        <p:spPr>
+          <a:xfrm>
+            <a:off x="1409760" y="5578200"/>
+            <a:ext cx="6729480" cy="397440"/>
+          </a:xfrm>
+          <a:prstGeom prst="rect">
+            <a:avLst/>
+          </a:prstGeom>
+          <a:noFill/>
+          <a:ln w="0">
+            <a:noFill/>
+          </a:ln>
+        </p:spPr>
+        <p:style>
+          <a:lnRef idx="0"/>
+          <a:fillRef idx="0"/>
+          <a:effectRef idx="0"/>
+          <a:fontRef idx="minor"/>
+        </p:style>
+        <p:txBody>
+          <a:bodyPr lIns="25560" tIns="25560" rIns="25560" bIns="25560" anchor="t">
+            <a:normAutofit fontScale="85000" lnSpcReduction="9999"/>
           </a:bodyPr>
           <a:p>
             <a:pPr defTabSz="914400">
@@ -6653,44 +6807,56 @@
                 <a:tab pos="0" algn="l"/>
               </a:tabLst>
             </a:pPr>
-            <a:endParaRPr lang="en-US" sz="1800" b="0" u="none" strike="noStrike">
-              <a:solidFill>
-                <a:srgbClr val="FFFFFF"/>
-              </a:solidFill>
-              <a:effectLst/>
-              <a:uFillTx/>
-              <a:latin typeface="Arial"/>
-            </a:endParaRPr>
-          </a:p>
-        </p:txBody>
-      </p:sp>
-      <p:sp>
-        <p:nvSpPr>
-          <p:cNvPr id="337" name="Text 11"/>
-          <p:cNvSpPr/>
-          <p:nvPr/>
-        </p:nvSpPr>
-        <p:spPr>
-          <a:xfrm>
-            <a:off x="1409760" y="4678200"/>
-            <a:ext cx="6459120" cy="810720"/>
-          </a:xfrm>
-          <a:prstGeom prst="rect">
-            <a:avLst/>
-          </a:prstGeom>
-          <a:noFill/>
-          <a:ln w="0">
-            <a:noFill/>
-          </a:ln>
-        </p:spPr>
-        <p:style>
-          <a:lnRef idx="0"/>
-          <a:fillRef idx="0"/>
-          <a:effectRef idx="0"/>
-          <a:fontRef idx="minor"/>
-        </p:style>
-        <p:txBody>
-          <a:bodyPr lIns="0" tIns="0" rIns="0" bIns="0" anchor="t">
+            <a:r>
+              <a:rPr lang="en-US" sz="2100" b="0" u="none" strike="noStrike">
+                <a:solidFill>
+                  <a:srgbClr val="BAB7B2"/>
+                </a:solidFill>
+                <a:effectLst/>
+                <a:uFillTx/>
+                <a:latin typeface="Courier New"/>
+                <a:ea typeface="Courier New"/>
+              </a:rPr>
+              <a:t>x_old ← x_new, x_new ← i_D</a:t>
+            </a:r>
+            <a:endParaRPr lang="en-US" sz="2100" b="0" u="none" strike="noStrike">
+              <a:solidFill>
+                <a:srgbClr val="FFFFFF"/>
+              </a:solidFill>
+              <a:effectLst/>
+              <a:uFillTx/>
+              <a:latin typeface="Arial"/>
+            </a:endParaRPr>
+          </a:p>
+        </p:txBody>
+      </p:sp>
+      <p:sp>
+        <p:nvSpPr>
+          <p:cNvPr id="339" name="Text 13"/>
+          <p:cNvSpPr/>
+          <p:nvPr/>
+        </p:nvSpPr>
+        <p:spPr>
+          <a:xfrm>
+            <a:off x="1409760" y="6442920"/>
+            <a:ext cx="6740280" cy="1786320"/>
+          </a:xfrm>
+          <a:prstGeom prst="rect">
+            <a:avLst/>
+          </a:prstGeom>
+          <a:noFill/>
+          <a:ln w="0">
+            <a:noFill/>
+          </a:ln>
+        </p:spPr>
+        <p:style>
+          <a:lnRef idx="0"/>
+          <a:fillRef idx="0"/>
+          <a:effectRef idx="0"/>
+          <a:fontRef idx="minor"/>
+        </p:style>
+        <p:txBody>
+          <a:bodyPr lIns="25560" tIns="25560" rIns="25560" bIns="25560" anchor="t">
             <a:normAutofit/>
           </a:bodyPr>
           <a:p>
@@ -6702,116 +6868,6 @@
                 <a:tab pos="0" algn="l"/>
               </a:tabLst>
             </a:pPr>
-            <a:endParaRPr lang="en-US" sz="1800" b="0" u="none" strike="noStrike">
-              <a:solidFill>
-                <a:srgbClr val="FFFFFF"/>
-              </a:solidFill>
-              <a:effectLst/>
-              <a:uFillTx/>
-              <a:latin typeface="Arial"/>
-            </a:endParaRPr>
-          </a:p>
-        </p:txBody>
-      </p:sp>
-      <p:sp>
-        <p:nvSpPr>
-          <p:cNvPr id="338" name="Text 12"/>
-          <p:cNvSpPr/>
-          <p:nvPr/>
-        </p:nvSpPr>
-        <p:spPr>
-          <a:xfrm>
-            <a:off x="1409760" y="5578200"/>
-            <a:ext cx="6729840" cy="397800"/>
-          </a:xfrm>
-          <a:prstGeom prst="rect">
-            <a:avLst/>
-          </a:prstGeom>
-          <a:noFill/>
-          <a:ln w="0">
-            <a:noFill/>
-          </a:ln>
-        </p:spPr>
-        <p:style>
-          <a:lnRef idx="0"/>
-          <a:fillRef idx="0"/>
-          <a:effectRef idx="0"/>
-          <a:fontRef idx="minor"/>
-        </p:style>
-        <p:txBody>
-          <a:bodyPr lIns="25560" tIns="25560" rIns="25560" bIns="25560" anchor="t">
-            <a:normAutofit fontScale="85000" lnSpcReduction="9999"/>
-          </a:bodyPr>
-          <a:p>
-            <a:pPr defTabSz="914400">
-              <a:lnSpc>
-                <a:spcPct val="135000"/>
-              </a:lnSpc>
-              <a:tabLst>
-                <a:tab pos="0" algn="l"/>
-              </a:tabLst>
-            </a:pPr>
-            <a:r>
-              <a:rPr lang="en-US" sz="2100" b="0" u="none" strike="noStrike">
-                <a:solidFill>
-                  <a:srgbClr val="BAB7B2"/>
-                </a:solidFill>
-                <a:effectLst/>
-                <a:uFillTx/>
-                <a:latin typeface="Courier New"/>
-                <a:ea typeface="Courier New"/>
-              </a:rPr>
-              <a:t>x_old ← x_new, x_new ← i_D</a:t>
-            </a:r>
-            <a:endParaRPr lang="en-US" sz="2100" b="0" u="none" strike="noStrike">
-              <a:solidFill>
-                <a:srgbClr val="FFFFFF"/>
-              </a:solidFill>
-              <a:effectLst/>
-              <a:uFillTx/>
-              <a:latin typeface="Arial"/>
-            </a:endParaRPr>
-          </a:p>
-        </p:txBody>
-      </p:sp>
-      <p:sp>
-        <p:nvSpPr>
-          <p:cNvPr id="339" name="Text 13"/>
-          <p:cNvSpPr/>
-          <p:nvPr/>
-        </p:nvSpPr>
-        <p:spPr>
-          <a:xfrm>
-            <a:off x="1409760" y="6442920"/>
-            <a:ext cx="6740640" cy="1786680"/>
-          </a:xfrm>
-          <a:prstGeom prst="rect">
-            <a:avLst/>
-          </a:prstGeom>
-          <a:noFill/>
-          <a:ln w="0">
-            <a:noFill/>
-          </a:ln>
-        </p:spPr>
-        <p:style>
-          <a:lnRef idx="0"/>
-          <a:fillRef idx="0"/>
-          <a:effectRef idx="0"/>
-          <a:fontRef idx="minor"/>
-        </p:style>
-        <p:txBody>
-          <a:bodyPr lIns="25560" tIns="25560" rIns="25560" bIns="25560" anchor="t">
-            <a:normAutofit/>
-          </a:bodyPr>
-          <a:p>
-            <a:pPr defTabSz="914400">
-              <a:lnSpc>
-                <a:spcPct val="135000"/>
-              </a:lnSpc>
-              <a:tabLst>
-                <a:tab pos="0" algn="l"/>
-              </a:tabLst>
-            </a:pPr>
             <a:r>
               <a:rPr lang="en-US" sz="2550" b="1" u="none" strike="noStrike">
                 <a:solidFill>
@@ -6856,7 +6912,7 @@
         <p:spPr>
           <a:xfrm>
             <a:off x="8477280" y="2118240"/>
-            <a:ext cx="8762760" cy="7329960"/>
+            <a:ext cx="8762400" cy="7329600"/>
           </a:xfrm>
           <a:prstGeom prst="roundRect">
             <a:avLst>
@@ -6904,7 +6960,7 @@
         <p:spPr>
           <a:xfrm>
             <a:off x="8789040" y="2392200"/>
-            <a:ext cx="8382960" cy="294840"/>
+            <a:ext cx="8382600" cy="294480"/>
           </a:xfrm>
           <a:prstGeom prst="rect">
             <a:avLst/>
@@ -6969,7 +7025,7 @@
         <p:spPr>
           <a:xfrm>
             <a:off x="8789040" y="2820960"/>
-            <a:ext cx="8138880" cy="4353120"/>
+            <a:ext cx="8138520" cy="4352760"/>
           </a:xfrm>
           <a:prstGeom prst="rect">
             <a:avLst/>
@@ -7026,7 +7082,7 @@
         <p:spPr>
           <a:xfrm>
             <a:off x="1047600" y="419040"/>
-            <a:ext cx="7537680" cy="346320"/>
+            <a:ext cx="7537320" cy="345960"/>
           </a:xfrm>
           <a:prstGeom prst="rect">
             <a:avLst/>
@@ -7099,7 +7155,7 @@
         <p:spPr>
           <a:xfrm>
             <a:off x="12849120" y="419040"/>
-            <a:ext cx="4522320" cy="346320"/>
+            <a:ext cx="4521960" cy="345960"/>
           </a:xfrm>
           <a:prstGeom prst="rect">
             <a:avLst/>
@@ -7160,7 +7216,7 @@
         <p:spPr>
           <a:xfrm>
             <a:off x="1047600" y="952560"/>
-            <a:ext cx="16678080" cy="708480"/>
+            <a:ext cx="16677720" cy="708120"/>
           </a:xfrm>
           <a:prstGeom prst="rect">
             <a:avLst/>
@@ -7257,7 +7313,7 @@
         <p:spPr>
           <a:xfrm>
             <a:off x="1047600" y="2118240"/>
-            <a:ext cx="9524520" cy="7329960"/>
+            <a:ext cx="9524160" cy="7329600"/>
           </a:xfrm>
           <a:prstGeom prst="roundRect">
             <a:avLst>
@@ -7309,7 +7365,7 @@
         <p:spPr>
           <a:xfrm>
             <a:off x="1949760" y="2315880"/>
-            <a:ext cx="7720200" cy="6934680"/>
+            <a:ext cx="7719840" cy="6934320"/>
           </a:xfrm>
           <a:prstGeom prst="rect">
             <a:avLst/>
@@ -7328,8 +7384,8 @@
         </p:nvSpPr>
         <p:spPr>
           <a:xfrm>
-            <a:off x="11391840" y="2215440"/>
-            <a:ext cx="1141560" cy="373320"/>
+            <a:off x="11391840" y="2129760"/>
+            <a:ext cx="6023160" cy="899640"/>
           </a:xfrm>
           <a:prstGeom prst="rect">
             <a:avLst/>
@@ -7347,7 +7403,128 @@
         </p:style>
         <p:txBody>
           <a:bodyPr lIns="25560" tIns="25560" rIns="25560" bIns="25560" anchor="t">
-            <a:normAutofit fontScale="70000" lnSpcReduction="19999"/>
+            <a:normAutofit fontScale="77500" lnSpcReduction="19999"/>
+          </a:bodyPr>
+          <a:p>
+            <a:pPr defTabSz="914400">
+              <a:lnSpc>
+                <a:spcPct val="120000"/>
+              </a:lnSpc>
+              <a:tabLst>
+                <a:tab pos="0" algn="l"/>
+              </a:tabLst>
+            </a:pPr>
+            <a:r>
+              <a:rPr lang="en-US" sz="2550" b="1" u="none" strike="noStrike">
+                <a:solidFill>
+                  <a:srgbClr val="F3F2EE"/>
+                </a:solidFill>
+                <a:effectLst/>
+                <a:uFillTx/>
+                <a:latin typeface="Arial"/>
+                <a:ea typeface="Arial"/>
+              </a:rPr>
+              <a:t>ADD ①</a:t>
+            </a:r>
+            <a:r>
+              <a:rPr lang="en-US" sz="2550" b="0" u="none" strike="noStrike">
+                <a:solidFill>
+                  <a:srgbClr val="F3F2EE"/>
+                </a:solidFill>
+                <a:effectLst/>
+                <a:uFillTx/>
+                <a:latin typeface="Arial"/>
+                <a:ea typeface="Arial"/>
+              </a:rPr>
+              <a:t> calcula </a:t>
+            </a:r>
+            <a:r>
+              <a:rPr lang="en-US" sz="2550" b="0" u="none" strike="noStrike">
+                <a:solidFill>
+                  <a:srgbClr val="F3F2EE"/>
+                </a:solidFill>
+                <a:effectLst/>
+                <a:uFillTx/>
+                <a:latin typeface="Courier New"/>
+                <a:ea typeface="Courier New"/>
+              </a:rPr>
+              <a:t>S = x_old + x_new</a:t>
+            </a:r>
+            <a:r>
+              <a:rPr lang="en-US" sz="2550" b="0" u="none" strike="noStrike">
+                <a:solidFill>
+                  <a:srgbClr val="F3F2EE"/>
+                </a:solidFill>
+                <a:effectLst/>
+                <a:uFillTx/>
+                <a:latin typeface="Arial"/>
+                <a:ea typeface="Arial"/>
+              </a:rPr>
+              <a:t> y se registra en </a:t>
+            </a:r>
+            <a:r>
+              <a:rPr lang="en-US" sz="2550" b="0" u="none" strike="noStrike">
+                <a:solidFill>
+                  <a:srgbClr val="F3F2EE"/>
+                </a:solidFill>
+                <a:effectLst/>
+                <a:uFillTx/>
+                <a:latin typeface="Courier New"/>
+                <a:ea typeface="Courier New"/>
+              </a:rPr>
+              <a:t>S-reg</a:t>
+            </a:r>
+            <a:r>
+              <a:rPr lang="en-US" sz="2550" b="0" u="none" strike="noStrike">
+                <a:solidFill>
+                  <a:srgbClr val="F3F2EE"/>
+                </a:solidFill>
+                <a:effectLst/>
+                <a:uFillTx/>
+                <a:latin typeface="Arial"/>
+                <a:ea typeface="Arial"/>
+              </a:rPr>
+              <a:t> (7 FF). Corre 1 vez por ventana.</a:t>
+            </a:r>
+            <a:endParaRPr lang="en-US" sz="2550" b="0" u="none" strike="noStrike">
+              <a:solidFill>
+                <a:srgbClr val="FFFFFF"/>
+              </a:solidFill>
+              <a:effectLst/>
+              <a:uFillTx/>
+              <a:latin typeface="Arial"/>
+            </a:endParaRPr>
+          </a:p>
+        </p:txBody>
+      </p:sp>
+      <p:sp>
+        <p:nvSpPr>
+          <p:cNvPr id="349" name="Text 10"/>
+          <p:cNvSpPr/>
+          <p:nvPr/>
+        </p:nvSpPr>
+        <p:spPr>
+          <a:xfrm>
+            <a:off x="11391840" y="3552840"/>
+            <a:ext cx="6023160" cy="757440"/>
+          </a:xfrm>
+          <a:prstGeom prst="rect">
+            <a:avLst/>
+          </a:prstGeom>
+          <a:noFill/>
+          <a:ln w="0">
+            <a:noFill/>
+          </a:ln>
+        </p:spPr>
+        <p:style>
+          <a:lnRef idx="0"/>
+          <a:fillRef idx="0"/>
+          <a:effectRef idx="0"/>
+          <a:fontRef idx="minor"/>
+        </p:style>
+        <p:txBody>
+          <a:bodyPr lIns="25560" tIns="25560" rIns="25560" bIns="25560" anchor="t">
+            <a:normAutofit fontScale="92500" lnSpcReduction="9999"/>
           </a:bodyPr>
           <a:p>
             <a:pPr defTabSz="914400">
@@ -7359,16 +7536,149 @@
               </a:tabLst>
             </a:pPr>
             <a:r>
-              <a:rPr lang="en-US" sz="2550" b="1" u="none" strike="noStrike">
-                <a:solidFill>
-                  <a:srgbClr val="F3F2EE"/>
+              <a:rPr lang="en-US" sz="2100" b="0" u="none" strike="noStrike">
+                <a:solidFill>
+                  <a:srgbClr val="BAB7B2"/>
                 </a:solidFill>
                 <a:effectLst/>
                 <a:uFillTx/>
                 <a:latin typeface="Arial"/>
                 <a:ea typeface="Arial"/>
               </a:rPr>
-              <a:t>ADD ①</a:t>
+              <a:t>Camino x-reg → ADD① → S-reg ≈ </a:t>
+            </a:r>
+            <a:r>
+              <a:rPr lang="en-US" sz="2100" b="1" u="none" strike="noStrike">
+                <a:solidFill>
+                  <a:srgbClr val="BAB7B2"/>
+                </a:solidFill>
+                <a:effectLst/>
+                <a:uFillTx/>
+                <a:latin typeface="Arial"/>
+                <a:ea typeface="Arial"/>
+              </a:rPr>
+              <a:t>0.79 ns </a:t>
+            </a:r>
+            <a:r>
+              <a:rPr lang="en-US" sz="2100" b="0" u="none" strike="noStrike">
+                <a:solidFill>
+                  <a:srgbClr val="BAB7B2"/>
+                </a:solidFill>
+                <a:effectLst/>
+                <a:uFillTx/>
+                <a:latin typeface="Arial"/>
+                <a:ea typeface="Arial"/>
+              </a:rPr>
+              <a:t>, holgado.</a:t>
+            </a:r>
+            <a:endParaRPr lang="en-US" sz="2100" b="0" u="none" strike="noStrike">
+              <a:solidFill>
+                <a:srgbClr val="FFFFFF"/>
+              </a:solidFill>
+              <a:effectLst/>
+              <a:uFillTx/>
+              <a:latin typeface="Arial"/>
+            </a:endParaRPr>
+          </a:p>
+        </p:txBody>
+      </p:sp>
+      <p:sp>
+        <p:nvSpPr>
+          <p:cNvPr id="350" name="Text 11"/>
+          <p:cNvSpPr/>
+          <p:nvPr/>
+        </p:nvSpPr>
+        <p:spPr>
+          <a:xfrm>
+            <a:off x="11391840" y="4590000"/>
+            <a:ext cx="6023160" cy="899640"/>
+          </a:xfrm>
+          <a:prstGeom prst="rect">
+            <a:avLst/>
+          </a:prstGeom>
+          <a:noFill/>
+          <a:ln w="0">
+            <a:noFill/>
+          </a:ln>
+        </p:spPr>
+        <p:style>
+          <a:lnRef idx="0"/>
+          <a:fillRef idx="0"/>
+          <a:effectRef idx="0"/>
+          <a:fontRef idx="minor"/>
+        </p:style>
+        <p:txBody>
+          <a:bodyPr lIns="25560" tIns="25560" rIns="25560" bIns="25560" anchor="t">
+            <a:normAutofit fontScale="77500" lnSpcReduction="19999"/>
+          </a:bodyPr>
+          <a:p>
+            <a:pPr defTabSz="914400">
+              <a:lnSpc>
+                <a:spcPct val="120000"/>
+              </a:lnSpc>
+              <a:tabLst>
+                <a:tab pos="0" algn="l"/>
+              </a:tabLst>
+            </a:pPr>
+            <a:r>
+              <a:rPr lang="en-US" sz="2550" b="0" u="none" strike="noStrike">
+                <a:solidFill>
+                  <a:srgbClr val="F3F2EE"/>
+                </a:solidFill>
+                <a:effectLst/>
+                <a:uFillTx/>
+                <a:latin typeface="Arial"/>
+                <a:ea typeface="Arial"/>
+              </a:rPr>
+              <a:t>Cada ciclo, un </a:t>
+            </a:r>
+            <a:r>
+              <a:rPr lang="en-US" sz="2550" b="0" u="none" strike="noStrike">
+                <a:solidFill>
+                  <a:srgbClr val="F3F2EE"/>
+                </a:solidFill>
+                <a:effectLst/>
+                <a:uFillTx/>
+                <a:latin typeface="Courier New"/>
+                <a:ea typeface="Courier New"/>
+              </a:rPr>
+              <a:t>MUX 3:1</a:t>
+            </a:r>
+            <a:r>
+              <a:rPr lang="en-US" sz="2550" b="0" u="none" strike="noStrike">
+                <a:solidFill>
+                  <a:srgbClr val="F3F2EE"/>
+                </a:solidFill>
+                <a:effectLst/>
+                <a:uFillTx/>
+                <a:latin typeface="Arial"/>
+                <a:ea typeface="Arial"/>
+              </a:rPr>
+              <a:t> elige el operando y </a:t>
+            </a:r>
+            <a:r>
+              <a:rPr lang="en-US" sz="2550" b="1" u="none" strike="noStrike">
+                <a:solidFill>
+                  <a:srgbClr val="F3F2EE"/>
+                </a:solidFill>
+                <a:effectLst/>
+                <a:uFillTx/>
+                <a:latin typeface="Arial"/>
+                <a:ea typeface="Arial"/>
+              </a:rPr>
+              <a:t>un único adder compartido</a:t>
+            </a:r>
+            <a:r>
+              <a:rPr lang="en-US" sz="2550" b="0" u="none" strike="noStrike">
+                <a:solidFill>
+                  <a:srgbClr val="F3F2EE"/>
+                </a:solidFill>
+                <a:effectLst/>
+                <a:uFillTx/>
+                <a:latin typeface="Arial"/>
+                <a:ea typeface="Arial"/>
+              </a:rPr>
+              <a:t> produce la fase activa:</a:t>
             </a:r>
             <a:endParaRPr lang="en-US" sz="2550" b="0" u="none" strike="noStrike">
               <a:solidFill>
@@ -7383,32 +7693,32 @@
       </p:sp>
       <p:sp>
         <p:nvSpPr>
-          <p:cNvPr id="349" name="Text 5"/>
-          <p:cNvSpPr/>
-          <p:nvPr/>
-        </p:nvSpPr>
-        <p:spPr>
-          <a:xfrm>
-            <a:off x="12547440" y="2215440"/>
-            <a:ext cx="1086120" cy="373320"/>
-          </a:xfrm>
-          <a:prstGeom prst="rect">
-            <a:avLst/>
-          </a:prstGeom>
-          <a:noFill/>
-          <a:ln w="0">
-            <a:noFill/>
-          </a:ln>
-        </p:spPr>
-        <p:style>
-          <a:lnRef idx="0"/>
-          <a:fillRef idx="0"/>
-          <a:effectRef idx="0"/>
-          <a:fontRef idx="minor"/>
-        </p:style>
-        <p:txBody>
-          <a:bodyPr lIns="0" tIns="0" rIns="0" bIns="0" anchor="t">
-            <a:normAutofit fontScale="85000" lnSpcReduction="19999"/>
+          <p:cNvPr id="351" name="Text 16"/>
+          <p:cNvSpPr/>
+          <p:nvPr/>
+        </p:nvSpPr>
+        <p:spPr>
+          <a:xfrm>
+            <a:off x="11391840" y="5927400"/>
+            <a:ext cx="6023160" cy="757440"/>
+          </a:xfrm>
+          <a:prstGeom prst="rect">
+            <a:avLst/>
+          </a:prstGeom>
+          <a:noFill/>
+          <a:ln w="0">
+            <a:noFill/>
+          </a:ln>
+        </p:spPr>
+        <p:style>
+          <a:lnRef idx="0"/>
+          <a:fillRef idx="0"/>
+          <a:effectRef idx="0"/>
+          <a:fontRef idx="minor"/>
+        </p:style>
+        <p:txBody>
+          <a:bodyPr lIns="25560" tIns="25560" rIns="25560" bIns="25560" anchor="t">
+            <a:normAutofit fontScale="92500" lnSpcReduction="9999"/>
           </a:bodyPr>
           <a:p>
             <a:pPr defTabSz="914400">
@@ -7420,38 +7730,38 @@
               </a:tabLst>
             </a:pPr>
             <a:r>
-              <a:rPr lang="en-US" sz="2550" b="0" u="none" strike="noStrike">
-                <a:solidFill>
-                  <a:srgbClr val="F3F2EE"/>
-                </a:solidFill>
-                <a:effectLst/>
-                <a:uFillTx/>
-                <a:latin typeface="Arial"/>
-                <a:ea typeface="Arial"/>
-              </a:rPr>
-              <a:t>calcula</a:t>
-            </a:r>
-            <a:endParaRPr lang="en-US" sz="2550" b="0" u="none" strike="noStrike">
-              <a:solidFill>
-                <a:srgbClr val="FFFFFF"/>
-              </a:solidFill>
-              <a:effectLst/>
-              <a:uFillTx/>
-              <a:latin typeface="Arial"/>
-            </a:endParaRPr>
-          </a:p>
-        </p:txBody>
-      </p:sp>
-      <p:sp>
-        <p:nvSpPr>
-          <p:cNvPr id="350" name="Text 6"/>
-          <p:cNvSpPr/>
-          <p:nvPr/>
-        </p:nvSpPr>
-        <p:spPr>
-          <a:xfrm>
-            <a:off x="13647960" y="2129760"/>
-            <a:ext cx="3402000" cy="452160"/>
+              <a:rPr lang="en-US" sz="2100" b="0" u="none" strike="noStrike">
+                <a:solidFill>
+                  <a:srgbClr val="BAB7B2"/>
+                </a:solidFill>
+                <a:effectLst/>
+                <a:uFillTx/>
+                <a:latin typeface="Courier New"/>
+                <a:ea typeface="Courier New"/>
+              </a:rPr>
+              <a:t>φ₀ = x_old (bypass) · φ₁ / φ₃ = S + 2·x · φ₂ = (S + 1) &gt;&gt; 1</a:t>
+            </a:r>
+            <a:endParaRPr lang="en-US" sz="2100" b="0" u="none" strike="noStrike">
+              <a:solidFill>
+                <a:srgbClr val="FFFFFF"/>
+              </a:solidFill>
+              <a:effectLst/>
+              <a:uFillTx/>
+              <a:latin typeface="Arial"/>
+            </a:endParaRPr>
+          </a:p>
+        </p:txBody>
+      </p:sp>
+      <p:sp>
+        <p:nvSpPr>
+          <p:cNvPr id="352" name="Text 17"/>
+          <p:cNvSpPr/>
+          <p:nvPr/>
+        </p:nvSpPr>
+        <p:spPr>
+          <a:xfrm>
+            <a:off x="11391840" y="6964560"/>
+            <a:ext cx="2824560" cy="372960"/>
           </a:xfrm>
           <a:prstGeom prst="rect">
             <a:avLst/>
@@ -7469,7 +7779,7 @@
         </p:style>
         <p:txBody>
           <a:bodyPr lIns="25560" tIns="25560" rIns="25560" bIns="25560" anchor="t">
-            <a:normAutofit fontScale="85000" lnSpcReduction="19999"/>
+            <a:normAutofit fontScale="70000" lnSpcReduction="19999"/>
           </a:bodyPr>
           <a:p>
             <a:pPr defTabSz="914400">
@@ -7481,16 +7791,16 @@
               </a:tabLst>
             </a:pPr>
             <a:r>
-              <a:rPr lang="en-US" sz="2550" b="0" u="none" strike="noStrike">
+              <a:rPr lang="en-US" sz="2550" b="1" u="none" strike="noStrike">
                 <a:solidFill>
                   <a:srgbClr val="F3F2EE"/>
                 </a:solidFill>
                 <a:effectLst/>
                 <a:uFillTx/>
-                <a:latin typeface="Courier New"/>
-                <a:ea typeface="Courier New"/>
-              </a:rPr>
-              <a:t>S = x_old + x_new</a:t>
+                <a:latin typeface="Arial"/>
+                <a:ea typeface="Arial"/>
+              </a:rPr>
+              <a:t>Camino por-ciclo:</a:t>
             </a:r>
             <a:endParaRPr lang="en-US" sz="2550" b="0" u="none" strike="noStrike">
               <a:solidFill>
@@ -7505,32 +7815,32 @@
       </p:sp>
       <p:sp>
         <p:nvSpPr>
-          <p:cNvPr id="351" name="Text 7"/>
-          <p:cNvSpPr/>
-          <p:nvPr/>
-        </p:nvSpPr>
-        <p:spPr>
-          <a:xfrm>
-            <a:off x="11391840" y="2215440"/>
-            <a:ext cx="5985000" cy="810720"/>
-          </a:xfrm>
-          <a:prstGeom prst="rect">
-            <a:avLst/>
-          </a:prstGeom>
-          <a:noFill/>
-          <a:ln w="0">
-            <a:noFill/>
-          </a:ln>
-        </p:spPr>
-        <p:style>
-          <a:lnRef idx="0"/>
-          <a:fillRef idx="0"/>
-          <a:effectRef idx="0"/>
-          <a:fontRef idx="minor"/>
-        </p:style>
-        <p:txBody>
-          <a:bodyPr lIns="0" tIns="0" rIns="0" bIns="0" anchor="t">
-            <a:normAutofit/>
+          <p:cNvPr id="353" name="Text 18"/>
+          <p:cNvSpPr/>
+          <p:nvPr/>
+        </p:nvSpPr>
+        <p:spPr>
+          <a:xfrm>
+            <a:off x="11391840" y="7427520"/>
+            <a:ext cx="6023160" cy="1158480"/>
+          </a:xfrm>
+          <a:prstGeom prst="rect">
+            <a:avLst/>
+          </a:prstGeom>
+          <a:noFill/>
+          <a:ln w="0">
+            <a:noFill/>
+          </a:ln>
+        </p:spPr>
+        <p:style>
+          <a:lnRef idx="0"/>
+          <a:fillRef idx="0"/>
+          <a:effectRef idx="0"/>
+          <a:fontRef idx="minor"/>
+        </p:style>
+        <p:txBody>
+          <a:bodyPr lIns="25560" tIns="25560" rIns="25560" bIns="25560" anchor="t">
+            <a:normAutofit fontScale="85000" lnSpcReduction="9999"/>
           </a:bodyPr>
           <a:p>
             <a:pPr defTabSz="914400">
@@ -7542,579 +7852,6 @@
               </a:tabLst>
             </a:pPr>
             <a:r>
-              <a:rPr lang="en-US" sz="2550" b="0" u="none" strike="noStrike">
-                <a:solidFill>
-                  <a:srgbClr val="F3F2EE"/>
-                </a:solidFill>
-                <a:effectLst/>
-                <a:uFillTx/>
-                <a:latin typeface="Arial"/>
-                <a:ea typeface="Arial"/>
-              </a:rPr>
-              <a:t>y se registra en</a:t>
-            </a:r>
-            <a:endParaRPr lang="en-US" sz="2550" b="0" u="none" strike="noStrike">
-              <a:solidFill>
-                <a:srgbClr val="FFFFFF"/>
-              </a:solidFill>
-              <a:effectLst/>
-              <a:uFillTx/>
-              <a:latin typeface="Arial"/>
-            </a:endParaRPr>
-          </a:p>
-        </p:txBody>
-      </p:sp>
-      <p:sp>
-        <p:nvSpPr>
-          <p:cNvPr id="352" name="Text 8"/>
-          <p:cNvSpPr/>
-          <p:nvPr/>
-        </p:nvSpPr>
-        <p:spPr>
-          <a:xfrm>
-            <a:off x="13436640" y="2652840"/>
-            <a:ext cx="916560" cy="373320"/>
-          </a:xfrm>
-          <a:prstGeom prst="rect">
-            <a:avLst/>
-          </a:prstGeom>
-          <a:noFill/>
-          <a:ln w="0">
-            <a:noFill/>
-          </a:ln>
-        </p:spPr>
-        <p:style>
-          <a:lnRef idx="0"/>
-          <a:fillRef idx="0"/>
-          <a:effectRef idx="0"/>
-          <a:fontRef idx="minor"/>
-        </p:style>
-        <p:txBody>
-          <a:bodyPr lIns="25560" tIns="25560" rIns="25560" bIns="25560" anchor="t">
-            <a:normAutofit fontScale="70000" lnSpcReduction="19999"/>
-          </a:bodyPr>
-          <a:p>
-            <a:pPr defTabSz="914400">
-              <a:lnSpc>
-                <a:spcPct val="135000"/>
-              </a:lnSpc>
-              <a:tabLst>
-                <a:tab pos="0" algn="l"/>
-              </a:tabLst>
-            </a:pPr>
-            <a:r>
-              <a:rPr lang="en-US" sz="2550" b="1" u="none" strike="noStrike">
-                <a:solidFill>
-                  <a:srgbClr val="F7AD30"/>
-                </a:solidFill>
-                <a:effectLst/>
-                <a:uFillTx/>
-                <a:latin typeface="Arial"/>
-                <a:ea typeface="Arial"/>
-              </a:rPr>
-              <a:t>S-reg</a:t>
-            </a:r>
-            <a:endParaRPr lang="en-US" sz="2550" b="0" u="none" strike="noStrike">
-              <a:solidFill>
-                <a:srgbClr val="FFFFFF"/>
-              </a:solidFill>
-              <a:effectLst/>
-              <a:uFillTx/>
-              <a:latin typeface="Arial"/>
-            </a:endParaRPr>
-          </a:p>
-        </p:txBody>
-      </p:sp>
-      <p:sp>
-        <p:nvSpPr>
-          <p:cNvPr id="353" name="Text 9"/>
-          <p:cNvSpPr/>
-          <p:nvPr/>
-        </p:nvSpPr>
-        <p:spPr>
-          <a:xfrm>
-            <a:off x="11391840" y="2652840"/>
-            <a:ext cx="5865840" cy="810720"/>
-          </a:xfrm>
-          <a:prstGeom prst="rect">
-            <a:avLst/>
-          </a:prstGeom>
-          <a:noFill/>
-          <a:ln w="0">
-            <a:noFill/>
-          </a:ln>
-        </p:spPr>
-        <p:style>
-          <a:lnRef idx="0"/>
-          <a:fillRef idx="0"/>
-          <a:effectRef idx="0"/>
-          <a:fontRef idx="minor"/>
-        </p:style>
-        <p:txBody>
-          <a:bodyPr lIns="0" tIns="0" rIns="0" bIns="0" anchor="t">
-            <a:normAutofit/>
-          </a:bodyPr>
-          <a:p>
-            <a:pPr defTabSz="914400">
-              <a:lnSpc>
-                <a:spcPct val="135000"/>
-              </a:lnSpc>
-              <a:tabLst>
-                <a:tab pos="0" algn="l"/>
-              </a:tabLst>
-            </a:pPr>
-            <a:r>
-              <a:rPr lang="en-US" sz="2550" b="0" u="none" strike="noStrike">
-                <a:solidFill>
-                  <a:srgbClr val="F3F2EE"/>
-                </a:solidFill>
-                <a:effectLst/>
-                <a:uFillTx/>
-                <a:latin typeface="Arial"/>
-                <a:ea typeface="Arial"/>
-              </a:rPr>
-              <a:t>(7 FF). Corre 1 vez por ventana.</a:t>
-            </a:r>
-            <a:endParaRPr lang="en-US" sz="2550" b="0" u="none" strike="noStrike">
-              <a:solidFill>
-                <a:srgbClr val="FFFFFF"/>
-              </a:solidFill>
-              <a:effectLst/>
-              <a:uFillTx/>
-              <a:latin typeface="Arial"/>
-            </a:endParaRPr>
-          </a:p>
-        </p:txBody>
-      </p:sp>
-      <p:sp>
-        <p:nvSpPr>
-          <p:cNvPr id="354" name="Text 10"/>
-          <p:cNvSpPr/>
-          <p:nvPr/>
-        </p:nvSpPr>
-        <p:spPr>
-          <a:xfrm>
-            <a:off x="11391840" y="3552840"/>
-            <a:ext cx="6023520" cy="757800"/>
-          </a:xfrm>
-          <a:prstGeom prst="rect">
-            <a:avLst/>
-          </a:prstGeom>
-          <a:noFill/>
-          <a:ln w="0">
-            <a:noFill/>
-          </a:ln>
-        </p:spPr>
-        <p:style>
-          <a:lnRef idx="0"/>
-          <a:fillRef idx="0"/>
-          <a:effectRef idx="0"/>
-          <a:fontRef idx="minor"/>
-        </p:style>
-        <p:txBody>
-          <a:bodyPr lIns="25560" tIns="25560" rIns="25560" bIns="25560" anchor="t">
-            <a:normAutofit fontScale="92500" lnSpcReduction="9999"/>
-          </a:bodyPr>
-          <a:p>
-            <a:pPr defTabSz="914400">
-              <a:lnSpc>
-                <a:spcPct val="135000"/>
-              </a:lnSpc>
-              <a:tabLst>
-                <a:tab pos="0" algn="l"/>
-              </a:tabLst>
-            </a:pPr>
-            <a:r>
-              <a:rPr lang="en-US" sz="2100" b="0" u="none" strike="noStrike">
-                <a:solidFill>
-                  <a:srgbClr val="BAB7B2"/>
-                </a:solidFill>
-                <a:effectLst/>
-                <a:uFillTx/>
-                <a:latin typeface="Arial"/>
-                <a:ea typeface="Arial"/>
-              </a:rPr>
-              <a:t>Camino x-reg → ADD① → S-reg ≈ </a:t>
-            </a:r>
-            <a:r>
-              <a:rPr lang="en-US" sz="2100" b="1" u="none" strike="noStrike">
-                <a:solidFill>
-                  <a:srgbClr val="BAB7B2"/>
-                </a:solidFill>
-                <a:effectLst/>
-                <a:uFillTx/>
-                <a:latin typeface="Arial"/>
-                <a:ea typeface="Arial"/>
-              </a:rPr>
-              <a:t>0.79 ns </a:t>
-            </a:r>
-            <a:r>
-              <a:rPr lang="en-US" sz="2100" b="0" u="none" strike="noStrike">
-                <a:solidFill>
-                  <a:srgbClr val="BAB7B2"/>
-                </a:solidFill>
-                <a:effectLst/>
-                <a:uFillTx/>
-                <a:latin typeface="Arial"/>
-                <a:ea typeface="Arial"/>
-              </a:rPr>
-              <a:t>, holgado.</a:t>
-            </a:r>
-            <a:endParaRPr lang="en-US" sz="2100" b="0" u="none" strike="noStrike">
-              <a:solidFill>
-                <a:srgbClr val="FFFFFF"/>
-              </a:solidFill>
-              <a:effectLst/>
-              <a:uFillTx/>
-              <a:latin typeface="Arial"/>
-            </a:endParaRPr>
-          </a:p>
-        </p:txBody>
-      </p:sp>
-      <p:sp>
-        <p:nvSpPr>
-          <p:cNvPr id="355" name="Text 11"/>
-          <p:cNvSpPr/>
-          <p:nvPr/>
-        </p:nvSpPr>
-        <p:spPr>
-          <a:xfrm>
-            <a:off x="11391840" y="4590000"/>
-            <a:ext cx="2113560" cy="373320"/>
-          </a:xfrm>
-          <a:prstGeom prst="rect">
-            <a:avLst/>
-          </a:prstGeom>
-          <a:noFill/>
-          <a:ln w="0">
-            <a:noFill/>
-          </a:ln>
-        </p:spPr>
-        <p:style>
-          <a:lnRef idx="0"/>
-          <a:fillRef idx="0"/>
-          <a:effectRef idx="0"/>
-          <a:fontRef idx="minor"/>
-        </p:style>
-        <p:txBody>
-          <a:bodyPr lIns="0" tIns="0" rIns="0" bIns="0" anchor="t">
-            <a:normAutofit fontScale="85000" lnSpcReduction="19999"/>
-          </a:bodyPr>
-          <a:p>
-            <a:pPr defTabSz="914400">
-              <a:lnSpc>
-                <a:spcPct val="135000"/>
-              </a:lnSpc>
-              <a:tabLst>
-                <a:tab pos="0" algn="l"/>
-              </a:tabLst>
-            </a:pPr>
-            <a:r>
-              <a:rPr lang="en-US" sz="2550" b="0" u="none" strike="noStrike">
-                <a:solidFill>
-                  <a:srgbClr val="F3F2EE"/>
-                </a:solidFill>
-                <a:effectLst/>
-                <a:uFillTx/>
-                <a:latin typeface="Arial"/>
-                <a:ea typeface="Arial"/>
-              </a:rPr>
-              <a:t>Cada ciclo, un</a:t>
-            </a:r>
-            <a:endParaRPr lang="en-US" sz="2550" b="0" u="none" strike="noStrike">
-              <a:solidFill>
-                <a:srgbClr val="FFFFFF"/>
-              </a:solidFill>
-              <a:effectLst/>
-              <a:uFillTx/>
-              <a:latin typeface="Arial"/>
-            </a:endParaRPr>
-          </a:p>
-        </p:txBody>
-      </p:sp>
-      <p:sp>
-        <p:nvSpPr>
-          <p:cNvPr id="356" name="Text 12"/>
-          <p:cNvSpPr/>
-          <p:nvPr/>
-        </p:nvSpPr>
-        <p:spPr>
-          <a:xfrm>
-            <a:off x="13519800" y="4590000"/>
-            <a:ext cx="1348920" cy="373320"/>
-          </a:xfrm>
-          <a:prstGeom prst="rect">
-            <a:avLst/>
-          </a:prstGeom>
-          <a:noFill/>
-          <a:ln w="0">
-            <a:noFill/>
-          </a:ln>
-        </p:spPr>
-        <p:style>
-          <a:lnRef idx="0"/>
-          <a:fillRef idx="0"/>
-          <a:effectRef idx="0"/>
-          <a:fontRef idx="minor"/>
-        </p:style>
-        <p:txBody>
-          <a:bodyPr lIns="25560" tIns="25560" rIns="25560" bIns="25560" anchor="t">
-            <a:normAutofit fontScale="70000" lnSpcReduction="19999"/>
-          </a:bodyPr>
-          <a:p>
-            <a:pPr defTabSz="914400">
-              <a:lnSpc>
-                <a:spcPct val="135000"/>
-              </a:lnSpc>
-              <a:tabLst>
-                <a:tab pos="0" algn="l"/>
-              </a:tabLst>
-            </a:pPr>
-            <a:r>
-              <a:rPr lang="en-US" sz="2550" b="1" u="none" strike="noStrike">
-                <a:solidFill>
-                  <a:srgbClr val="F3F2EE"/>
-                </a:solidFill>
-                <a:effectLst/>
-                <a:uFillTx/>
-                <a:latin typeface="Arial"/>
-                <a:ea typeface="Arial"/>
-              </a:rPr>
-              <a:t>MUX 3:1</a:t>
-            </a:r>
-            <a:endParaRPr lang="en-US" sz="2550" b="0" u="none" strike="noStrike">
-              <a:solidFill>
-                <a:srgbClr val="FFFFFF"/>
-              </a:solidFill>
-              <a:effectLst/>
-              <a:uFillTx/>
-              <a:latin typeface="Arial"/>
-            </a:endParaRPr>
-          </a:p>
-        </p:txBody>
-      </p:sp>
-      <p:sp>
-        <p:nvSpPr>
-          <p:cNvPr id="357" name="Text 13"/>
-          <p:cNvSpPr/>
-          <p:nvPr/>
-        </p:nvSpPr>
-        <p:spPr>
-          <a:xfrm>
-            <a:off x="11391840" y="4590000"/>
-            <a:ext cx="4647240" cy="810720"/>
-          </a:xfrm>
-          <a:prstGeom prst="rect">
-            <a:avLst/>
-          </a:prstGeom>
-          <a:noFill/>
-          <a:ln w="0">
-            <a:noFill/>
-          </a:ln>
-        </p:spPr>
-        <p:style>
-          <a:lnRef idx="0"/>
-          <a:fillRef idx="0"/>
-          <a:effectRef idx="0"/>
-          <a:fontRef idx="minor"/>
-        </p:style>
-        <p:txBody>
-          <a:bodyPr lIns="0" tIns="0" rIns="0" bIns="0" anchor="t">
-            <a:normAutofit/>
-          </a:bodyPr>
-          <a:p>
-            <a:pPr defTabSz="914400">
-              <a:lnSpc>
-                <a:spcPct val="135000"/>
-              </a:lnSpc>
-              <a:tabLst>
-                <a:tab pos="0" algn="l"/>
-              </a:tabLst>
-            </a:pPr>
-            <a:r>
-              <a:rPr lang="en-US" sz="2550" b="0" u="none" strike="noStrike">
-                <a:solidFill>
-                  <a:srgbClr val="F3F2EE"/>
-                </a:solidFill>
-                <a:effectLst/>
-                <a:uFillTx/>
-                <a:latin typeface="Arial"/>
-                <a:ea typeface="Arial"/>
-              </a:rPr>
-              <a:t>elige el operando y</a:t>
-            </a:r>
-            <a:endParaRPr lang="en-US" sz="2550" b="0" u="none" strike="noStrike">
-              <a:solidFill>
-                <a:srgbClr val="FFFFFF"/>
-              </a:solidFill>
-              <a:effectLst/>
-              <a:uFillTx/>
-              <a:latin typeface="Arial"/>
-            </a:endParaRPr>
-          </a:p>
-        </p:txBody>
-      </p:sp>
-      <p:sp>
-        <p:nvSpPr>
-          <p:cNvPr id="358" name="Text 14"/>
-          <p:cNvSpPr/>
-          <p:nvPr/>
-        </p:nvSpPr>
-        <p:spPr>
-          <a:xfrm>
-            <a:off x="11391840" y="5027400"/>
-            <a:ext cx="4150080" cy="810720"/>
-          </a:xfrm>
-          <a:prstGeom prst="rect">
-            <a:avLst/>
-          </a:prstGeom>
-          <a:noFill/>
-          <a:ln w="0">
-            <a:noFill/>
-          </a:ln>
-        </p:spPr>
-        <p:style>
-          <a:lnRef idx="0"/>
-          <a:fillRef idx="0"/>
-          <a:effectRef idx="0"/>
-          <a:fontRef idx="minor"/>
-        </p:style>
-        <p:txBody>
-          <a:bodyPr lIns="25560" tIns="25560" rIns="25560" bIns="25560" anchor="t">
-            <a:normAutofit fontScale="92500" lnSpcReduction="9999"/>
-          </a:bodyPr>
-          <a:p>
-            <a:pPr defTabSz="914400">
-              <a:lnSpc>
-                <a:spcPct val="135000"/>
-              </a:lnSpc>
-              <a:tabLst>
-                <a:tab pos="0" algn="l"/>
-              </a:tabLst>
-            </a:pPr>
-            <a:r>
-              <a:rPr lang="en-US" sz="2550" b="1" u="none" strike="noStrike">
-                <a:solidFill>
-                  <a:srgbClr val="F3F2EE"/>
-                </a:solidFill>
-                <a:effectLst/>
-                <a:uFillTx/>
-                <a:latin typeface="Arial"/>
-                <a:ea typeface="Arial"/>
-              </a:rPr>
-              <a:t>un único adder compartido</a:t>
-            </a:r>
-            <a:endParaRPr lang="en-US" sz="2550" b="0" u="none" strike="noStrike">
-              <a:solidFill>
-                <a:srgbClr val="FFFFFF"/>
-              </a:solidFill>
-              <a:effectLst/>
-              <a:uFillTx/>
-              <a:latin typeface="Arial"/>
-            </a:endParaRPr>
-          </a:p>
-        </p:txBody>
-      </p:sp>
-      <p:sp>
-        <p:nvSpPr>
-          <p:cNvPr id="359" name="Text 15"/>
-          <p:cNvSpPr/>
-          <p:nvPr/>
-        </p:nvSpPr>
-        <p:spPr>
-          <a:xfrm>
-            <a:off x="13251240" y="5464440"/>
-            <a:ext cx="3328920" cy="373320"/>
-          </a:xfrm>
-          <a:prstGeom prst="rect">
-            <a:avLst/>
-          </a:prstGeom>
-          <a:noFill/>
-          <a:ln w="0">
-            <a:noFill/>
-          </a:ln>
-        </p:spPr>
-        <p:style>
-          <a:lnRef idx="0"/>
-          <a:fillRef idx="0"/>
-          <a:effectRef idx="0"/>
-          <a:fontRef idx="minor"/>
-        </p:style>
-        <p:txBody>
-          <a:bodyPr lIns="0" tIns="0" rIns="0" bIns="0" anchor="t">
-            <a:normAutofit fontScale="85000" lnSpcReduction="19999"/>
-          </a:bodyPr>
-          <a:p>
-            <a:pPr defTabSz="914400">
-              <a:lnSpc>
-                <a:spcPct val="135000"/>
-              </a:lnSpc>
-              <a:tabLst>
-                <a:tab pos="0" algn="l"/>
-              </a:tabLst>
-            </a:pPr>
-            <a:r>
-              <a:rPr lang="en-US" sz="2550" b="0" u="none" strike="noStrike">
-                <a:solidFill>
-                  <a:srgbClr val="F3F2EE"/>
-                </a:solidFill>
-                <a:effectLst/>
-                <a:uFillTx/>
-                <a:latin typeface="Arial"/>
-                <a:ea typeface="Arial"/>
-              </a:rPr>
-              <a:t>produce la fase activa:</a:t>
-            </a:r>
-            <a:endParaRPr lang="en-US" sz="2550" b="0" u="none" strike="noStrike">
-              <a:solidFill>
-                <a:srgbClr val="FFFFFF"/>
-              </a:solidFill>
-              <a:effectLst/>
-              <a:uFillTx/>
-              <a:latin typeface="Arial"/>
-            </a:endParaRPr>
-          </a:p>
-        </p:txBody>
-      </p:sp>
-      <p:sp>
-        <p:nvSpPr>
-          <p:cNvPr id="360" name="Text 16"/>
-          <p:cNvSpPr/>
-          <p:nvPr/>
-        </p:nvSpPr>
-        <p:spPr>
-          <a:xfrm>
-            <a:off x="11391840" y="5927400"/>
-            <a:ext cx="6023520" cy="757800"/>
-          </a:xfrm>
-          <a:prstGeom prst="rect">
-            <a:avLst/>
-          </a:prstGeom>
-          <a:noFill/>
-          <a:ln w="0">
-            <a:noFill/>
-          </a:ln>
-        </p:spPr>
-        <p:style>
-          <a:lnRef idx="0"/>
-          <a:fillRef idx="0"/>
-          <a:effectRef idx="0"/>
-          <a:fontRef idx="minor"/>
-        </p:style>
-        <p:txBody>
-          <a:bodyPr lIns="25560" tIns="25560" rIns="25560" bIns="25560" anchor="t">
-            <a:normAutofit fontScale="92500" lnSpcReduction="9999"/>
-          </a:bodyPr>
-          <a:p>
-            <a:pPr defTabSz="914400">
-              <a:lnSpc>
-                <a:spcPct val="135000"/>
-              </a:lnSpc>
-              <a:tabLst>
-                <a:tab pos="0" algn="l"/>
-              </a:tabLst>
-            </a:pPr>
-            <a:r>
               <a:rPr lang="en-US" sz="2100" b="0" u="none" strike="noStrike">
                 <a:solidFill>
                   <a:srgbClr val="BAB7B2"/>
@@ -8124,120 +7861,10 @@
                 <a:latin typeface="Courier New"/>
                 <a:ea typeface="Courier New"/>
               </a:rPr>
-              <a:t>φ₀ = x_old (bypass) · φ₁ / φ₃ = S + 2·x · φ₂ = (S + 1) &gt;&gt; 1</a:t>
-            </a:r>
-            <a:endParaRPr lang="en-US" sz="2100" b="0" u="none" strike="noStrike">
-              <a:solidFill>
-                <a:srgbClr val="FFFFFF"/>
-              </a:solidFill>
-              <a:effectLst/>
-              <a:uFillTx/>
-              <a:latin typeface="Arial"/>
-            </a:endParaRPr>
-          </a:p>
-        </p:txBody>
-      </p:sp>
-      <p:sp>
-        <p:nvSpPr>
-          <p:cNvPr id="361" name="Text 17"/>
-          <p:cNvSpPr/>
-          <p:nvPr/>
-        </p:nvSpPr>
-        <p:spPr>
-          <a:xfrm>
-            <a:off x="11391840" y="6964560"/>
-            <a:ext cx="2824920" cy="373320"/>
-          </a:xfrm>
-          <a:prstGeom prst="rect">
-            <a:avLst/>
-          </a:prstGeom>
-          <a:noFill/>
-          <a:ln w="0">
-            <a:noFill/>
-          </a:ln>
-        </p:spPr>
-        <p:style>
-          <a:lnRef idx="0"/>
-          <a:fillRef idx="0"/>
-          <a:effectRef idx="0"/>
-          <a:fontRef idx="minor"/>
-        </p:style>
-        <p:txBody>
-          <a:bodyPr lIns="25560" tIns="25560" rIns="25560" bIns="25560" anchor="t">
-            <a:normAutofit fontScale="70000" lnSpcReduction="19999"/>
-          </a:bodyPr>
-          <a:p>
-            <a:pPr defTabSz="914400">
-              <a:lnSpc>
-                <a:spcPct val="135000"/>
-              </a:lnSpc>
-              <a:tabLst>
-                <a:tab pos="0" algn="l"/>
-              </a:tabLst>
-            </a:pPr>
-            <a:r>
-              <a:rPr lang="en-US" sz="2550" b="1" u="none" strike="noStrike">
-                <a:solidFill>
-                  <a:srgbClr val="F3F2EE"/>
-                </a:solidFill>
-                <a:effectLst/>
-                <a:uFillTx/>
-                <a:latin typeface="Arial"/>
-                <a:ea typeface="Arial"/>
-              </a:rPr>
-              <a:t>Camino por-ciclo:</a:t>
-            </a:r>
-            <a:endParaRPr lang="en-US" sz="2550" b="0" u="none" strike="noStrike">
-              <a:solidFill>
-                <a:srgbClr val="FFFFFF"/>
-              </a:solidFill>
-              <a:effectLst/>
-              <a:uFillTx/>
-              <a:latin typeface="Arial"/>
-            </a:endParaRPr>
-          </a:p>
-        </p:txBody>
-      </p:sp>
-      <p:sp>
-        <p:nvSpPr>
-          <p:cNvPr id="362" name="Text 18"/>
-          <p:cNvSpPr/>
-          <p:nvPr/>
-        </p:nvSpPr>
-        <p:spPr>
-          <a:xfrm>
-            <a:off x="11391840" y="7427520"/>
-            <a:ext cx="6023520" cy="1158840"/>
-          </a:xfrm>
-          <a:prstGeom prst="rect">
-            <a:avLst/>
-          </a:prstGeom>
-          <a:noFill/>
-          <a:ln w="0">
-            <a:noFill/>
-          </a:ln>
-        </p:spPr>
-        <p:style>
-          <a:lnRef idx="0"/>
-          <a:fillRef idx="0"/>
-          <a:effectRef idx="0"/>
-          <a:fontRef idx="minor"/>
-        </p:style>
-        <p:txBody>
-          <a:bodyPr lIns="25560" tIns="25560" rIns="25560" bIns="25560" anchor="t">
-            <a:normAutofit fontScale="85000" lnSpcReduction="9999"/>
-          </a:bodyPr>
-          <a:p>
-            <a:pPr defTabSz="914400">
-              <a:lnSpc>
-                <a:spcPct val="135000"/>
-              </a:lnSpc>
-              <a:tabLst>
-                <a:tab pos="0" algn="l"/>
-              </a:tabLst>
-            </a:pPr>
-            <a:r>
-              <a:rPr lang="en-US" sz="2100" b="0" u="none" strike="noStrike">
+              <a:t>t</a:t>
+            </a:r>
+            <a:r>
+              <a:rPr lang="en-US" sz="1750" b="0" u="none" strike="noStrike" baseline="-40000">
                 <a:solidFill>
                   <a:srgbClr val="BAB7B2"/>
                 </a:solidFill>
@@ -8246,10 +7873,10 @@
                 <a:latin typeface="Courier New"/>
                 <a:ea typeface="Courier New"/>
               </a:rPr>
-              <a:t>t</a:t>
-            </a:r>
-            <a:r>
-              <a:rPr lang="en-US" sz="1750" b="0" u="none" strike="noStrike" baseline="-40000">
+              <a:t>cq </a:t>
+            </a:r>
+            <a:r>
+              <a:rPr lang="en-US" sz="2100" b="0" u="none" strike="noStrike">
                 <a:solidFill>
                   <a:srgbClr val="BAB7B2"/>
                 </a:solidFill>
@@ -8258,30 +7885,18 @@
                 <a:latin typeface="Courier New"/>
                 <a:ea typeface="Courier New"/>
               </a:rPr>
-              <a:t>cq </a:t>
+              <a:t>(S-reg) + MUX 3:1 + adder + setup ≈ 0.30 + 0.10 + 0.60 + 0.10 ≈ </a:t>
             </a:r>
             <a:r>
               <a:rPr lang="en-US" sz="2100" b="0" u="none" strike="noStrike">
                 <a:solidFill>
-                  <a:srgbClr val="BAB7B2"/>
+                  <a:srgbClr val="F7AD30"/>
                 </a:solidFill>
                 <a:effectLst/>
                 <a:uFillTx/>
                 <a:latin typeface="Courier New"/>
                 <a:ea typeface="Courier New"/>
               </a:rPr>
-              <a:t>(S-reg) + MUX 3:1 + adder + setup ≈ 0.30 + 0.10 + 0.60 + 0.10 ≈ </a:t>
-            </a:r>
-            <a:r>
-              <a:rPr lang="en-US" sz="2100" b="0" u="none" strike="noStrike">
-                <a:solidFill>
-                  <a:srgbClr val="F7AD30"/>
-                </a:solidFill>
-                <a:effectLst/>
-                <a:uFillTx/>
-                <a:latin typeface="Courier New"/>
-                <a:ea typeface="Courier New"/>
-              </a:rPr>
               <a:t>1.1 ns → ~ 900 MHz</a:t>
             </a:r>
             <a:endParaRPr lang="en-US" sz="2100" b="0" u="none" strike="noStrike">
@@ -8297,14 +7912,14 @@
       </p:sp>
       <p:sp>
         <p:nvSpPr>
-          <p:cNvPr id="363" name="Text 19"/>
+          <p:cNvPr id="354" name="Text 19"/>
           <p:cNvSpPr/>
           <p:nvPr/>
         </p:nvSpPr>
         <p:spPr>
           <a:xfrm>
             <a:off x="11391840" y="8814960"/>
-            <a:ext cx="6034320" cy="1349280"/>
+            <a:ext cx="6033960" cy="1348920"/>
           </a:xfrm>
           <a:prstGeom prst="rect">
             <a:avLst/>
@@ -8431,14 +8046,14 @@
       </p:grpSpPr>
       <p:sp>
         <p:nvSpPr>
-          <p:cNvPr id="364" name="Text 0"/>
+          <p:cNvPr id="355" name="Text 0"/>
           <p:cNvSpPr/>
           <p:nvPr/>
         </p:nvSpPr>
         <p:spPr>
           <a:xfrm>
             <a:off x="1047600" y="419040"/>
-            <a:ext cx="7537680" cy="346320"/>
+            <a:ext cx="7537320" cy="345960"/>
           </a:xfrm>
           <a:prstGeom prst="rect">
             <a:avLst/>
@@ -8504,14 +8119,14 @@
       </p:sp>
       <p:sp>
         <p:nvSpPr>
-          <p:cNvPr id="365" name="Text 1"/>
+          <p:cNvPr id="356" name="Text 1"/>
           <p:cNvSpPr/>
           <p:nvPr/>
         </p:nvSpPr>
         <p:spPr>
           <a:xfrm>
             <a:off x="14752080" y="419040"/>
-            <a:ext cx="2563920" cy="346320"/>
+            <a:ext cx="2563560" cy="345960"/>
           </a:xfrm>
           <a:prstGeom prst="rect">
             <a:avLst/>
@@ -8565,14 +8180,14 @@
       </p:sp>
       <p:sp>
         <p:nvSpPr>
-          <p:cNvPr id="366" name="Text 2"/>
+          <p:cNvPr id="357" name="Text 2"/>
           <p:cNvSpPr/>
           <p:nvPr/>
         </p:nvSpPr>
         <p:spPr>
           <a:xfrm>
             <a:off x="1047600" y="952560"/>
-            <a:ext cx="16678080" cy="708480"/>
+            <a:ext cx="16677720" cy="708120"/>
           </a:xfrm>
           <a:prstGeom prst="rect">
             <a:avLst/>
@@ -8626,14 +8241,14 @@
       </p:sp>
       <p:sp>
         <p:nvSpPr>
-          <p:cNvPr id="367" name="Shape 3"/>
+          <p:cNvPr id="358" name="Shape 3"/>
           <p:cNvSpPr/>
           <p:nvPr/>
         </p:nvSpPr>
         <p:spPr>
           <a:xfrm>
             <a:off x="1047600" y="2118240"/>
-            <a:ext cx="16192080" cy="890640"/>
+            <a:ext cx="16191720" cy="890280"/>
           </a:xfrm>
           <a:prstGeom prst="roundRect">
             <a:avLst>
@@ -8674,14 +8289,14 @@
       </p:sp>
       <p:sp>
         <p:nvSpPr>
-          <p:cNvPr id="368" name="Text 4"/>
+          <p:cNvPr id="359" name="Text 4"/>
           <p:cNvSpPr/>
           <p:nvPr/>
         </p:nvSpPr>
         <p:spPr>
           <a:xfrm>
             <a:off x="1359720" y="2354040"/>
-            <a:ext cx="342720" cy="423360"/>
+            <a:ext cx="342360" cy="423000"/>
           </a:xfrm>
           <a:prstGeom prst="rect">
             <a:avLst/>
@@ -8735,14 +8350,14 @@
       </p:sp>
       <p:sp>
         <p:nvSpPr>
-          <p:cNvPr id="369" name="Text 5"/>
+          <p:cNvPr id="360" name="Text 5"/>
           <p:cNvSpPr/>
           <p:nvPr/>
         </p:nvSpPr>
         <p:spPr>
           <a:xfrm>
             <a:off x="1855080" y="2413440"/>
-            <a:ext cx="15525000" cy="397800"/>
+            <a:ext cx="15524640" cy="397440"/>
           </a:xfrm>
           <a:prstGeom prst="rect">
             <a:avLst/>
@@ -8820,14 +8435,14 @@
       </p:sp>
       <p:sp>
         <p:nvSpPr>
-          <p:cNvPr id="370" name="Shape 6"/>
+          <p:cNvPr id="361" name="Shape 6"/>
           <p:cNvSpPr/>
           <p:nvPr/>
         </p:nvSpPr>
         <p:spPr>
           <a:xfrm>
             <a:off x="1047600" y="3180600"/>
-            <a:ext cx="16192080" cy="1250640"/>
+            <a:ext cx="16191720" cy="1250280"/>
           </a:xfrm>
           <a:prstGeom prst="roundRect">
             <a:avLst>
@@ -8868,14 +8483,14 @@
       </p:sp>
       <p:sp>
         <p:nvSpPr>
-          <p:cNvPr id="371" name="Text 7"/>
+          <p:cNvPr id="362" name="Text 7"/>
           <p:cNvSpPr/>
           <p:nvPr/>
         </p:nvSpPr>
         <p:spPr>
           <a:xfrm>
             <a:off x="1359720" y="3416400"/>
-            <a:ext cx="342720" cy="423360"/>
+            <a:ext cx="342360" cy="423000"/>
           </a:xfrm>
           <a:prstGeom prst="rect">
             <a:avLst/>
@@ -8929,14 +8544,14 @@
       </p:sp>
       <p:sp>
         <p:nvSpPr>
-          <p:cNvPr id="372" name="Text 8"/>
+          <p:cNvPr id="363" name="Text 8"/>
           <p:cNvSpPr/>
           <p:nvPr/>
         </p:nvSpPr>
         <p:spPr>
           <a:xfrm>
             <a:off x="1855080" y="3450600"/>
-            <a:ext cx="15061320" cy="783000"/>
+            <a:ext cx="15060960" cy="782640"/>
           </a:xfrm>
           <a:prstGeom prst="rect">
             <a:avLst/>
@@ -9050,14 +8665,14 @@
       </p:sp>
       <p:sp>
         <p:nvSpPr>
-          <p:cNvPr id="373" name="Shape 9"/>
+          <p:cNvPr id="364" name="Shape 9"/>
           <p:cNvSpPr/>
           <p:nvPr/>
         </p:nvSpPr>
         <p:spPr>
           <a:xfrm>
             <a:off x="1047600" y="4602960"/>
-            <a:ext cx="16192080" cy="1250640"/>
+            <a:ext cx="16191720" cy="1250280"/>
           </a:xfrm>
           <a:prstGeom prst="roundRect">
             <a:avLst>
@@ -9098,14 +8713,14 @@
       </p:sp>
       <p:sp>
         <p:nvSpPr>
-          <p:cNvPr id="374" name="Text 10"/>
+          <p:cNvPr id="365" name="Text 10"/>
           <p:cNvSpPr/>
           <p:nvPr/>
         </p:nvSpPr>
         <p:spPr>
           <a:xfrm>
             <a:off x="1359720" y="4838760"/>
-            <a:ext cx="342720" cy="423360"/>
+            <a:ext cx="342360" cy="423000"/>
           </a:xfrm>
           <a:prstGeom prst="rect">
             <a:avLst/>
@@ -9159,14 +8774,14 @@
       </p:sp>
       <p:sp>
         <p:nvSpPr>
-          <p:cNvPr id="375" name="Text 11"/>
+          <p:cNvPr id="366" name="Text 11"/>
           <p:cNvSpPr/>
           <p:nvPr/>
         </p:nvSpPr>
         <p:spPr>
           <a:xfrm>
             <a:off x="1855080" y="4873320"/>
-            <a:ext cx="15525000" cy="783000"/>
+            <a:ext cx="15524640" cy="782640"/>
           </a:xfrm>
           <a:prstGeom prst="rect">
             <a:avLst/>
@@ -9268,14 +8883,14 @@
       </p:sp>
       <p:sp>
         <p:nvSpPr>
-          <p:cNvPr id="376" name="Shape 12"/>
+          <p:cNvPr id="367" name="Shape 12"/>
           <p:cNvSpPr/>
           <p:nvPr/>
         </p:nvSpPr>
         <p:spPr>
           <a:xfrm>
             <a:off x="1047600" y="6025680"/>
-            <a:ext cx="16192080" cy="1250640"/>
+            <a:ext cx="16191720" cy="1250280"/>
           </a:xfrm>
           <a:prstGeom prst="roundRect">
             <a:avLst>
@@ -9316,14 +8931,14 @@
       </p:sp>
       <p:sp>
         <p:nvSpPr>
-          <p:cNvPr id="377" name="Text 13"/>
+          <p:cNvPr id="368" name="Text 13"/>
           <p:cNvSpPr/>
           <p:nvPr/>
         </p:nvSpPr>
         <p:spPr>
           <a:xfrm>
             <a:off x="1359720" y="6261120"/>
-            <a:ext cx="342720" cy="423360"/>
+            <a:ext cx="342360" cy="423000"/>
           </a:xfrm>
           <a:prstGeom prst="rect">
             <a:avLst/>
@@ -9377,14 +8992,14 @@
       </p:sp>
       <p:sp>
         <p:nvSpPr>
-          <p:cNvPr id="378" name="Text 14"/>
+          <p:cNvPr id="369" name="Text 14"/>
           <p:cNvSpPr/>
           <p:nvPr/>
         </p:nvSpPr>
         <p:spPr>
           <a:xfrm>
             <a:off x="1855080" y="6320520"/>
-            <a:ext cx="15061320" cy="757800"/>
+            <a:ext cx="15060960" cy="757440"/>
           </a:xfrm>
           <a:prstGeom prst="rect">
             <a:avLst/>
@@ -9474,14 +9089,14 @@
       </p:sp>
       <p:sp>
         <p:nvSpPr>
-          <p:cNvPr id="379" name="Shape 15"/>
+          <p:cNvPr id="370" name="Shape 15"/>
           <p:cNvSpPr/>
           <p:nvPr/>
         </p:nvSpPr>
         <p:spPr>
           <a:xfrm>
             <a:off x="1047600" y="7448040"/>
-            <a:ext cx="16192080" cy="1289880"/>
+            <a:ext cx="16191720" cy="1289520"/>
           </a:xfrm>
           <a:prstGeom prst="roundRect">
             <a:avLst>
@@ -9522,14 +9137,14 @@
       </p:sp>
       <p:sp>
         <p:nvSpPr>
-          <p:cNvPr id="380" name="Text 16"/>
+          <p:cNvPr id="371" name="Text 16"/>
           <p:cNvSpPr/>
           <p:nvPr/>
         </p:nvSpPr>
         <p:spPr>
           <a:xfrm>
             <a:off x="1359720" y="7683480"/>
-            <a:ext cx="342720" cy="423360"/>
+            <a:ext cx="342360" cy="423000"/>
           </a:xfrm>
           <a:prstGeom prst="rect">
             <a:avLst/>
@@ -9583,14 +9198,14 @@
       </p:sp>
       <p:sp>
         <p:nvSpPr>
-          <p:cNvPr id="381" name="Text 17"/>
+          <p:cNvPr id="372" name="Text 17"/>
           <p:cNvSpPr/>
           <p:nvPr/>
         </p:nvSpPr>
         <p:spPr>
           <a:xfrm>
             <a:off x="1855080" y="7703640"/>
-            <a:ext cx="15061320" cy="836640"/>
+            <a:ext cx="15060960" cy="836280"/>
           </a:xfrm>
           <a:prstGeom prst="rect">
             <a:avLst/>
@@ -9717,14 +9332,14 @@
       </p:grpSpPr>
       <p:sp>
         <p:nvSpPr>
-          <p:cNvPr id="382" name="Text 0"/>
+          <p:cNvPr id="373" name="Text 0"/>
           <p:cNvSpPr/>
           <p:nvPr/>
         </p:nvSpPr>
         <p:spPr>
           <a:xfrm>
             <a:off x="1047600" y="419040"/>
-            <a:ext cx="7688160" cy="346320"/>
+            <a:ext cx="7687800" cy="345960"/>
           </a:xfrm>
           <a:prstGeom prst="rect">
             <a:avLst/>
@@ -9790,14 +9405,14 @@
       </p:sp>
       <p:sp>
         <p:nvSpPr>
-          <p:cNvPr id="383" name="Text 1"/>
+          <p:cNvPr id="374" name="Text 1"/>
           <p:cNvSpPr/>
           <p:nvPr/>
         </p:nvSpPr>
         <p:spPr>
           <a:xfrm>
             <a:off x="10800000" y="419040"/>
-            <a:ext cx="6633000" cy="346320"/>
+            <a:ext cx="6632640" cy="345960"/>
           </a:xfrm>
           <a:prstGeom prst="rect">
             <a:avLst/>
@@ -9851,14 +9466,14 @@
       </p:sp>
       <p:sp>
         <p:nvSpPr>
-          <p:cNvPr id="384" name="Text 2"/>
+          <p:cNvPr id="375" name="Text 2"/>
           <p:cNvSpPr/>
           <p:nvPr/>
         </p:nvSpPr>
         <p:spPr>
           <a:xfrm>
             <a:off x="1047600" y="952560"/>
-            <a:ext cx="16678080" cy="708480"/>
+            <a:ext cx="16677720" cy="708120"/>
           </a:xfrm>
           <a:prstGeom prst="rect">
             <a:avLst/>
@@ -9912,14 +9527,14 @@
       </p:sp>
       <p:sp>
         <p:nvSpPr>
-          <p:cNvPr id="385" name="Text 3"/>
+          <p:cNvPr id="376" name="Text 3"/>
           <p:cNvSpPr/>
           <p:nvPr/>
         </p:nvSpPr>
         <p:spPr>
           <a:xfrm>
             <a:off x="1409760" y="2169000"/>
-            <a:ext cx="4528440" cy="373320"/>
+            <a:ext cx="14157360" cy="899640"/>
           </a:xfrm>
           <a:prstGeom prst="rect">
             <a:avLst/>
@@ -9937,7 +9552,104 @@
         </p:style>
         <p:txBody>
           <a:bodyPr lIns="25560" tIns="25560" rIns="25560" bIns="25560" anchor="t">
-            <a:normAutofit fontScale="70000" lnSpcReduction="19999"/>
+            <a:normAutofit lnSpcReduction="9999"/>
+          </a:bodyPr>
+          <a:p>
+            <a:pPr defTabSz="914400">
+              <a:lnSpc>
+                <a:spcPct val="120000"/>
+              </a:lnSpc>
+              <a:tabLst>
+                <a:tab pos="0" algn="l"/>
+              </a:tabLst>
+            </a:pPr>
+            <a:r>
+              <a:rPr lang="en-US" sz="2550" b="1" u="none" strike="noStrike">
+                <a:solidFill>
+                  <a:srgbClr val="F3F2EE"/>
+                </a:solidFill>
+                <a:effectLst/>
+                <a:uFillTx/>
+                <a:latin typeface="Arial"/>
+                <a:ea typeface="Arial"/>
+              </a:rPr>
+              <a:t>Offset binary sin corrección.</a:t>
+            </a:r>
+            <a:r>
+              <a:rPr lang="en-US" sz="2550" b="0" u="none" strike="noStrike">
+                <a:solidFill>
+                  <a:srgbClr val="F3F2EE"/>
+                </a:solidFill>
+                <a:effectLst/>
+                <a:uFillTx/>
+                <a:latin typeface="Arial"/>
+                <a:ea typeface="Arial"/>
+              </a:rPr>
+              <a:t> Como la ganancia DC es unitaria (los pesos de cada fase suman 1), el offset de </a:t>
+            </a:r>
+            <a:r>
+              <a:rPr lang="en-US" sz="2550" b="0" u="none" strike="noStrike">
+                <a:solidFill>
+                  <a:srgbClr val="F3F2EE"/>
+                </a:solidFill>
+                <a:effectLst/>
+                <a:uFillTx/>
+                <a:latin typeface="Courier New"/>
+                <a:ea typeface="Courier New"/>
+              </a:rPr>
+              <a:t>−32</a:t>
+            </a:r>
+            <a:r>
+              <a:rPr lang="en-US" sz="2550" b="0" u="none" strike="noStrike">
+                <a:solidFill>
+                  <a:srgbClr val="F3F2EE"/>
+                </a:solidFill>
+                <a:effectLst/>
+                <a:uFillTx/>
+                <a:latin typeface="Arial"/>
+                <a:ea typeface="Arial"/>
+              </a:rPr>
+              <a:t> de cada operando se cancela solo.</a:t>
+            </a:r>
+            <a:endParaRPr lang="en-US" sz="2550" b="0" u="none" strike="noStrike">
+              <a:solidFill>
+                <a:srgbClr val="FFFFFF"/>
+              </a:solidFill>
+              <a:effectLst/>
+              <a:uFillTx/>
+              <a:latin typeface="Arial"/>
+            </a:endParaRPr>
+          </a:p>
+        </p:txBody>
+      </p:sp>
+      <p:sp>
+        <p:nvSpPr>
+          <p:cNvPr id="377" name="Text 7"/>
+          <p:cNvSpPr/>
+          <p:nvPr/>
+        </p:nvSpPr>
+        <p:spPr>
+          <a:xfrm>
+            <a:off x="1409760" y="3115440"/>
+            <a:ext cx="14146560" cy="397440"/>
+          </a:xfrm>
+          <a:prstGeom prst="rect">
+            <a:avLst/>
+          </a:prstGeom>
+          <a:noFill/>
+          <a:ln w="0">
+            <a:noFill/>
+          </a:ln>
+        </p:spPr>
+        <p:style>
+          <a:lnRef idx="0"/>
+          <a:fillRef idx="0"/>
+          <a:effectRef idx="0"/>
+          <a:fontRef idx="minor"/>
+        </p:style>
+        <p:txBody>
+          <a:bodyPr lIns="25560" tIns="25560" rIns="25560" bIns="25560" anchor="t">
+            <a:normAutofit fontScale="85000" lnSpcReduction="9999"/>
           </a:bodyPr>
           <a:p>
             <a:pPr defTabSz="914400">
@@ -9949,56 +9661,56 @@
               </a:tabLst>
             </a:pPr>
             <a:r>
-              <a:rPr lang="en-US" sz="2550" b="1" u="none" strike="noStrike">
-                <a:solidFill>
-                  <a:srgbClr val="F3F2EE"/>
+              <a:rPr lang="en-US" sz="2100" b="0" u="none" strike="noStrike">
+                <a:solidFill>
+                  <a:srgbClr val="BAB7B2"/>
                 </a:solidFill>
                 <a:effectLst/>
                 <a:uFillTx/>
                 <a:latin typeface="Arial"/>
                 <a:ea typeface="Arial"/>
               </a:rPr>
-              <a:t>Offset binary sin corrección.</a:t>
-            </a:r>
-            <a:endParaRPr lang="en-US" sz="2550" b="0" u="none" strike="noStrike">
-              <a:solidFill>
-                <a:srgbClr val="FFFFFF"/>
-              </a:solidFill>
-              <a:effectLst/>
-              <a:uFillTx/>
-              <a:latin typeface="Arial"/>
-            </a:endParaRPr>
-          </a:p>
-        </p:txBody>
-      </p:sp>
-      <p:sp>
-        <p:nvSpPr>
-          <p:cNvPr id="386" name="Text 4"/>
-          <p:cNvSpPr/>
-          <p:nvPr/>
-        </p:nvSpPr>
-        <p:spPr>
-          <a:xfrm>
-            <a:off x="1409760" y="2169000"/>
-            <a:ext cx="13122000" cy="857160"/>
-          </a:xfrm>
-          <a:prstGeom prst="rect">
-            <a:avLst/>
-          </a:prstGeom>
-          <a:noFill/>
-          <a:ln w="0">
-            <a:noFill/>
-          </a:ln>
-        </p:spPr>
-        <p:style>
-          <a:lnRef idx="0"/>
-          <a:fillRef idx="0"/>
-          <a:effectRef idx="0"/>
-          <a:fontRef idx="minor"/>
-        </p:style>
-        <p:txBody>
-          <a:bodyPr lIns="0" tIns="0" rIns="0" bIns="0" anchor="t">
-            <a:normAutofit/>
+              <a:t>No hace falta lógica de conversión a complemento a 2.</a:t>
+            </a:r>
+            <a:endParaRPr lang="en-US" sz="2100" b="0" u="none" strike="noStrike">
+              <a:solidFill>
+                <a:srgbClr val="FFFFFF"/>
+              </a:solidFill>
+              <a:effectLst/>
+              <a:uFillTx/>
+              <a:latin typeface="Arial"/>
+            </a:endParaRPr>
+          </a:p>
+        </p:txBody>
+      </p:sp>
+      <p:sp>
+        <p:nvSpPr>
+          <p:cNvPr id="378" name="Text 8"/>
+          <p:cNvSpPr/>
+          <p:nvPr/>
+        </p:nvSpPr>
+        <p:spPr>
+          <a:xfrm>
+            <a:off x="1409760" y="3742200"/>
+            <a:ext cx="14157360" cy="958320"/>
+          </a:xfrm>
+          <a:prstGeom prst="rect">
+            <a:avLst/>
+          </a:prstGeom>
+          <a:noFill/>
+          <a:ln w="0">
+            <a:noFill/>
+          </a:ln>
+        </p:spPr>
+        <p:style>
+          <a:lnRef idx="0"/>
+          <a:fillRef idx="0"/>
+          <a:effectRef idx="0"/>
+          <a:fontRef idx="minor"/>
+        </p:style>
+        <p:txBody>
+          <a:bodyPr lIns="25560" tIns="25560" rIns="25560" bIns="25560" anchor="t">
+            <a:normAutofit fontScale="92500" lnSpcReduction="9999"/>
           </a:bodyPr>
           <a:p>
             <a:pPr defTabSz="914400">
@@ -10010,7 +9722,7 @@
               </a:tabLst>
             </a:pPr>
             <a:r>
-              <a:rPr lang="en-US" sz="2550" b="0" u="none" strike="noStrike">
+              <a:rPr lang="en-US" sz="2550" b="1" u="none" strike="noStrike">
                 <a:solidFill>
                   <a:srgbClr val="F3F2EE"/>
                 </a:solidFill>
@@ -10019,7 +9731,43 @@
                 <a:latin typeface="Arial"/>
                 <a:ea typeface="Arial"/>
               </a:rPr>
-              <a:t>Como la ganancia DC es unitaria (los pesos de cada fase suman 1), el offset de</a:t>
+              <a:t>Sin desbordamiento. </a:t>
+            </a:r>
+            <a:r>
+              <a:rPr lang="en-US" sz="2550" b="0" u="none" strike="noStrike">
+                <a:solidFill>
+                  <a:srgbClr val="F3F2EE"/>
+                </a:solidFill>
+                <a:effectLst/>
+                <a:uFillTx/>
+                <a:latin typeface="Arial"/>
+                <a:ea typeface="Arial"/>
+              </a:rPr>
+              <a:t>Las fases son combinaciones convexas de valores en </a:t>
+            </a:r>
+            <a:r>
+              <a:rPr lang="en-US" sz="2550" b="0" u="none" strike="noStrike">
+                <a:solidFill>
+                  <a:srgbClr val="F3F2EE"/>
+                </a:solidFill>
+                <a:effectLst/>
+                <a:uFillTx/>
+                <a:latin typeface="Courier New"/>
+                <a:ea typeface="Courier New"/>
+              </a:rPr>
+              <a:t>[0, 63] </a:t>
+            </a:r>
+            <a:r>
+              <a:rPr lang="en-US" sz="2550" b="0" u="none" strike="noStrike">
+                <a:solidFill>
+                  <a:srgbClr val="F3F2EE"/>
+                </a:solidFill>
+                <a:effectLst/>
+                <a:uFillTx/>
+                <a:latin typeface="Arial"/>
+                <a:ea typeface="Arial"/>
+              </a:rPr>
+              <a:t>→ ninguna excede 6 bits, no se necesita saturación.</a:t>
             </a:r>
             <a:endParaRPr lang="en-US" sz="2550" b="0" u="none" strike="noStrike">
               <a:solidFill>
@@ -10034,14 +9782,14 @@
       </p:sp>
       <p:sp>
         <p:nvSpPr>
-          <p:cNvPr id="387" name="Text 5"/>
-          <p:cNvSpPr/>
-          <p:nvPr/>
-        </p:nvSpPr>
-        <p:spPr>
-          <a:xfrm>
-            <a:off x="4609080" y="2567160"/>
-            <a:ext cx="658800" cy="452160"/>
+          <p:cNvPr id="379" name="Text 9"/>
+          <p:cNvSpPr/>
+          <p:nvPr/>
+        </p:nvSpPr>
+        <p:spPr>
+          <a:xfrm>
+            <a:off x="1409760" y="5027040"/>
+            <a:ext cx="14157360" cy="899640"/>
           </a:xfrm>
           <a:prstGeom prst="rect">
             <a:avLst/>
@@ -10059,18 +9807,42 @@
         </p:style>
         <p:txBody>
           <a:bodyPr lIns="25560" tIns="25560" rIns="25560" bIns="25560" anchor="t">
-            <a:normAutofit fontScale="85000" lnSpcReduction="19999"/>
+            <a:normAutofit lnSpcReduction="9999"/>
           </a:bodyPr>
           <a:p>
             <a:pPr defTabSz="914400">
               <a:lnSpc>
-                <a:spcPct val="135000"/>
+                <a:spcPct val="120000"/>
               </a:lnSpc>
               <a:tabLst>
                 <a:tab pos="0" algn="l"/>
               </a:tabLst>
             </a:pPr>
             <a:r>
+              <a:rPr lang="en-US" sz="2550" b="1" u="none" strike="noStrike">
+                <a:solidFill>
+                  <a:srgbClr val="F3F2EE"/>
+                </a:solidFill>
+                <a:effectLst/>
+                <a:uFillTx/>
+                <a:latin typeface="Arial"/>
+                <a:ea typeface="Arial"/>
+              </a:rPr>
+              <a:t>Trade-off de φ₂.</a:t>
+            </a:r>
+            <a:r>
+              <a:rPr lang="en-US" sz="2550" b="0" u="none" strike="noStrike">
+                <a:solidFill>
+                  <a:srgbClr val="F3F2EE"/>
+                </a:solidFill>
+                <a:effectLst/>
+                <a:uFillTx/>
+                <a:latin typeface="Arial"/>
+                <a:ea typeface="Arial"/>
+              </a:rPr>
+              <a:t> Versión "free wire" </a:t>
+            </a:r>
+            <a:r>
               <a:rPr lang="en-US" sz="2550" b="0" u="none" strike="noStrike">
                 <a:solidFill>
                   <a:srgbClr val="F3F2EE"/>
@@ -10080,57 +9852,8 @@
                 <a:latin typeface="Courier New"/>
                 <a:ea typeface="Courier New"/>
               </a:rPr>
-              <a:t>−32</a:t>
-            </a:r>
-            <a:endParaRPr lang="en-US" sz="2550" b="0" u="none" strike="noStrike">
-              <a:solidFill>
-                <a:srgbClr val="FFFFFF"/>
-              </a:solidFill>
-              <a:effectLst/>
-              <a:uFillTx/>
-              <a:latin typeface="Arial"/>
-            </a:endParaRPr>
-          </a:p>
-        </p:txBody>
-      </p:sp>
-      <p:sp>
-        <p:nvSpPr>
-          <p:cNvPr id="388" name="Text 6"/>
-          <p:cNvSpPr/>
-          <p:nvPr/>
-        </p:nvSpPr>
-        <p:spPr>
-          <a:xfrm>
-            <a:off x="5281920" y="2652840"/>
-            <a:ext cx="5166360" cy="373320"/>
-          </a:xfrm>
-          <a:prstGeom prst="rect">
-            <a:avLst/>
-          </a:prstGeom>
-          <a:noFill/>
-          <a:ln w="0">
-            <a:noFill/>
-          </a:ln>
-        </p:spPr>
-        <p:style>
-          <a:lnRef idx="0"/>
-          <a:fillRef idx="0"/>
-          <a:effectRef idx="0"/>
-          <a:fontRef idx="minor"/>
-        </p:style>
-        <p:txBody>
-          <a:bodyPr lIns="0" tIns="0" rIns="0" bIns="0" anchor="t">
-            <a:normAutofit fontScale="85000" lnSpcReduction="19999"/>
-          </a:bodyPr>
-          <a:p>
-            <a:pPr defTabSz="914400">
-              <a:lnSpc>
-                <a:spcPct val="135000"/>
-              </a:lnSpc>
-              <a:tabLst>
-                <a:tab pos="0" algn="l"/>
-              </a:tabLst>
-            </a:pPr>
+              <a:t>S &gt;&gt; 1</a:t>
+            </a:r>
             <a:r>
               <a:rPr lang="en-US" sz="2550" b="0" u="none" strike="noStrike">
                 <a:solidFill>
@@ -10141,737 +9864,31 @@
                 <a:latin typeface="Arial"/>
                 <a:ea typeface="Arial"/>
               </a:rPr>
-              <a:t>de cada operando se cancela solo.</a:t>
-            </a:r>
-            <a:endParaRPr lang="en-US" sz="2550" b="0" u="none" strike="noStrike">
-              <a:solidFill>
-                <a:srgbClr val="FFFFFF"/>
-              </a:solidFill>
-              <a:effectLst/>
-              <a:uFillTx/>
-              <a:latin typeface="Arial"/>
-            </a:endParaRPr>
-          </a:p>
-        </p:txBody>
-      </p:sp>
-      <p:sp>
-        <p:nvSpPr>
-          <p:cNvPr id="389" name="Text 7"/>
-          <p:cNvSpPr/>
-          <p:nvPr/>
-        </p:nvSpPr>
-        <p:spPr>
-          <a:xfrm>
-            <a:off x="1409760" y="3115440"/>
-            <a:ext cx="14146920" cy="397800"/>
-          </a:xfrm>
-          <a:prstGeom prst="rect">
-            <a:avLst/>
-          </a:prstGeom>
-          <a:noFill/>
-          <a:ln w="0">
-            <a:noFill/>
-          </a:ln>
-        </p:spPr>
-        <p:style>
-          <a:lnRef idx="0"/>
-          <a:fillRef idx="0"/>
-          <a:effectRef idx="0"/>
-          <a:fontRef idx="minor"/>
-        </p:style>
-        <p:txBody>
-          <a:bodyPr lIns="25560" tIns="25560" rIns="25560" bIns="25560" anchor="t">
-            <a:normAutofit fontScale="85000" lnSpcReduction="9999"/>
-          </a:bodyPr>
-          <a:p>
-            <a:pPr defTabSz="914400">
-              <a:lnSpc>
-                <a:spcPct val="135000"/>
-              </a:lnSpc>
-              <a:tabLst>
-                <a:tab pos="0" algn="l"/>
-              </a:tabLst>
-            </a:pPr>
-            <a:r>
-              <a:rPr lang="en-US" sz="2100" b="0" u="none" strike="noStrike">
-                <a:solidFill>
-                  <a:srgbClr val="BAB7B2"/>
+              <a:t> = 0 compuertas pero con sesgo de ½ LSB; versión redondeada </a:t>
+            </a:r>
+            <a:r>
+              <a:rPr lang="en-US" sz="2550" b="0" u="none" strike="noStrike">
+                <a:solidFill>
+                  <a:srgbClr val="F3F2EE"/>
+                </a:solidFill>
+                <a:effectLst/>
+                <a:uFillTx/>
+                <a:latin typeface="Courier New"/>
+                <a:ea typeface="Courier New"/>
+              </a:rPr>
+              <a:t>(S + 1) &gt;&gt; 1</a:t>
+            </a:r>
+            <a:r>
+              <a:rPr lang="en-US" sz="2550" b="0" u="none" strike="noStrike">
+                <a:solidFill>
+                  <a:srgbClr val="F3F2EE"/>
                 </a:solidFill>
                 <a:effectLst/>
                 <a:uFillTx/>
                 <a:latin typeface="Arial"/>
                 <a:ea typeface="Arial"/>
               </a:rPr>
-              <a:t>No hace falta lógica de conversión a complemento a 2.</a:t>
-            </a:r>
-            <a:endParaRPr lang="en-US" sz="2100" b="0" u="none" strike="noStrike">
-              <a:solidFill>
-                <a:srgbClr val="FFFFFF"/>
-              </a:solidFill>
-              <a:effectLst/>
-              <a:uFillTx/>
-              <a:latin typeface="Arial"/>
-            </a:endParaRPr>
-          </a:p>
-        </p:txBody>
-      </p:sp>
-      <p:sp>
-        <p:nvSpPr>
-          <p:cNvPr id="390" name="Text 8"/>
-          <p:cNvSpPr/>
-          <p:nvPr/>
-        </p:nvSpPr>
-        <p:spPr>
-          <a:xfrm>
-            <a:off x="1409760" y="3742200"/>
-            <a:ext cx="14157720" cy="958680"/>
-          </a:xfrm>
-          <a:prstGeom prst="rect">
-            <a:avLst/>
-          </a:prstGeom>
-          <a:noFill/>
-          <a:ln w="0">
-            <a:noFill/>
-          </a:ln>
-        </p:spPr>
-        <p:style>
-          <a:lnRef idx="0"/>
-          <a:fillRef idx="0"/>
-          <a:effectRef idx="0"/>
-          <a:fontRef idx="minor"/>
-        </p:style>
-        <p:txBody>
-          <a:bodyPr lIns="25560" tIns="25560" rIns="25560" bIns="25560" anchor="t">
-            <a:normAutofit fontScale="92500" lnSpcReduction="9999"/>
-          </a:bodyPr>
-          <a:p>
-            <a:pPr defTabSz="914400">
-              <a:lnSpc>
-                <a:spcPct val="135000"/>
-              </a:lnSpc>
-              <a:tabLst>
-                <a:tab pos="0" algn="l"/>
-              </a:tabLst>
-            </a:pPr>
-            <a:r>
-              <a:rPr lang="en-US" sz="2550" b="1" u="none" strike="noStrike">
-                <a:solidFill>
-                  <a:srgbClr val="F3F2EE"/>
-                </a:solidFill>
-                <a:effectLst/>
-                <a:uFillTx/>
-                <a:latin typeface="Arial"/>
-                <a:ea typeface="Arial"/>
-              </a:rPr>
-              <a:t>Sin desbordamiento. </a:t>
-            </a:r>
-            <a:r>
-              <a:rPr lang="en-US" sz="2550" b="0" u="none" strike="noStrike">
-                <a:solidFill>
-                  <a:srgbClr val="F3F2EE"/>
-                </a:solidFill>
-                <a:effectLst/>
-                <a:uFillTx/>
-                <a:latin typeface="Arial"/>
-                <a:ea typeface="Arial"/>
-              </a:rPr>
-              <a:t>Las fases son combinaciones convexas de valores en </a:t>
-            </a:r>
-            <a:r>
-              <a:rPr lang="en-US" sz="2550" b="0" u="none" strike="noStrike">
-                <a:solidFill>
-                  <a:srgbClr val="F3F2EE"/>
-                </a:solidFill>
-                <a:effectLst/>
-                <a:uFillTx/>
-                <a:latin typeface="Courier New"/>
-                <a:ea typeface="Courier New"/>
-              </a:rPr>
-              <a:t>[0, 63] </a:t>
-            </a:r>
-            <a:r>
-              <a:rPr lang="en-US" sz="2550" b="0" u="none" strike="noStrike">
-                <a:solidFill>
-                  <a:srgbClr val="F3F2EE"/>
-                </a:solidFill>
-                <a:effectLst/>
-                <a:uFillTx/>
-                <a:latin typeface="Arial"/>
-                <a:ea typeface="Arial"/>
-              </a:rPr>
-              <a:t>→ ninguna excede 6 bits, no se necesita saturación.</a:t>
-            </a:r>
-            <a:endParaRPr lang="en-US" sz="2550" b="0" u="none" strike="noStrike">
-              <a:solidFill>
-                <a:srgbClr val="FFFFFF"/>
-              </a:solidFill>
-              <a:effectLst/>
-              <a:uFillTx/>
-              <a:latin typeface="Arial"/>
-            </a:endParaRPr>
-          </a:p>
-        </p:txBody>
-      </p:sp>
-      <p:sp>
-        <p:nvSpPr>
-          <p:cNvPr id="391" name="Text 9"/>
-          <p:cNvSpPr/>
-          <p:nvPr/>
-        </p:nvSpPr>
-        <p:spPr>
-          <a:xfrm>
-            <a:off x="1409760" y="5027040"/>
-            <a:ext cx="2489400" cy="373320"/>
-          </a:xfrm>
-          <a:prstGeom prst="rect">
-            <a:avLst/>
-          </a:prstGeom>
-          <a:noFill/>
-          <a:ln w="0">
-            <a:noFill/>
-          </a:ln>
-        </p:spPr>
-        <p:style>
-          <a:lnRef idx="0"/>
-          <a:fillRef idx="0"/>
-          <a:effectRef idx="0"/>
-          <a:fontRef idx="minor"/>
-        </p:style>
-        <p:txBody>
-          <a:bodyPr lIns="25560" tIns="25560" rIns="25560" bIns="25560" anchor="t">
-            <a:normAutofit fontScale="70000" lnSpcReduction="19999"/>
-          </a:bodyPr>
-          <a:p>
-            <a:pPr defTabSz="914400">
-              <a:lnSpc>
-                <a:spcPct val="135000"/>
-              </a:lnSpc>
-              <a:tabLst>
-                <a:tab pos="0" algn="l"/>
-              </a:tabLst>
-            </a:pPr>
-            <a:r>
-              <a:rPr lang="en-US" sz="2550" b="1" u="none" strike="noStrike">
-                <a:solidFill>
-                  <a:srgbClr val="F3F2EE"/>
-                </a:solidFill>
-                <a:effectLst/>
-                <a:uFillTx/>
-                <a:latin typeface="Arial"/>
-                <a:ea typeface="Arial"/>
-              </a:rPr>
-              <a:t>Trade-off de φ₂.</a:t>
-            </a:r>
-            <a:endParaRPr lang="en-US" sz="2550" b="0" u="none" strike="noStrike">
-              <a:solidFill>
-                <a:srgbClr val="FFFFFF"/>
-              </a:solidFill>
-              <a:effectLst/>
-              <a:uFillTx/>
-              <a:latin typeface="Arial"/>
-            </a:endParaRPr>
-          </a:p>
-        </p:txBody>
-      </p:sp>
-      <p:sp>
-        <p:nvSpPr>
-          <p:cNvPr id="392" name="Text 10"/>
-          <p:cNvSpPr/>
-          <p:nvPr/>
-        </p:nvSpPr>
-        <p:spPr>
-          <a:xfrm>
-            <a:off x="3913200" y="5027040"/>
-            <a:ext cx="2716560" cy="373320"/>
-          </a:xfrm>
-          <a:prstGeom prst="rect">
-            <a:avLst/>
-          </a:prstGeom>
-          <a:noFill/>
-          <a:ln w="0">
-            <a:noFill/>
-          </a:ln>
-        </p:spPr>
-        <p:style>
-          <a:lnRef idx="0"/>
-          <a:fillRef idx="0"/>
-          <a:effectRef idx="0"/>
-          <a:fontRef idx="minor"/>
-        </p:style>
-        <p:txBody>
-          <a:bodyPr lIns="0" tIns="0" rIns="0" bIns="0" anchor="t">
-            <a:normAutofit fontScale="85000" lnSpcReduction="19999"/>
-          </a:bodyPr>
-          <a:p>
-            <a:pPr defTabSz="914400">
-              <a:lnSpc>
-                <a:spcPct val="135000"/>
-              </a:lnSpc>
-              <a:tabLst>
-                <a:tab pos="0" algn="l"/>
-              </a:tabLst>
-            </a:pPr>
-            <a:r>
-              <a:rPr lang="en-US" sz="2550" b="0" u="none" strike="noStrike">
-                <a:solidFill>
-                  <a:srgbClr val="F3F2EE"/>
-                </a:solidFill>
-                <a:effectLst/>
-                <a:uFillTx/>
-                <a:latin typeface="Arial"/>
-                <a:ea typeface="Arial"/>
-              </a:rPr>
-              <a:t>Versión "free wire"</a:t>
-            </a:r>
-            <a:endParaRPr lang="en-US" sz="2550" b="0" u="none" strike="noStrike">
-              <a:solidFill>
-                <a:srgbClr val="FFFFFF"/>
-              </a:solidFill>
-              <a:effectLst/>
-              <a:uFillTx/>
-              <a:latin typeface="Arial"/>
-            </a:endParaRPr>
-          </a:p>
-        </p:txBody>
-      </p:sp>
-      <p:sp>
-        <p:nvSpPr>
-          <p:cNvPr id="393" name="Text 11"/>
-          <p:cNvSpPr/>
-          <p:nvPr/>
-        </p:nvSpPr>
-        <p:spPr>
-          <a:xfrm>
-            <a:off x="6640920" y="4941360"/>
-            <a:ext cx="1241640" cy="452160"/>
-          </a:xfrm>
-          <a:prstGeom prst="rect">
-            <a:avLst/>
-          </a:prstGeom>
-          <a:noFill/>
-          <a:ln w="0">
-            <a:noFill/>
-          </a:ln>
-        </p:spPr>
-        <p:style>
-          <a:lnRef idx="0"/>
-          <a:fillRef idx="0"/>
-          <a:effectRef idx="0"/>
-          <a:fontRef idx="minor"/>
-        </p:style>
-        <p:txBody>
-          <a:bodyPr lIns="25560" tIns="25560" rIns="25560" bIns="25560" anchor="t">
-            <a:normAutofit fontScale="85000" lnSpcReduction="19999"/>
-          </a:bodyPr>
-          <a:p>
-            <a:pPr defTabSz="914400">
-              <a:lnSpc>
-                <a:spcPct val="135000"/>
-              </a:lnSpc>
-              <a:tabLst>
-                <a:tab pos="0" algn="l"/>
-              </a:tabLst>
-            </a:pPr>
-            <a:r>
-              <a:rPr lang="en-US" sz="2550" b="0" u="none" strike="noStrike">
-                <a:solidFill>
-                  <a:srgbClr val="F3F2EE"/>
-                </a:solidFill>
-                <a:effectLst/>
-                <a:uFillTx/>
-                <a:latin typeface="Courier New"/>
-                <a:ea typeface="Courier New"/>
-              </a:rPr>
-              <a:t>S &gt;&gt; 1</a:t>
-            </a:r>
-            <a:endParaRPr lang="en-US" sz="2550" b="0" u="none" strike="noStrike">
-              <a:solidFill>
-                <a:srgbClr val="FFFFFF"/>
-              </a:solidFill>
-              <a:effectLst/>
-              <a:uFillTx/>
-              <a:latin typeface="Arial"/>
-            </a:endParaRPr>
-          </a:p>
-        </p:txBody>
-      </p:sp>
-      <p:sp>
-        <p:nvSpPr>
-          <p:cNvPr id="394" name="Text 12"/>
-          <p:cNvSpPr/>
-          <p:nvPr/>
-        </p:nvSpPr>
-        <p:spPr>
-          <a:xfrm>
-            <a:off x="1409760" y="5027040"/>
-            <a:ext cx="13015800" cy="857160"/>
-          </a:xfrm>
-          <a:prstGeom prst="rect">
-            <a:avLst/>
-          </a:prstGeom>
-          <a:noFill/>
-          <a:ln w="0">
-            <a:noFill/>
-          </a:ln>
-        </p:spPr>
-        <p:style>
-          <a:lnRef idx="0"/>
-          <a:fillRef idx="0"/>
-          <a:effectRef idx="0"/>
-          <a:fontRef idx="minor"/>
-        </p:style>
-        <p:txBody>
-          <a:bodyPr lIns="0" tIns="0" rIns="0" bIns="0" anchor="t">
-            <a:normAutofit/>
-          </a:bodyPr>
-          <a:p>
-            <a:pPr defTabSz="914400">
-              <a:lnSpc>
-                <a:spcPct val="135000"/>
-              </a:lnSpc>
-              <a:tabLst>
-                <a:tab pos="0" algn="l"/>
-              </a:tabLst>
-            </a:pPr>
-            <a:r>
-              <a:rPr lang="en-US" sz="2550" b="0" u="none" strike="noStrike">
-                <a:solidFill>
-                  <a:srgbClr val="F3F2EE"/>
-                </a:solidFill>
-                <a:effectLst/>
-                <a:uFillTx/>
-                <a:latin typeface="Arial"/>
-                <a:ea typeface="Arial"/>
-              </a:rPr>
-              <a:t>= 0 compuertas pero con sesgo de ½ LSB; versión redondeada</a:t>
-            </a:r>
-            <a:endParaRPr lang="en-US" sz="2550" b="0" u="none" strike="noStrike">
-              <a:solidFill>
-                <a:srgbClr val="FFFFFF"/>
-              </a:solidFill>
-              <a:effectLst/>
-              <a:uFillTx/>
-              <a:latin typeface="Arial"/>
-            </a:endParaRPr>
-          </a:p>
-        </p:txBody>
-      </p:sp>
-      <p:sp>
-        <p:nvSpPr>
-          <p:cNvPr id="395" name="Text 13"/>
-          <p:cNvSpPr/>
-          <p:nvPr/>
-        </p:nvSpPr>
-        <p:spPr>
-          <a:xfrm>
-            <a:off x="4349880" y="5424840"/>
-            <a:ext cx="2407680" cy="452160"/>
-          </a:xfrm>
-          <a:prstGeom prst="rect">
-            <a:avLst/>
-          </a:prstGeom>
-          <a:noFill/>
-          <a:ln w="0">
-            <a:noFill/>
-          </a:ln>
-        </p:spPr>
-        <p:style>
-          <a:lnRef idx="0"/>
-          <a:fillRef idx="0"/>
-          <a:effectRef idx="0"/>
-          <a:fontRef idx="minor"/>
-        </p:style>
-        <p:txBody>
-          <a:bodyPr lIns="25560" tIns="25560" rIns="25560" bIns="25560" anchor="t">
-            <a:normAutofit fontScale="85000" lnSpcReduction="19999"/>
-          </a:bodyPr>
-          <a:p>
-            <a:pPr defTabSz="914400">
-              <a:lnSpc>
-                <a:spcPct val="135000"/>
-              </a:lnSpc>
-              <a:tabLst>
-                <a:tab pos="0" algn="l"/>
-              </a:tabLst>
-            </a:pPr>
-            <a:r>
-              <a:rPr lang="en-US" sz="2550" b="0" u="none" strike="noStrike">
-                <a:solidFill>
-                  <a:srgbClr val="F3F2EE"/>
-                </a:solidFill>
-                <a:effectLst/>
-                <a:uFillTx/>
-                <a:latin typeface="Courier New"/>
-                <a:ea typeface="Courier New"/>
-              </a:rPr>
-              <a:t>(S + 1) &gt;&gt; 1</a:t>
-            </a:r>
-            <a:endParaRPr lang="en-US" sz="2550" b="0" u="none" strike="noStrike">
-              <a:solidFill>
-                <a:srgbClr val="FFFFFF"/>
-              </a:solidFill>
-              <a:effectLst/>
-              <a:uFillTx/>
-              <a:latin typeface="Arial"/>
-            </a:endParaRPr>
-          </a:p>
-        </p:txBody>
-      </p:sp>
-      <p:sp>
-        <p:nvSpPr>
-          <p:cNvPr id="396" name="Text 14"/>
-          <p:cNvSpPr/>
-          <p:nvPr/>
-        </p:nvSpPr>
-        <p:spPr>
-          <a:xfrm>
-            <a:off x="6771600" y="5510520"/>
-            <a:ext cx="5188680" cy="373320"/>
-          </a:xfrm>
-          <a:prstGeom prst="rect">
-            <a:avLst/>
-          </a:prstGeom>
-          <a:noFill/>
-          <a:ln w="0">
-            <a:noFill/>
-          </a:ln>
-        </p:spPr>
-        <p:style>
-          <a:lnRef idx="0"/>
-          <a:fillRef idx="0"/>
-          <a:effectRef idx="0"/>
-          <a:fontRef idx="minor"/>
-        </p:style>
-        <p:txBody>
-          <a:bodyPr lIns="0" tIns="0" rIns="0" bIns="0" anchor="t">
-            <a:normAutofit fontScale="85000" lnSpcReduction="19999"/>
-          </a:bodyPr>
-          <a:p>
-            <a:pPr defTabSz="914400">
-              <a:lnSpc>
-                <a:spcPct val="135000"/>
-              </a:lnSpc>
-              <a:tabLst>
-                <a:tab pos="0" algn="l"/>
-              </a:tabLst>
-            </a:pPr>
-            <a:r>
-              <a:rPr lang="en-US" sz="2550" b="0" u="none" strike="noStrike">
-                <a:solidFill>
-                  <a:srgbClr val="F3F2EE"/>
-                </a:solidFill>
-                <a:effectLst/>
-                <a:uFillTx/>
-                <a:latin typeface="Arial"/>
-                <a:ea typeface="Arial"/>
-              </a:rPr>
-              <a:t>= sin sesgo, ~ 6 medio-sumadores.</a:t>
-            </a:r>
-            <a:endParaRPr lang="en-US" sz="2550" b="0" u="none" strike="noStrike">
-              <a:solidFill>
-                <a:srgbClr val="FFFFFF"/>
-              </a:solidFill>
-              <a:effectLst/>
-              <a:uFillTx/>
-              <a:latin typeface="Arial"/>
-            </a:endParaRPr>
-          </a:p>
-        </p:txBody>
-      </p:sp>
-      <p:sp>
-        <p:nvSpPr>
-          <p:cNvPr id="397" name="Text 15"/>
-          <p:cNvSpPr/>
-          <p:nvPr/>
-        </p:nvSpPr>
-        <p:spPr>
-          <a:xfrm>
-            <a:off x="1409760" y="5973480"/>
-            <a:ext cx="14146920" cy="397800"/>
-          </a:xfrm>
-          <a:prstGeom prst="rect">
-            <a:avLst/>
-          </a:prstGeom>
-          <a:noFill/>
-          <a:ln w="0">
-            <a:noFill/>
-          </a:ln>
-        </p:spPr>
-        <p:style>
-          <a:lnRef idx="0"/>
-          <a:fillRef idx="0"/>
-          <a:effectRef idx="0"/>
-          <a:fontRef idx="minor"/>
-        </p:style>
-        <p:txBody>
-          <a:bodyPr lIns="25560" tIns="25560" rIns="25560" bIns="25560" anchor="t">
-            <a:normAutofit fontScale="85000" lnSpcReduction="9999"/>
-          </a:bodyPr>
-          <a:p>
-            <a:pPr defTabSz="914400">
-              <a:lnSpc>
-                <a:spcPct val="135000"/>
-              </a:lnSpc>
-              <a:tabLst>
-                <a:tab pos="0" algn="l"/>
-              </a:tabLst>
-            </a:pPr>
-            <a:r>
-              <a:rPr lang="en-US" sz="2100" b="0" u="none" strike="noStrike">
-                <a:solidFill>
-                  <a:srgbClr val="BAB7B2"/>
-                </a:solidFill>
-                <a:effectLst/>
-                <a:uFillTx/>
-                <a:latin typeface="Arial"/>
-                <a:ea typeface="Arial"/>
-              </a:rPr>
-              <a:t>Elegimos </a:t>
-            </a:r>
-            <a:r>
-              <a:rPr lang="en-US" sz="2100" b="0" u="none" strike="noStrike">
-                <a:solidFill>
-                  <a:srgbClr val="F7AD30"/>
-                </a:solidFill>
-                <a:effectLst/>
-                <a:uFillTx/>
-                <a:latin typeface="Arial"/>
-                <a:ea typeface="Arial"/>
-              </a:rPr>
-              <a:t>[la que decidas] </a:t>
-            </a:r>
-            <a:r>
-              <a:rPr lang="en-US" sz="2100" b="0" u="none" strike="noStrike">
-                <a:solidFill>
-                  <a:srgbClr val="BAB7B2"/>
-                </a:solidFill>
-                <a:effectLst/>
-                <a:uFillTx/>
-                <a:latin typeface="Arial"/>
-                <a:ea typeface="Arial"/>
-              </a:rPr>
-              <a:t>porque </a:t>
-            </a:r>
-            <a:r>
-              <a:rPr lang="en-US" sz="2100" b="0" u="none" strike="noStrike">
-                <a:solidFill>
-                  <a:srgbClr val="F7AD30"/>
-                </a:solidFill>
-                <a:effectLst/>
-                <a:uFillTx/>
-                <a:latin typeface="Arial"/>
-                <a:ea typeface="Arial"/>
-              </a:rPr>
-              <a:t>[justificación]</a:t>
-            </a:r>
-            <a:r>
-              <a:rPr lang="en-US" sz="2100" b="0" u="none" strike="noStrike">
-                <a:solidFill>
-                  <a:srgbClr val="BAB7B2"/>
-                </a:solidFill>
-                <a:effectLst/>
-                <a:uFillTx/>
-                <a:latin typeface="Arial"/>
-                <a:ea typeface="Arial"/>
-              </a:rPr>
-              <a:t>.</a:t>
-            </a:r>
-            <a:endParaRPr lang="en-US" sz="2100" b="0" u="none" strike="noStrike">
-              <a:solidFill>
-                <a:srgbClr val="FFFFFF"/>
-              </a:solidFill>
-              <a:effectLst/>
-              <a:uFillTx/>
-              <a:latin typeface="Arial"/>
-            </a:endParaRPr>
-          </a:p>
-        </p:txBody>
-      </p:sp>
-      <p:sp>
-        <p:nvSpPr>
-          <p:cNvPr id="398" name="Text 16"/>
-          <p:cNvSpPr/>
-          <p:nvPr/>
-        </p:nvSpPr>
-        <p:spPr>
-          <a:xfrm>
-            <a:off x="1409760" y="6600240"/>
-            <a:ext cx="14157720" cy="982800"/>
-          </a:xfrm>
-          <a:prstGeom prst="rect">
-            <a:avLst/>
-          </a:prstGeom>
-          <a:noFill/>
-          <a:ln w="0">
-            <a:noFill/>
-          </a:ln>
-        </p:spPr>
-        <p:style>
-          <a:lnRef idx="0"/>
-          <a:fillRef idx="0"/>
-          <a:effectRef idx="0"/>
-          <a:fontRef idx="minor"/>
-        </p:style>
-        <p:txBody>
-          <a:bodyPr lIns="25560" tIns="25560" rIns="25560" bIns="25560" anchor="t">
-            <a:normAutofit fontScale="85000" lnSpcReduction="9999"/>
-          </a:bodyPr>
-          <a:p>
-            <a:pPr defTabSz="914400">
-              <a:lnSpc>
-                <a:spcPct val="135000"/>
-              </a:lnSpc>
-              <a:tabLst>
-                <a:tab pos="0" algn="l"/>
-              </a:tabLst>
-            </a:pPr>
-            <a:r>
-              <a:rPr lang="en-US" sz="2550" b="0" i="1" u="none" strike="noStrike">
-                <a:solidFill>
-                  <a:srgbClr val="F3F2EE"/>
-                </a:solidFill>
-                <a:effectLst/>
-                <a:uFillTx/>
-                <a:latin typeface="Arial"/>
-                <a:ea typeface="Arial"/>
-              </a:rPr>
-              <a:t>(Opcional) </a:t>
-            </a:r>
-            <a:r>
-              <a:rPr lang="en-US" sz="2550" b="0" u="none" strike="noStrike">
-                <a:solidFill>
-                  <a:srgbClr val="F3F2EE"/>
-                </a:solidFill>
-                <a:effectLst/>
-                <a:uFillTx/>
-                <a:latin typeface="Arial"/>
-                <a:ea typeface="Arial"/>
-              </a:rPr>
-              <a:t>Exigencia mayor si el grupo es de 3: variante segmentada para f</a:t>
-            </a:r>
-            <a:r>
-              <a:rPr lang="en-US" sz="2129" b="0" u="none" strike="noStrike" baseline="-40000">
-                <a:solidFill>
-                  <a:srgbClr val="F3F2EE"/>
-                </a:solidFill>
-                <a:effectLst/>
-                <a:uFillTx/>
-                <a:latin typeface="Arial"/>
-                <a:ea typeface="Arial"/>
-              </a:rPr>
-              <a:t>máx </a:t>
-            </a:r>
-            <a:r>
-              <a:rPr lang="en-US" sz="2550" b="0" u="none" strike="noStrike">
-                <a:solidFill>
-                  <a:srgbClr val="F3F2EE"/>
-                </a:solidFill>
-                <a:effectLst/>
-                <a:uFillTx/>
-                <a:latin typeface="Arial"/>
-                <a:ea typeface="Arial"/>
-              </a:rPr>
-              <a:t>más alta, o análisis de error de cuantización de las 4 fases.</a:t>
+              <a:t> = sin sesgo, ~ 6 medio-sumadores.</a:t>
             </a:r>
             <a:endParaRPr lang="en-US" sz="2550" b="0" u="none" strike="noStrike">
               <a:solidFill>
@@ -10923,14 +9940,14 @@
       </p:grpSpPr>
       <p:sp>
         <p:nvSpPr>
-          <p:cNvPr id="399" name="Text 0"/>
+          <p:cNvPr id="380" name="Text 0"/>
           <p:cNvSpPr/>
           <p:nvPr/>
         </p:nvSpPr>
         <p:spPr>
           <a:xfrm>
             <a:off x="1047600" y="419040"/>
-            <a:ext cx="1393200" cy="346320"/>
+            <a:ext cx="1392840" cy="345960"/>
           </a:xfrm>
           <a:prstGeom prst="rect">
             <a:avLst/>
@@ -10996,14 +10013,14 @@
       </p:sp>
       <p:sp>
         <p:nvSpPr>
-          <p:cNvPr id="400" name="Text 1"/>
+          <p:cNvPr id="381" name="Text 1"/>
           <p:cNvSpPr/>
           <p:nvPr/>
         </p:nvSpPr>
         <p:spPr>
           <a:xfrm>
             <a:off x="10653840" y="419040"/>
-            <a:ext cx="6783840" cy="346320"/>
+            <a:ext cx="6783480" cy="345960"/>
           </a:xfrm>
           <a:prstGeom prst="rect">
             <a:avLst/>
@@ -11057,14 +10074,14 @@
       </p:sp>
       <p:sp>
         <p:nvSpPr>
-          <p:cNvPr id="401" name="Text 2"/>
+          <p:cNvPr id="382" name="Text 2"/>
           <p:cNvSpPr/>
           <p:nvPr/>
         </p:nvSpPr>
         <p:spPr>
           <a:xfrm>
             <a:off x="1047600" y="3626280"/>
-            <a:ext cx="16678080" cy="397800"/>
+            <a:ext cx="16677720" cy="397440"/>
           </a:xfrm>
           <a:prstGeom prst="rect">
             <a:avLst/>
@@ -11118,14 +10135,14 @@
       </p:sp>
       <p:sp>
         <p:nvSpPr>
-          <p:cNvPr id="402" name="Text 3"/>
+          <p:cNvPr id="383" name="Text 3"/>
           <p:cNvSpPr/>
           <p:nvPr/>
         </p:nvSpPr>
         <p:spPr>
           <a:xfrm>
             <a:off x="1047600" y="4214880"/>
-            <a:ext cx="16678080" cy="856440"/>
+            <a:ext cx="16677720" cy="856080"/>
           </a:xfrm>
           <a:prstGeom prst="rect">
             <a:avLst/>
@@ -11203,14 +10220,14 @@
       </p:sp>
       <p:sp>
         <p:nvSpPr>
-          <p:cNvPr id="403" name="Text 4"/>
+          <p:cNvPr id="384" name="Text 4"/>
           <p:cNvSpPr/>
           <p:nvPr/>
         </p:nvSpPr>
         <p:spPr>
           <a:xfrm>
             <a:off x="1047600" y="5376600"/>
-            <a:ext cx="14715720" cy="1127520"/>
+            <a:ext cx="14715360" cy="1127160"/>
           </a:xfrm>
           <a:prstGeom prst="rect">
             <a:avLst/>
@@ -11264,14 +10281,14 @@
       </p:sp>
       <p:sp>
         <p:nvSpPr>
-          <p:cNvPr id="404" name="Text 5"/>
+          <p:cNvPr id="385" name="Text 5"/>
           <p:cNvSpPr/>
           <p:nvPr/>
         </p:nvSpPr>
         <p:spPr>
           <a:xfrm>
             <a:off x="1047600" y="9140040"/>
-            <a:ext cx="16678080" cy="346320"/>
+            <a:ext cx="16677720" cy="345960"/>
           </a:xfrm>
           <a:prstGeom prst="rect">
             <a:avLst/>
@@ -11369,7 +10386,7 @@
         <p:spPr>
           <a:xfrm>
             <a:off x="1047600" y="419040"/>
-            <a:ext cx="4673160" cy="346320"/>
+            <a:ext cx="4672800" cy="345960"/>
           </a:xfrm>
           <a:prstGeom prst="rect">
             <a:avLst/>
@@ -11420,7 +10437,19 @@
                 <a:latin typeface="Courier New"/>
                 <a:ea typeface="Courier New"/>
               </a:rPr>
-              <a:t>IMPLEMENTACIÓN PROPUESTA</a:t>
+              <a:t>IMPLEMENTACIÓN </a:t>
+            </a:r>
+            <a:r>
+              <a:rPr lang="en-US" sz="1800" b="0" u="none" spc="71" strike="noStrike">
+                <a:solidFill>
+                  <a:srgbClr val="7C8186"/>
+                </a:solidFill>
+                <a:effectLst/>
+                <a:uFillTx/>
+                <a:latin typeface="Courier New"/>
+                <a:ea typeface="Courier New"/>
+              </a:rPr>
+              <a:t>PROPUESTA</a:t>
             </a:r>
             <a:endParaRPr lang="en-US" sz="1800" b="0" u="none" strike="noStrike">
               <a:solidFill>
@@ -11442,7 +10471,7 @@
         <p:spPr>
           <a:xfrm>
             <a:off x="9336240" y="419040"/>
-            <a:ext cx="8140680" cy="346320"/>
+            <a:ext cx="8140320" cy="345960"/>
           </a:xfrm>
           <a:prstGeom prst="rect">
             <a:avLst/>
@@ -11503,7 +10532,7 @@
         <p:spPr>
           <a:xfrm>
             <a:off x="1047600" y="952560"/>
-            <a:ext cx="16678080" cy="708480"/>
+            <a:ext cx="16677720" cy="708120"/>
           </a:xfrm>
           <a:prstGeom prst="rect">
             <a:avLst/>
@@ -11542,7 +10571,19 @@
                 <a:latin typeface="Arial"/>
                 <a:ea typeface="Arial"/>
               </a:rPr>
-              <a:t>El FIR colapsa a un interpolador de 2 puntos</a:t>
+              <a:t>El FIR colapsa a un interpolador de 2 </a:t>
+            </a:r>
+            <a:r>
+              <a:rPr lang="en-US" sz="4800" b="1" u="none" spc="-71" strike="noStrike">
+                <a:solidFill>
+                  <a:srgbClr val="F3F2EE"/>
+                </a:solidFill>
+                <a:effectLst/>
+                <a:uFillTx/>
+                <a:latin typeface="Arial"/>
+                <a:ea typeface="Arial"/>
+              </a:rPr>
+              <a:t>puntos</a:t>
             </a:r>
             <a:endParaRPr lang="en-US" sz="4800" b="0" u="none" strike="noStrike">
               <a:solidFill>
@@ -11564,7 +10605,7 @@
         <p:spPr>
           <a:xfrm>
             <a:off x="1409760" y="3312000"/>
-            <a:ext cx="8178120" cy="373320"/>
+            <a:ext cx="8177760" cy="372960"/>
           </a:xfrm>
           <a:prstGeom prst="rect">
             <a:avLst/>
@@ -11625,7 +10666,7 @@
         <p:spPr>
           <a:xfrm>
             <a:off x="1409760" y="3774600"/>
-            <a:ext cx="8691840" cy="397800"/>
+            <a:ext cx="8691480" cy="397440"/>
           </a:xfrm>
           <a:prstGeom prst="rect">
             <a:avLst/>
@@ -11686,7 +10727,7 @@
         <p:spPr>
           <a:xfrm>
             <a:off x="1409760" y="4765320"/>
-            <a:ext cx="7962840" cy="1635480"/>
+            <a:ext cx="7962480" cy="1635120"/>
           </a:xfrm>
           <a:prstGeom prst="rect">
             <a:avLst/>
@@ -11749,7 +10790,19 @@
                 <a:latin typeface="Arial"/>
                 <a:ea typeface="Arial"/>
               </a:rPr>
-              <a:t>. Las 4 salidas son combinaciones convexas → sumas, shifts y un mux.</a:t>
+              <a:t>. Las 4 salidas son </a:t>
+            </a:r>
+            <a:r>
+              <a:rPr lang="en-US" sz="2170" b="0" u="none" strike="noStrike">
+                <a:solidFill>
+                  <a:srgbClr val="F3F2EE"/>
+                </a:solidFill>
+                <a:effectLst/>
+                <a:uFillTx/>
+                <a:latin typeface="Arial"/>
+                <a:ea typeface="Arial"/>
+              </a:rPr>
+              <a:t>combinaciones convexas → sumas, shifts y un mux.</a:t>
             </a:r>
             <a:endParaRPr lang="en-US" sz="2170" b="0" u="none" strike="noStrike">
               <a:solidFill>
@@ -11771,7 +10824,7 @@
         <p:spPr>
           <a:xfrm>
             <a:off x="7769160" y="3536640"/>
-            <a:ext cx="1047240" cy="452160"/>
+            <a:ext cx="1046880" cy="451800"/>
           </a:xfrm>
           <a:prstGeom prst="rect">
             <a:avLst/>
@@ -11790,6 +10843,88 @@
         <p:txBody>
           <a:bodyPr lIns="25560" tIns="25560" rIns="25560" bIns="25560" anchor="t">
             <a:normAutofit/>
+          </a:bodyPr>
+          <a:p>
+            <a:endParaRPr lang="en-US" sz="1800" b="0" u="none" strike="noStrike">
+              <a:solidFill>
+                <a:srgbClr val="FFFFFF"/>
+              </a:solidFill>
+              <a:effectLst/>
+              <a:uFillTx/>
+              <a:latin typeface="Arial"/>
+            </a:endParaRPr>
+          </a:p>
+        </p:txBody>
+      </p:sp>
+      <p:sp>
+        <p:nvSpPr>
+          <p:cNvPr id="27" name="Text 9"/>
+          <p:cNvSpPr/>
+          <p:nvPr/>
+        </p:nvSpPr>
+        <p:spPr>
+          <a:xfrm>
+            <a:off x="1409760" y="5943600"/>
+            <a:ext cx="7983720" cy="810360"/>
+          </a:xfrm>
+          <a:prstGeom prst="rect">
+            <a:avLst/>
+          </a:prstGeom>
+          <a:noFill/>
+          <a:ln w="0">
+            <a:noFill/>
+          </a:ln>
+        </p:spPr>
+        <p:style>
+          <a:lnRef idx="0"/>
+          <a:fillRef idx="0"/>
+          <a:effectRef idx="0"/>
+          <a:fontRef idx="minor"/>
+        </p:style>
+        <p:txBody>
+          <a:bodyPr lIns="0" tIns="0" rIns="0" bIns="0" anchor="t">
+            <a:normAutofit/>
+          </a:bodyPr>
+          <a:p>
+            <a:endParaRPr lang="en-US" sz="1800" b="0" u="none" strike="noStrike">
+              <a:solidFill>
+                <a:srgbClr val="FFFFFF"/>
+              </a:solidFill>
+              <a:effectLst/>
+              <a:uFillTx/>
+              <a:latin typeface="Arial"/>
+            </a:endParaRPr>
+          </a:p>
+        </p:txBody>
+      </p:sp>
+      <p:sp>
+        <p:nvSpPr>
+          <p:cNvPr id="28" name="Text 10"/>
+          <p:cNvSpPr/>
+          <p:nvPr/>
+        </p:nvSpPr>
+        <p:spPr>
+          <a:xfrm>
+            <a:off x="1409760" y="6231600"/>
+            <a:ext cx="8691480" cy="397440"/>
+          </a:xfrm>
+          <a:prstGeom prst="rect">
+            <a:avLst/>
+          </a:prstGeom>
+          <a:noFill/>
+          <a:ln w="0">
+            <a:noFill/>
+          </a:ln>
+        </p:spPr>
+        <p:style>
+          <a:lnRef idx="0"/>
+          <a:fillRef idx="0"/>
+          <a:effectRef idx="0"/>
+          <a:fontRef idx="minor"/>
+        </p:style>
+        <p:txBody>
+          <a:bodyPr lIns="25560" tIns="25560" rIns="25560" bIns="25560" anchor="t">
+            <a:normAutofit fontScale="85000" lnSpcReduction="9999"/>
           </a:bodyPr>
           <a:p>
             <a:pPr defTabSz="914400">
@@ -11800,104 +10935,6 @@
                 <a:tab pos="0" algn="l"/>
               </a:tabLst>
             </a:pPr>
-            <a:endParaRPr lang="en-US" sz="1800" b="0" u="none" strike="noStrike">
-              <a:solidFill>
-                <a:srgbClr val="FFFFFF"/>
-              </a:solidFill>
-              <a:effectLst/>
-              <a:uFillTx/>
-              <a:latin typeface="Arial"/>
-            </a:endParaRPr>
-          </a:p>
-        </p:txBody>
-      </p:sp>
-      <p:sp>
-        <p:nvSpPr>
-          <p:cNvPr id="27" name="Text 9"/>
-          <p:cNvSpPr/>
-          <p:nvPr/>
-        </p:nvSpPr>
-        <p:spPr>
-          <a:xfrm>
-            <a:off x="1409760" y="5943600"/>
-            <a:ext cx="7984080" cy="810720"/>
-          </a:xfrm>
-          <a:prstGeom prst="rect">
-            <a:avLst/>
-          </a:prstGeom>
-          <a:noFill/>
-          <a:ln w="0">
-            <a:noFill/>
-          </a:ln>
-        </p:spPr>
-        <p:style>
-          <a:lnRef idx="0"/>
-          <a:fillRef idx="0"/>
-          <a:effectRef idx="0"/>
-          <a:fontRef idx="minor"/>
-        </p:style>
-        <p:txBody>
-          <a:bodyPr lIns="0" tIns="0" rIns="0" bIns="0" anchor="t">
-            <a:normAutofit/>
-          </a:bodyPr>
-          <a:p>
-            <a:pPr defTabSz="914400">
-              <a:lnSpc>
-                <a:spcPct val="135000"/>
-              </a:lnSpc>
-              <a:tabLst>
-                <a:tab pos="0" algn="l"/>
-              </a:tabLst>
-            </a:pPr>
-            <a:endParaRPr lang="en-US" sz="1800" b="0" u="none" strike="noStrike">
-              <a:solidFill>
-                <a:srgbClr val="FFFFFF"/>
-              </a:solidFill>
-              <a:effectLst/>
-              <a:uFillTx/>
-              <a:latin typeface="Arial"/>
-            </a:endParaRPr>
-          </a:p>
-        </p:txBody>
-      </p:sp>
-      <p:sp>
-        <p:nvSpPr>
-          <p:cNvPr id="28" name="Text 10"/>
-          <p:cNvSpPr/>
-          <p:nvPr/>
-        </p:nvSpPr>
-        <p:spPr>
-          <a:xfrm>
-            <a:off x="1409760" y="6231600"/>
-            <a:ext cx="8691840" cy="397800"/>
-          </a:xfrm>
-          <a:prstGeom prst="rect">
-            <a:avLst/>
-          </a:prstGeom>
-          <a:noFill/>
-          <a:ln w="0">
-            <a:noFill/>
-          </a:ln>
-        </p:spPr>
-        <p:style>
-          <a:lnRef idx="0"/>
-          <a:fillRef idx="0"/>
-          <a:effectRef idx="0"/>
-          <a:fontRef idx="minor"/>
-        </p:style>
-        <p:txBody>
-          <a:bodyPr lIns="25560" tIns="25560" rIns="25560" bIns="25560" anchor="t">
-            <a:normAutofit fontScale="85000" lnSpcReduction="9999"/>
-          </a:bodyPr>
-          <a:p>
-            <a:pPr defTabSz="914400">
-              <a:lnSpc>
-                <a:spcPct val="135000"/>
-              </a:lnSpc>
-              <a:tabLst>
-                <a:tab pos="0" algn="l"/>
-              </a:tabLst>
-            </a:pPr>
             <a:r>
               <a:rPr lang="en-US" sz="2100" b="0" u="none" strike="noStrike">
                 <a:solidFill>
@@ -11930,7 +10967,7 @@
         <p:spPr>
           <a:xfrm>
             <a:off x="10382400" y="2971800"/>
-            <a:ext cx="6857640" cy="3326760"/>
+            <a:ext cx="6857280" cy="3326400"/>
           </a:xfrm>
           <a:prstGeom prst="roundRect">
             <a:avLst>
@@ -11978,7 +11015,7 @@
         <p:spPr>
           <a:xfrm>
             <a:off x="10732320" y="3283920"/>
-            <a:ext cx="6342120" cy="397800"/>
+            <a:ext cx="6341760" cy="397440"/>
           </a:xfrm>
           <a:prstGeom prst="rect">
             <a:avLst/>
@@ -12039,7 +11076,7 @@
         <p:spPr>
           <a:xfrm>
             <a:off x="10732320" y="3815280"/>
-            <a:ext cx="6342120" cy="580680"/>
+            <a:ext cx="6341760" cy="580320"/>
           </a:xfrm>
           <a:prstGeom prst="rect">
             <a:avLst/>
@@ -12112,7 +11149,7 @@
         <p:spPr>
           <a:xfrm>
             <a:off x="10732320" y="4358160"/>
-            <a:ext cx="6342120" cy="580680"/>
+            <a:ext cx="6341760" cy="580320"/>
           </a:xfrm>
           <a:prstGeom prst="rect">
             <a:avLst/>
@@ -12185,7 +11222,7 @@
         <p:spPr>
           <a:xfrm>
             <a:off x="10732320" y="4901040"/>
-            <a:ext cx="6342120" cy="580680"/>
+            <a:ext cx="6341760" cy="580320"/>
           </a:xfrm>
           <a:prstGeom prst="rect">
             <a:avLst/>
@@ -12258,7 +11295,7 @@
         <p:spPr>
           <a:xfrm>
             <a:off x="10732320" y="5444280"/>
-            <a:ext cx="6342120" cy="580680"/>
+            <a:ext cx="6341760" cy="580320"/>
           </a:xfrm>
           <a:prstGeom prst="rect">
             <a:avLst/>
@@ -12368,7 +11405,7 @@
         <p:spPr>
           <a:xfrm>
             <a:off x="1047600" y="419040"/>
-            <a:ext cx="6331320" cy="346320"/>
+            <a:ext cx="6330960" cy="345960"/>
           </a:xfrm>
           <a:prstGeom prst="rect">
             <a:avLst/>
@@ -12441,7 +11478,7 @@
         <p:spPr>
           <a:xfrm>
             <a:off x="13873680" y="419040"/>
-            <a:ext cx="3467160" cy="346320"/>
+            <a:ext cx="3466800" cy="345960"/>
           </a:xfrm>
           <a:prstGeom prst="rect">
             <a:avLst/>
@@ -12502,7 +11539,7 @@
         <p:spPr>
           <a:xfrm>
             <a:off x="1047600" y="952560"/>
-            <a:ext cx="16678080" cy="708480"/>
+            <a:ext cx="16677720" cy="708120"/>
           </a:xfrm>
           <a:prstGeom prst="rect">
             <a:avLst/>
@@ -12563,7 +11600,7 @@
         <p:spPr>
           <a:xfrm>
             <a:off x="1047600" y="2118240"/>
-            <a:ext cx="8381520" cy="7329960"/>
+            <a:ext cx="8381160" cy="7329600"/>
           </a:xfrm>
           <a:prstGeom prst="roundRect">
             <a:avLst>
@@ -12615,7 +11652,7 @@
         <p:spPr>
           <a:xfrm>
             <a:off x="1621800" y="2354040"/>
-            <a:ext cx="7233120" cy="6858360"/>
+            <a:ext cx="7232760" cy="6858000"/>
           </a:xfrm>
           <a:prstGeom prst="rect">
             <a:avLst/>
@@ -12635,7 +11672,7 @@
         <p:spPr>
           <a:xfrm>
             <a:off x="10325160" y="2169000"/>
-            <a:ext cx="7734240" cy="373320"/>
+            <a:ext cx="7733880" cy="372960"/>
           </a:xfrm>
           <a:prstGeom prst="rect">
             <a:avLst/>
@@ -12708,7 +11745,7 @@
         <p:spPr>
           <a:xfrm>
             <a:off x="10325160" y="2514600"/>
-            <a:ext cx="7122240" cy="397800"/>
+            <a:ext cx="7121880" cy="397440"/>
           </a:xfrm>
           <a:prstGeom prst="rect">
             <a:avLst/>
@@ -12769,7 +11806,7 @@
         <p:spPr>
           <a:xfrm>
             <a:off x="10325160" y="3429000"/>
-            <a:ext cx="7133040" cy="912240"/>
+            <a:ext cx="7132680" cy="911880"/>
           </a:xfrm>
           <a:prstGeom prst="rect">
             <a:avLst/>
@@ -12860,7 +11897,7 @@
         <p:spPr>
           <a:xfrm>
             <a:off x="10325160" y="4836960"/>
-            <a:ext cx="7133040" cy="1005120"/>
+            <a:ext cx="7132680" cy="1004760"/>
           </a:xfrm>
           <a:prstGeom prst="rect">
             <a:avLst/>
@@ -12969,7 +12006,7 @@
         <p:spPr>
           <a:xfrm>
             <a:off x="10325160" y="6172200"/>
-            <a:ext cx="7133040" cy="912240"/>
+            <a:ext cx="7132680" cy="911880"/>
           </a:xfrm>
           <a:prstGeom prst="rect">
             <a:avLst/>
@@ -13030,7 +12067,7 @@
         <p:spPr>
           <a:xfrm>
             <a:off x="9963000" y="8537400"/>
-            <a:ext cx="209160" cy="209160"/>
+            <a:ext cx="208800" cy="208800"/>
           </a:xfrm>
           <a:prstGeom prst="roundRect">
             <a:avLst>
@@ -13080,7 +12117,7 @@
         <p:spPr>
           <a:xfrm>
             <a:off x="10306080" y="8470440"/>
-            <a:ext cx="2316240" cy="380520"/>
+            <a:ext cx="2315880" cy="380160"/>
           </a:xfrm>
           <a:prstGeom prst="rect">
             <a:avLst/>
@@ -13141,7 +12178,7 @@
         <p:spPr>
           <a:xfrm>
             <a:off x="13068360" y="8537400"/>
-            <a:ext cx="209160" cy="209160"/>
+            <a:ext cx="208800" cy="208800"/>
           </a:xfrm>
           <a:prstGeom prst="roundRect">
             <a:avLst>
@@ -13191,7 +12228,7 @@
         <p:spPr>
           <a:xfrm>
             <a:off x="13411440" y="8470440"/>
-            <a:ext cx="1676160" cy="380520"/>
+            <a:ext cx="1675800" cy="380160"/>
           </a:xfrm>
           <a:prstGeom prst="rect">
             <a:avLst/>
@@ -13252,7 +12289,7 @@
         <p:spPr>
           <a:xfrm>
             <a:off x="9963000" y="9164160"/>
-            <a:ext cx="209160" cy="209160"/>
+            <a:ext cx="208800" cy="208800"/>
           </a:xfrm>
           <a:prstGeom prst="roundRect">
             <a:avLst>
@@ -13302,7 +12339,7 @@
         <p:spPr>
           <a:xfrm>
             <a:off x="10306080" y="9097200"/>
-            <a:ext cx="2476080" cy="380520"/>
+            <a:ext cx="2475720" cy="380160"/>
           </a:xfrm>
           <a:prstGeom prst="rect">
             <a:avLst/>
@@ -13363,7 +12400,7 @@
         <p:spPr>
           <a:xfrm>
             <a:off x="13125600" y="9164160"/>
-            <a:ext cx="209160" cy="209160"/>
+            <a:ext cx="208800" cy="208800"/>
           </a:xfrm>
           <a:prstGeom prst="roundRect">
             <a:avLst>
@@ -13413,7 +12450,7 @@
         <p:spPr>
           <a:xfrm>
             <a:off x="13468320" y="9097200"/>
-            <a:ext cx="555840" cy="380520"/>
+            <a:ext cx="555480" cy="380160"/>
           </a:xfrm>
           <a:prstGeom prst="rect">
             <a:avLst/>
@@ -13474,7 +12511,7 @@
         <p:spPr>
           <a:xfrm>
             <a:off x="14367600" y="9164160"/>
-            <a:ext cx="209160" cy="209160"/>
+            <a:ext cx="208800" cy="208800"/>
           </a:xfrm>
           <a:prstGeom prst="roundRect">
             <a:avLst>
@@ -13524,7 +12561,7 @@
         <p:spPr>
           <a:xfrm>
             <a:off x="14710320" y="9097200"/>
-            <a:ext cx="2156040" cy="380520"/>
+            <a:ext cx="2155680" cy="380160"/>
           </a:xfrm>
           <a:prstGeom prst="rect">
             <a:avLst/>
@@ -13622,7 +12659,7 @@
         <p:spPr>
           <a:xfrm>
             <a:off x="1047600" y="419040"/>
-            <a:ext cx="5879160" cy="346320"/>
+            <a:ext cx="5878800" cy="345960"/>
           </a:xfrm>
           <a:prstGeom prst="rect">
             <a:avLst/>
@@ -13695,7 +12732,7 @@
         <p:spPr>
           <a:xfrm>
             <a:off x="14312880" y="419040"/>
-            <a:ext cx="3014640" cy="346320"/>
+            <a:ext cx="3014280" cy="345960"/>
           </a:xfrm>
           <a:prstGeom prst="rect">
             <a:avLst/>
@@ -13756,7 +12793,7 @@
         <p:spPr>
           <a:xfrm>
             <a:off x="1047600" y="952560"/>
-            <a:ext cx="16678080" cy="708480"/>
+            <a:ext cx="16677720" cy="708120"/>
           </a:xfrm>
           <a:prstGeom prst="rect">
             <a:avLst/>
@@ -13817,7 +12854,7 @@
         <p:spPr>
           <a:xfrm>
             <a:off x="1409760" y="2433600"/>
-            <a:ext cx="13677840" cy="1031400"/>
+            <a:ext cx="13677480" cy="1031040"/>
           </a:xfrm>
           <a:prstGeom prst="rect">
             <a:avLst/>
@@ -13914,7 +12951,7 @@
         <p:spPr>
           <a:xfrm>
             <a:off x="1409760" y="2433600"/>
-            <a:ext cx="12471480" cy="852840"/>
+            <a:ext cx="12471120" cy="852480"/>
           </a:xfrm>
           <a:prstGeom prst="rect">
             <a:avLst/>
@@ -13933,6 +12970,47 @@
         <p:txBody>
           <a:bodyPr lIns="0" tIns="0" rIns="0" bIns="0" anchor="t">
             <a:normAutofit/>
+          </a:bodyPr>
+          <a:p>
+            <a:endParaRPr lang="en-US" sz="1800" b="0" u="none" strike="noStrike">
+              <a:solidFill>
+                <a:srgbClr val="FFFFFF"/>
+              </a:solidFill>
+              <a:effectLst/>
+              <a:uFillTx/>
+              <a:latin typeface="Arial"/>
+            </a:endParaRPr>
+          </a:p>
+        </p:txBody>
+      </p:sp>
+      <p:sp>
+        <p:nvSpPr>
+          <p:cNvPr id="60" name="Text 5"/>
+          <p:cNvSpPr/>
+          <p:nvPr/>
+        </p:nvSpPr>
+        <p:spPr>
+          <a:xfrm>
+            <a:off x="1409760" y="4379400"/>
+            <a:ext cx="13448880" cy="810360"/>
+          </a:xfrm>
+          <a:prstGeom prst="rect">
+            <a:avLst/>
+          </a:prstGeom>
+          <a:noFill/>
+          <a:ln w="0">
+            <a:noFill/>
+          </a:ln>
+        </p:spPr>
+        <p:style>
+          <a:lnRef idx="0"/>
+          <a:fillRef idx="0"/>
+          <a:effectRef idx="0"/>
+          <a:fontRef idx="minor"/>
+        </p:style>
+        <p:txBody>
+          <a:bodyPr lIns="25560" tIns="25560" rIns="25560" bIns="25560" anchor="t">
+            <a:normAutofit fontScale="85000" lnSpcReduction="19999"/>
           </a:bodyPr>
           <a:p>
             <a:pPr defTabSz="914400">
@@ -13943,6 +13021,71 @@
                 <a:tab pos="0" algn="l"/>
               </a:tabLst>
             </a:pPr>
+            <a:r>
+              <a:rPr lang="en-US" sz="2550" b="1" u="none" strike="noStrike">
+                <a:solidFill>
+                  <a:srgbClr val="F3F2EE"/>
+                </a:solidFill>
+                <a:effectLst/>
+                <a:uFillTx/>
+                <a:latin typeface="Arial"/>
+                <a:ea typeface="Arial"/>
+              </a:rPr>
+              <a:t>- Cómputo incremental sobre la diferencia d = x[n+1] − x[n]. </a:t>
+            </a:r>
+            <a:r>
+              <a:rPr lang="en-US" sz="2550" b="0" u="none" strike="noStrike">
+                <a:solidFill>
+                  <a:srgbClr val="F3F2EE"/>
+                </a:solidFill>
+                <a:effectLst/>
+                <a:uFillTx/>
+                <a:latin typeface="Arial"/>
+                <a:ea typeface="Arial"/>
+              </a:rPr>
+              <a:t>Se evita recomputar el producto φ·(x[n+1]−x[n]) desde cero en cada fase.</a:t>
+            </a:r>
+            <a:endParaRPr lang="en-US" sz="2550" b="0" u="none" strike="noStrike">
+              <a:solidFill>
+                <a:srgbClr val="FFFFFF"/>
+              </a:solidFill>
+              <a:effectLst/>
+              <a:uFillTx/>
+              <a:latin typeface="Arial"/>
+            </a:endParaRPr>
+          </a:p>
+        </p:txBody>
+      </p:sp>
+      <p:sp>
+        <p:nvSpPr>
+          <p:cNvPr id="61" name="Text 6"/>
+          <p:cNvSpPr/>
+          <p:nvPr/>
+        </p:nvSpPr>
+        <p:spPr>
+          <a:xfrm>
+            <a:off x="1409760" y="3692880"/>
+            <a:ext cx="14028480" cy="810360"/>
+          </a:xfrm>
+          <a:prstGeom prst="rect">
+            <a:avLst/>
+          </a:prstGeom>
+          <a:noFill/>
+          <a:ln w="0">
+            <a:noFill/>
+          </a:ln>
+        </p:spPr>
+        <p:style>
+          <a:lnRef idx="0"/>
+          <a:fillRef idx="0"/>
+          <a:effectRef idx="0"/>
+          <a:fontRef idx="minor"/>
+        </p:style>
+        <p:txBody>
+          <a:bodyPr lIns="0" tIns="0" rIns="0" bIns="0" anchor="t">
+            <a:normAutofit/>
+          </a:bodyPr>
+          <a:p>
             <a:endParaRPr lang="en-US" sz="1800" b="0" u="none" strike="noStrike">
               <a:solidFill>
                 <a:srgbClr val="FFFFFF"/>
@@ -13956,14 +13099,14 @@
       </p:sp>
       <p:sp>
         <p:nvSpPr>
-          <p:cNvPr id="60" name="Text 5"/>
-          <p:cNvSpPr/>
-          <p:nvPr/>
-        </p:nvSpPr>
-        <p:spPr>
-          <a:xfrm>
-            <a:off x="1409760" y="4379400"/>
-            <a:ext cx="13449240" cy="810720"/>
+          <p:cNvPr id="62" name="Text 7"/>
+          <p:cNvSpPr/>
+          <p:nvPr/>
+        </p:nvSpPr>
+        <p:spPr>
+          <a:xfrm>
+            <a:off x="1409760" y="5279400"/>
+            <a:ext cx="14146560" cy="397440"/>
           </a:xfrm>
           <a:prstGeom prst="rect">
             <a:avLst/>
@@ -13981,7 +13124,7 @@
         </p:style>
         <p:txBody>
           <a:bodyPr lIns="25560" tIns="25560" rIns="25560" bIns="25560" anchor="t">
-            <a:normAutofit fontScale="85000" lnSpcReduction="19999"/>
+            <a:normAutofit fontScale="85000" lnSpcReduction="9999"/>
           </a:bodyPr>
           <a:p>
             <a:pPr defTabSz="914400">
@@ -13993,67 +13136,55 @@
               </a:tabLst>
             </a:pPr>
             <a:r>
-              <a:rPr lang="en-US" sz="2550" b="1" u="none" strike="noStrike">
-                <a:solidFill>
-                  <a:srgbClr val="F3F2EE"/>
+              <a:rPr lang="en-US" sz="2100" b="0" u="none" strike="noStrike">
+                <a:solidFill>
+                  <a:srgbClr val="BAB7B2"/>
                 </a:solidFill>
                 <a:effectLst/>
                 <a:uFillTx/>
                 <a:latin typeface="Arial"/>
                 <a:ea typeface="Arial"/>
               </a:rPr>
-              <a:t>- Cómputo incremental sobre la diferencia d = x[n+1] − x[n]. </a:t>
-            </a:r>
-            <a:r>
-              <a:rPr lang="en-US" sz="2550" b="0" u="none" strike="noStrike">
-                <a:solidFill>
-                  <a:srgbClr val="F3F2EE"/>
-                </a:solidFill>
-                <a:effectLst/>
-                <a:uFillTx/>
-                <a:latin typeface="Arial"/>
-                <a:ea typeface="Arial"/>
-              </a:rPr>
-              <a:t>Se evita recomputar el producto φ·(x[n+1]−x[n]) desde cero en cada fase.</a:t>
-            </a:r>
-            <a:endParaRPr lang="en-US" sz="2550" b="0" u="none" strike="noStrike">
-              <a:solidFill>
-                <a:srgbClr val="FFFFFF"/>
-              </a:solidFill>
-              <a:effectLst/>
-              <a:uFillTx/>
-              <a:latin typeface="Arial"/>
-            </a:endParaRPr>
-          </a:p>
-        </p:txBody>
-      </p:sp>
-      <p:sp>
-        <p:nvSpPr>
-          <p:cNvPr id="61" name="Text 6"/>
-          <p:cNvSpPr/>
-          <p:nvPr/>
-        </p:nvSpPr>
-        <p:spPr>
-          <a:xfrm>
-            <a:off x="1409760" y="3692880"/>
-            <a:ext cx="14028840" cy="810720"/>
-          </a:xfrm>
-          <a:prstGeom prst="rect">
-            <a:avLst/>
-          </a:prstGeom>
-          <a:noFill/>
-          <a:ln w="0">
-            <a:noFill/>
-          </a:ln>
-        </p:spPr>
-        <p:style>
-          <a:lnRef idx="0"/>
-          <a:fillRef idx="0"/>
-          <a:effectRef idx="0"/>
-          <a:fontRef idx="minor"/>
-        </p:style>
-        <p:txBody>
-          <a:bodyPr lIns="0" tIns="0" rIns="0" bIns="0" anchor="t">
+              <a:t>Equivale a realizar interpolación lineal con un solo sumador iterativo + acumulador.</a:t>
+            </a:r>
+            <a:endParaRPr lang="en-US" sz="2100" b="0" u="none" strike="noStrike">
+              <a:solidFill>
+                <a:srgbClr val="FFFFFF"/>
+              </a:solidFill>
+              <a:effectLst/>
+              <a:uFillTx/>
+              <a:latin typeface="Arial"/>
+            </a:endParaRPr>
+          </a:p>
+        </p:txBody>
+      </p:sp>
+      <p:sp>
+        <p:nvSpPr>
+          <p:cNvPr id="63" name="Text 8"/>
+          <p:cNvSpPr/>
+          <p:nvPr/>
+        </p:nvSpPr>
+        <p:spPr>
+          <a:xfrm>
+            <a:off x="1409760" y="6436800"/>
+            <a:ext cx="14134680" cy="1166040"/>
+          </a:xfrm>
+          <a:prstGeom prst="rect">
+            <a:avLst/>
+          </a:prstGeom>
+          <a:noFill/>
+          <a:ln w="0">
+            <a:noFill/>
+          </a:ln>
+        </p:spPr>
+        <p:style>
+          <a:lnRef idx="0"/>
+          <a:fillRef idx="0"/>
+          <a:effectRef idx="0"/>
+          <a:fontRef idx="minor"/>
+        </p:style>
+        <p:txBody>
+          <a:bodyPr lIns="25560" tIns="25560" rIns="25560" bIns="25560" anchor="t">
             <a:normAutofit/>
           </a:bodyPr>
           <a:p>
@@ -14065,118 +13196,20 @@
                 <a:tab pos="0" algn="l"/>
               </a:tabLst>
             </a:pPr>
-            <a:endParaRPr lang="en-US" sz="1800" b="0" u="none" strike="noStrike">
-              <a:solidFill>
-                <a:srgbClr val="FFFFFF"/>
-              </a:solidFill>
-              <a:effectLst/>
-              <a:uFillTx/>
-              <a:latin typeface="Arial"/>
-            </a:endParaRPr>
-          </a:p>
-        </p:txBody>
-      </p:sp>
-      <p:sp>
-        <p:nvSpPr>
-          <p:cNvPr id="62" name="Text 7"/>
-          <p:cNvSpPr/>
-          <p:nvPr/>
-        </p:nvSpPr>
-        <p:spPr>
-          <a:xfrm>
-            <a:off x="1409760" y="5279400"/>
-            <a:ext cx="14146920" cy="397800"/>
-          </a:xfrm>
-          <a:prstGeom prst="rect">
-            <a:avLst/>
-          </a:prstGeom>
-          <a:noFill/>
-          <a:ln w="0">
-            <a:noFill/>
-          </a:ln>
-        </p:spPr>
-        <p:style>
-          <a:lnRef idx="0"/>
-          <a:fillRef idx="0"/>
-          <a:effectRef idx="0"/>
-          <a:fontRef idx="minor"/>
-        </p:style>
-        <p:txBody>
-          <a:bodyPr lIns="25560" tIns="25560" rIns="25560" bIns="25560" anchor="t">
-            <a:normAutofit fontScale="85000" lnSpcReduction="9999"/>
-          </a:bodyPr>
-          <a:p>
-            <a:pPr defTabSz="914400">
-              <a:lnSpc>
-                <a:spcPct val="135000"/>
-              </a:lnSpc>
-              <a:tabLst>
-                <a:tab pos="0" algn="l"/>
-              </a:tabLst>
-            </a:pPr>
-            <a:r>
-              <a:rPr lang="en-US" sz="2100" b="0" u="none" strike="noStrike">
-                <a:solidFill>
-                  <a:srgbClr val="BAB7B2"/>
+            <a:r>
+              <a:rPr lang="en-US" sz="2550" b="1" u="none" strike="noStrike">
+                <a:solidFill>
+                  <a:srgbClr val="F3F2EE"/>
                 </a:solidFill>
                 <a:effectLst/>
                 <a:uFillTx/>
                 <a:latin typeface="Arial"/>
                 <a:ea typeface="Arial"/>
               </a:rPr>
-              <a:t>Equivale a realizar interpolación lineal con un solo sumador iterativo + acumulador.</a:t>
-            </a:r>
-            <a:endParaRPr lang="en-US" sz="2100" b="0" u="none" strike="noStrike">
-              <a:solidFill>
-                <a:srgbClr val="FFFFFF"/>
-              </a:solidFill>
-              <a:effectLst/>
-              <a:uFillTx/>
-              <a:latin typeface="Arial"/>
-            </a:endParaRPr>
-          </a:p>
-        </p:txBody>
-      </p:sp>
-      <p:sp>
-        <p:nvSpPr>
-          <p:cNvPr id="63" name="Text 8"/>
-          <p:cNvSpPr/>
-          <p:nvPr/>
-        </p:nvSpPr>
-        <p:spPr>
-          <a:xfrm>
-            <a:off x="1409760" y="6436800"/>
-            <a:ext cx="14135040" cy="1166400"/>
-          </a:xfrm>
-          <a:prstGeom prst="rect">
-            <a:avLst/>
-          </a:prstGeom>
-          <a:noFill/>
-          <a:ln w="0">
-            <a:noFill/>
-          </a:ln>
-        </p:spPr>
-        <p:style>
-          <a:lnRef idx="0"/>
-          <a:fillRef idx="0"/>
-          <a:effectRef idx="0"/>
-          <a:fontRef idx="minor"/>
-        </p:style>
-        <p:txBody>
-          <a:bodyPr lIns="25560" tIns="25560" rIns="25560" bIns="25560" anchor="t">
-            <a:normAutofit/>
-          </a:bodyPr>
-          <a:p>
-            <a:pPr defTabSz="914400">
-              <a:lnSpc>
-                <a:spcPct val="135000"/>
-              </a:lnSpc>
-              <a:tabLst>
-                <a:tab pos="0" algn="l"/>
-              </a:tabLst>
-            </a:pPr>
-            <a:r>
-              <a:rPr lang="en-US" sz="2550" b="1" u="none" strike="noStrike">
+              <a:t>- Multiplicación por constante. </a:t>
+            </a:r>
+            <a:r>
+              <a:rPr lang="en-US" sz="2550" b="0" u="none" strike="noStrike">
                 <a:solidFill>
                   <a:srgbClr val="F3F2EE"/>
                 </a:solidFill>
@@ -14185,18 +13218,6 @@
                 <a:latin typeface="Arial"/>
                 <a:ea typeface="Arial"/>
               </a:rPr>
-              <a:t>- Multiplicación por constante. </a:t>
-            </a:r>
-            <a:r>
-              <a:rPr lang="en-US" sz="2550" b="0" u="none" strike="noStrike">
-                <a:solidFill>
-                  <a:srgbClr val="F3F2EE"/>
-                </a:solidFill>
-                <a:effectLst/>
-                <a:uFillTx/>
-                <a:latin typeface="Arial"/>
-                <a:ea typeface="Arial"/>
-              </a:rPr>
               <a:t>φ ∈ {0,1,2,3} ⇒ implementable como mux + shifter de 1 bit; no se sintetiza un multiplicador.</a:t>
             </a:r>
             <a:endParaRPr lang="en-US" sz="2550" b="0" u="none" strike="noStrike">
@@ -14219,7 +13240,7 @@
         <p:spPr>
           <a:xfrm>
             <a:off x="1409760" y="5270400"/>
-            <a:ext cx="13944960" cy="810720"/>
+            <a:ext cx="13944600" cy="810360"/>
           </a:xfrm>
           <a:prstGeom prst="rect">
             <a:avLst/>
@@ -14240,14 +13261,6 @@
             <a:normAutofit/>
           </a:bodyPr>
           <a:p>
-            <a:pPr defTabSz="914400">
-              <a:lnSpc>
-                <a:spcPct val="135000"/>
-              </a:lnSpc>
-              <a:tabLst>
-                <a:tab pos="0" algn="l"/>
-              </a:tabLst>
-            </a:pPr>
             <a:endParaRPr lang="en-US" sz="1800" b="0" u="none" strike="noStrike">
               <a:solidFill>
                 <a:srgbClr val="FFFFFF"/>
@@ -14268,7 +13281,7 @@
         <p:spPr>
           <a:xfrm>
             <a:off x="1409760" y="7603200"/>
-            <a:ext cx="14146920" cy="397800"/>
+            <a:ext cx="14146560" cy="397440"/>
           </a:xfrm>
           <a:prstGeom prst="rect">
             <a:avLst/>
@@ -14366,7 +13379,7 @@
         <p:spPr>
           <a:xfrm>
             <a:off x="1047600" y="419040"/>
-            <a:ext cx="5276160" cy="346320"/>
+            <a:ext cx="5275800" cy="345960"/>
           </a:xfrm>
           <a:prstGeom prst="rect">
             <a:avLst/>
@@ -14439,7 +13452,7 @@
         <p:spPr>
           <a:xfrm>
             <a:off x="14605560" y="419040"/>
-            <a:ext cx="2713320" cy="346320"/>
+            <a:ext cx="2712960" cy="345960"/>
           </a:xfrm>
           <a:prstGeom prst="rect">
             <a:avLst/>
@@ -14500,7 +13513,7 @@
         <p:spPr>
           <a:xfrm>
             <a:off x="1047600" y="952560"/>
-            <a:ext cx="16678080" cy="708480"/>
+            <a:ext cx="16677720" cy="708120"/>
           </a:xfrm>
           <a:prstGeom prst="rect">
             <a:avLst/>
@@ -14551,7 +13564,7 @@
                 <a:latin typeface="Arial"/>
                 <a:ea typeface="Arial"/>
               </a:rPr>
-              <a:t>50 compuertas equiv.</a:t>
+              <a:t>24 full-adders + ~37 compuertas</a:t>
             </a:r>
             <a:endParaRPr lang="en-US" sz="4800" b="0" u="none" strike="noStrike">
               <a:solidFill>
@@ -14573,7 +13586,7 @@
         <p:spPr>
           <a:xfrm>
             <a:off x="1047600" y="3075120"/>
-            <a:ext cx="2923920" cy="9000"/>
+            <a:ext cx="2923560" cy="8640"/>
           </a:xfrm>
           <a:prstGeom prst="rect">
             <a:avLst/>
@@ -14616,7 +13629,7 @@
         <p:spPr>
           <a:xfrm>
             <a:off x="1238400" y="2289960"/>
-            <a:ext cx="2630520" cy="651600"/>
+            <a:ext cx="2630160" cy="651240"/>
           </a:xfrm>
           <a:prstGeom prst="rect">
             <a:avLst/>
@@ -14677,7 +13690,7 @@
         <p:spPr>
           <a:xfrm>
             <a:off x="3971880" y="3075120"/>
-            <a:ext cx="4576680" cy="9000"/>
+            <a:ext cx="4576320" cy="8640"/>
           </a:xfrm>
           <a:prstGeom prst="rect">
             <a:avLst/>
@@ -14720,7 +13733,7 @@
         <p:spPr>
           <a:xfrm>
             <a:off x="4162320" y="2289960"/>
-            <a:ext cx="4332960" cy="651600"/>
+            <a:ext cx="4332600" cy="651240"/>
           </a:xfrm>
           <a:prstGeom prst="rect">
             <a:avLst/>
@@ -14781,7 +13794,7 @@
         <p:spPr>
           <a:xfrm>
             <a:off x="8548920" y="3075120"/>
-            <a:ext cx="3014280" cy="9000"/>
+            <a:ext cx="3013920" cy="8640"/>
           </a:xfrm>
           <a:prstGeom prst="rect">
             <a:avLst/>
@@ -14824,7 +13837,7 @@
         <p:spPr>
           <a:xfrm>
             <a:off x="8649000" y="2289960"/>
-            <a:ext cx="2723400" cy="651600"/>
+            <a:ext cx="2723040" cy="651240"/>
           </a:xfrm>
           <a:prstGeom prst="rect">
             <a:avLst/>
@@ -14885,7 +13898,7 @@
         <p:spPr>
           <a:xfrm>
             <a:off x="1047600" y="3785040"/>
-            <a:ext cx="2923920" cy="9000"/>
+            <a:ext cx="2923560" cy="8640"/>
           </a:xfrm>
           <a:prstGeom prst="rect">
             <a:avLst/>
@@ -14928,7 +13941,7 @@
         <p:spPr>
           <a:xfrm>
             <a:off x="1238400" y="3253680"/>
-            <a:ext cx="2630520" cy="397800"/>
+            <a:ext cx="2630160" cy="397440"/>
           </a:xfrm>
           <a:prstGeom prst="rect">
             <a:avLst/>
@@ -14989,7 +14002,7 @@
         <p:spPr>
           <a:xfrm>
             <a:off x="3971880" y="3785040"/>
-            <a:ext cx="4576680" cy="9000"/>
+            <a:ext cx="4576320" cy="8640"/>
           </a:xfrm>
           <a:prstGeom prst="rect">
             <a:avLst/>
@@ -15032,7 +14045,7 @@
         <p:spPr>
           <a:xfrm>
             <a:off x="4162320" y="3253680"/>
-            <a:ext cx="4332960" cy="397800"/>
+            <a:ext cx="4332600" cy="397440"/>
           </a:xfrm>
           <a:prstGeom prst="rect">
             <a:avLst/>
@@ -15093,7 +14106,7 @@
         <p:spPr>
           <a:xfrm>
             <a:off x="8548920" y="3785040"/>
-            <a:ext cx="3014280" cy="9000"/>
+            <a:ext cx="3013920" cy="8640"/>
           </a:xfrm>
           <a:prstGeom prst="rect">
             <a:avLst/>
@@ -15136,7 +14149,7 @@
         <p:spPr>
           <a:xfrm>
             <a:off x="8649000" y="3253680"/>
-            <a:ext cx="2723400" cy="397800"/>
+            <a:ext cx="2723040" cy="397440"/>
           </a:xfrm>
           <a:prstGeom prst="rect">
             <a:avLst/>
@@ -15154,7 +14167,7 @@
         </p:style>
         <p:txBody>
           <a:bodyPr lIns="25560" tIns="25560" rIns="25560" bIns="25560" anchor="ctr">
-            <a:normAutofit fontScale="85000" lnSpcReduction="9999"/>
+            <a:normAutofit fontScale="70000" lnSpcReduction="19999"/>
           </a:bodyPr>
           <a:p>
             <a:pPr algn="r" defTabSz="914400">
@@ -15175,7 +14188,7 @@
                 <a:latin typeface="Courier New"/>
                 <a:ea typeface="Courier New"/>
               </a:rPr>
-              <a:t>~6 full-adders</a:t>
+              <a:t>8 full-adders (8RCAX1)</a:t>
             </a:r>
             <a:endParaRPr lang="en-US" sz="2100" b="0" u="none" strike="noStrike">
               <a:solidFill>
@@ -15197,7 +14210,7 @@
         <p:spPr>
           <a:xfrm>
             <a:off x="1047600" y="4855320"/>
-            <a:ext cx="2923920" cy="9000"/>
+            <a:ext cx="2923560" cy="8640"/>
           </a:xfrm>
           <a:prstGeom prst="rect">
             <a:avLst/>
@@ -15240,7 +14253,7 @@
         <p:spPr>
           <a:xfrm>
             <a:off x="1238400" y="3963600"/>
-            <a:ext cx="2630520" cy="757800"/>
+            <a:ext cx="2630160" cy="757440"/>
           </a:xfrm>
           <a:prstGeom prst="rect">
             <a:avLst/>
@@ -15258,7 +14271,7 @@
         </p:style>
         <p:txBody>
           <a:bodyPr lIns="25560" tIns="25560" rIns="25560" bIns="25560" anchor="ctr">
-            <a:normAutofit fontScale="92500" lnSpcReduction="9999"/>
+            <a:normAutofit/>
           </a:bodyPr>
           <a:p>
             <a:pPr defTabSz="914400">
@@ -15301,7 +14314,7 @@
         <p:spPr>
           <a:xfrm>
             <a:off x="3971880" y="4855320"/>
-            <a:ext cx="4576680" cy="9000"/>
+            <a:ext cx="4576320" cy="8640"/>
           </a:xfrm>
           <a:prstGeom prst="rect">
             <a:avLst/>
@@ -15344,7 +14357,7 @@
         <p:spPr>
           <a:xfrm>
             <a:off x="4162320" y="3963600"/>
-            <a:ext cx="4332960" cy="757800"/>
+            <a:ext cx="4332600" cy="757440"/>
           </a:xfrm>
           <a:prstGeom prst="rect">
             <a:avLst/>
@@ -15405,7 +14418,7 @@
         <p:spPr>
           <a:xfrm>
             <a:off x="8548920" y="4855320"/>
-            <a:ext cx="3014280" cy="9000"/>
+            <a:ext cx="3013920" cy="8640"/>
           </a:xfrm>
           <a:prstGeom prst="rect">
             <a:avLst/>
@@ -15448,7 +14461,7 @@
         <p:spPr>
           <a:xfrm>
             <a:off x="8649000" y="3963600"/>
-            <a:ext cx="2723400" cy="757800"/>
+            <a:ext cx="2723040" cy="757440"/>
           </a:xfrm>
           <a:prstGeom prst="rect">
             <a:avLst/>
@@ -15466,7 +14479,7 @@
         </p:style>
         <p:txBody>
           <a:bodyPr lIns="25560" tIns="25560" rIns="25560" bIns="25560" anchor="ctr">
-            <a:normAutofit/>
+            <a:normAutofit fontScale="92500" lnSpcReduction="9999"/>
           </a:bodyPr>
           <a:p>
             <a:pPr algn="r" defTabSz="914400">
@@ -15487,7 +14500,7 @@
                 <a:latin typeface="Courier New"/>
                 <a:ea typeface="Courier New"/>
               </a:rPr>
-              <a:t>~7 full-adders</a:t>
+              <a:t>8 full-adders (8RCAX1)</a:t>
             </a:r>
             <a:endParaRPr lang="en-US" sz="2100" b="0" u="none" strike="noStrike">
               <a:solidFill>
@@ -15509,7 +14522,7 @@
         <p:spPr>
           <a:xfrm>
             <a:off x="1047600" y="5565240"/>
-            <a:ext cx="2923920" cy="9000"/>
+            <a:ext cx="2923560" cy="8640"/>
           </a:xfrm>
           <a:prstGeom prst="rect">
             <a:avLst/>
@@ -15552,7 +14565,7 @@
         <p:spPr>
           <a:xfrm>
             <a:off x="1238400" y="5033880"/>
-            <a:ext cx="2630520" cy="397800"/>
+            <a:ext cx="2630160" cy="397440"/>
           </a:xfrm>
           <a:prstGeom prst="rect">
             <a:avLst/>
@@ -15613,7 +14626,7 @@
         <p:spPr>
           <a:xfrm>
             <a:off x="3971880" y="5565240"/>
-            <a:ext cx="4576680" cy="9000"/>
+            <a:ext cx="4576320" cy="8640"/>
           </a:xfrm>
           <a:prstGeom prst="rect">
             <a:avLst/>
@@ -15656,7 +14669,7 @@
         <p:spPr>
           <a:xfrm>
             <a:off x="4162320" y="5033880"/>
-            <a:ext cx="4332960" cy="397800"/>
+            <a:ext cx="4332600" cy="397440"/>
           </a:xfrm>
           <a:prstGeom prst="rect">
             <a:avLst/>
@@ -15717,7 +14730,7 @@
         <p:spPr>
           <a:xfrm>
             <a:off x="8548920" y="5565240"/>
-            <a:ext cx="3014280" cy="9000"/>
+            <a:ext cx="3013920" cy="8640"/>
           </a:xfrm>
           <a:prstGeom prst="rect">
             <a:avLst/>
@@ -15760,7 +14773,7 @@
         <p:spPr>
           <a:xfrm>
             <a:off x="8649000" y="5033880"/>
-            <a:ext cx="2723400" cy="397800"/>
+            <a:ext cx="2723040" cy="397440"/>
           </a:xfrm>
           <a:prstGeom prst="rect">
             <a:avLst/>
@@ -15799,7 +14812,7 @@
                 <a:latin typeface="Courier New"/>
                 <a:ea typeface="Courier New"/>
               </a:rPr>
-              <a:t>~6 half-adders</a:t>
+              <a:t>cableado · 0</a:t>
             </a:r>
             <a:endParaRPr lang="en-US" sz="2100" b="0" u="none" strike="noStrike">
               <a:solidFill>
@@ -15821,7 +14834,7 @@
         <p:spPr>
           <a:xfrm>
             <a:off x="1047600" y="6635520"/>
-            <a:ext cx="2923920" cy="9000"/>
+            <a:ext cx="2923560" cy="8640"/>
           </a:xfrm>
           <a:prstGeom prst="rect">
             <a:avLst/>
@@ -15864,7 +14877,7 @@
         <p:spPr>
           <a:xfrm>
             <a:off x="1238400" y="5743800"/>
-            <a:ext cx="2630520" cy="757800"/>
+            <a:ext cx="2630160" cy="757440"/>
           </a:xfrm>
           <a:prstGeom prst="rect">
             <a:avLst/>
@@ -15882,7 +14895,7 @@
         </p:style>
         <p:txBody>
           <a:bodyPr lIns="25560" tIns="25560" rIns="25560" bIns="25560" anchor="ctr">
-            <a:normAutofit fontScale="92500" lnSpcReduction="9999"/>
+            <a:normAutofit/>
           </a:bodyPr>
           <a:p>
             <a:pPr defTabSz="914400">
@@ -15925,7 +14938,7 @@
         <p:spPr>
           <a:xfrm>
             <a:off x="3971880" y="6635520"/>
-            <a:ext cx="4576680" cy="9000"/>
+            <a:ext cx="4576320" cy="8640"/>
           </a:xfrm>
           <a:prstGeom prst="rect">
             <a:avLst/>
@@ -15968,7 +14981,7 @@
         <p:spPr>
           <a:xfrm>
             <a:off x="4162320" y="5743800"/>
-            <a:ext cx="4332960" cy="757800"/>
+            <a:ext cx="4332600" cy="757440"/>
           </a:xfrm>
           <a:prstGeom prst="rect">
             <a:avLst/>
@@ -16029,7 +15042,7 @@
         <p:spPr>
           <a:xfrm>
             <a:off x="8548920" y="6635520"/>
-            <a:ext cx="3014280" cy="9000"/>
+            <a:ext cx="3013920" cy="8640"/>
           </a:xfrm>
           <a:prstGeom prst="rect">
             <a:avLst/>
@@ -16072,7 +15085,7 @@
         <p:spPr>
           <a:xfrm>
             <a:off x="8649000" y="5743800"/>
-            <a:ext cx="2723400" cy="757800"/>
+            <a:ext cx="2723040" cy="757440"/>
           </a:xfrm>
           <a:prstGeom prst="rect">
             <a:avLst/>
@@ -16090,7 +15103,7 @@
         </p:style>
         <p:txBody>
           <a:bodyPr lIns="25560" tIns="25560" rIns="25560" bIns="25560" anchor="ctr">
-            <a:normAutofit/>
+            <a:normAutofit fontScale="92500" lnSpcReduction="9999"/>
           </a:bodyPr>
           <a:p>
             <a:pPr algn="r" defTabSz="914400">
@@ -16111,7 +15124,7 @@
                 <a:latin typeface="Courier New"/>
                 <a:ea typeface="Courier New"/>
               </a:rPr>
-              <a:t>~7 full-adders</a:t>
+              <a:t>8 full-adders (8RCAX1)</a:t>
             </a:r>
             <a:endParaRPr lang="en-US" sz="2100" b="0" u="none" strike="noStrike">
               <a:solidFill>
@@ -16133,7 +15146,7 @@
         <p:spPr>
           <a:xfrm>
             <a:off x="1047600" y="7345440"/>
-            <a:ext cx="2923920" cy="9000"/>
+            <a:ext cx="2923560" cy="8640"/>
           </a:xfrm>
           <a:prstGeom prst="rect">
             <a:avLst/>
@@ -16176,7 +15189,7 @@
         <p:spPr>
           <a:xfrm>
             <a:off x="1238400" y="6814080"/>
-            <a:ext cx="2630520" cy="397800"/>
+            <a:ext cx="2630160" cy="397440"/>
           </a:xfrm>
           <a:prstGeom prst="rect">
             <a:avLst/>
@@ -16237,7 +15250,7 @@
         <p:spPr>
           <a:xfrm>
             <a:off x="3971880" y="7345440"/>
-            <a:ext cx="4576680" cy="9000"/>
+            <a:ext cx="4576320" cy="8640"/>
           </a:xfrm>
           <a:prstGeom prst="rect">
             <a:avLst/>
@@ -16280,7 +15293,7 @@
         <p:spPr>
           <a:xfrm>
             <a:off x="4162320" y="6814080"/>
-            <a:ext cx="4332960" cy="397800"/>
+            <a:ext cx="4332600" cy="397440"/>
           </a:xfrm>
           <a:prstGeom prst="rect">
             <a:avLst/>
@@ -16341,7 +15354,7 @@
         <p:spPr>
           <a:xfrm>
             <a:off x="8548920" y="7345440"/>
-            <a:ext cx="3014280" cy="9000"/>
+            <a:ext cx="3013920" cy="8640"/>
           </a:xfrm>
           <a:prstGeom prst="rect">
             <a:avLst/>
@@ -16384,7 +15397,7 @@
         <p:spPr>
           <a:xfrm>
             <a:off x="8649000" y="6814080"/>
-            <a:ext cx="2723400" cy="397800"/>
+            <a:ext cx="2723040" cy="397440"/>
           </a:xfrm>
           <a:prstGeom prst="rect">
             <a:avLst/>
@@ -16445,7 +15458,7 @@
         <p:spPr>
           <a:xfrm>
             <a:off x="1047600" y="8055720"/>
-            <a:ext cx="2923920" cy="9000"/>
+            <a:ext cx="2923560" cy="8640"/>
           </a:xfrm>
           <a:prstGeom prst="rect">
             <a:avLst/>
@@ -16488,7 +15501,7 @@
         <p:spPr>
           <a:xfrm>
             <a:off x="1238400" y="7524000"/>
-            <a:ext cx="2630520" cy="397800"/>
+            <a:ext cx="2630160" cy="397440"/>
           </a:xfrm>
           <a:prstGeom prst="rect">
             <a:avLst/>
@@ -16549,7 +15562,7 @@
         <p:spPr>
           <a:xfrm>
             <a:off x="3971880" y="8055720"/>
-            <a:ext cx="4576680" cy="9000"/>
+            <a:ext cx="4576320" cy="8640"/>
           </a:xfrm>
           <a:prstGeom prst="rect">
             <a:avLst/>
@@ -16592,7 +15605,7 @@
         <p:spPr>
           <a:xfrm>
             <a:off x="4162320" y="7524000"/>
-            <a:ext cx="4332960" cy="397800"/>
+            <a:ext cx="4332600" cy="397440"/>
           </a:xfrm>
           <a:prstGeom prst="rect">
             <a:avLst/>
@@ -16653,7 +15666,7 @@
         <p:spPr>
           <a:xfrm>
             <a:off x="8548920" y="8055720"/>
-            <a:ext cx="3014280" cy="9000"/>
+            <a:ext cx="3013920" cy="8640"/>
           </a:xfrm>
           <a:prstGeom prst="rect">
             <a:avLst/>
@@ -16696,7 +15709,7 @@
         <p:spPr>
           <a:xfrm>
             <a:off x="8649000" y="7524000"/>
-            <a:ext cx="2723400" cy="397800"/>
+            <a:ext cx="2723040" cy="397440"/>
           </a:xfrm>
           <a:prstGeom prst="rect">
             <a:avLst/>
@@ -16714,7 +15727,7 @@
         </p:style>
         <p:txBody>
           <a:bodyPr lIns="25560" tIns="25560" rIns="25560" bIns="25560" anchor="ctr">
-            <a:normAutofit fontScale="85000" lnSpcReduction="9999"/>
+            <a:normAutofit fontScale="70000" lnSpcReduction="19999"/>
           </a:bodyPr>
           <a:p>
             <a:pPr algn="r" defTabSz="914400">
@@ -16735,7 +15748,7 @@
                 <a:latin typeface="Courier New"/>
                 <a:ea typeface="Courier New"/>
               </a:rPr>
-              <a:t>~18 compuertas</a:t>
+              <a:t>24 TG + 4 INV (24X6MUC)</a:t>
             </a:r>
             <a:endParaRPr lang="en-US" sz="2100" b="0" u="none" strike="noStrike">
               <a:solidFill>
@@ -16757,7 +15770,7 @@
         <p:spPr>
           <a:xfrm>
             <a:off x="1047600" y="9125640"/>
-            <a:ext cx="2923920" cy="9000"/>
+            <a:ext cx="2923560" cy="8640"/>
           </a:xfrm>
           <a:prstGeom prst="rect">
             <a:avLst/>
@@ -16800,7 +15813,7 @@
         <p:spPr>
           <a:xfrm>
             <a:off x="1238400" y="8234280"/>
-            <a:ext cx="2630520" cy="757800"/>
+            <a:ext cx="2630160" cy="757440"/>
           </a:xfrm>
           <a:prstGeom prst="rect">
             <a:avLst/>
@@ -16861,7 +15874,7 @@
         <p:spPr>
           <a:xfrm>
             <a:off x="3971880" y="9125640"/>
-            <a:ext cx="4576680" cy="9000"/>
+            <a:ext cx="4576320" cy="8640"/>
           </a:xfrm>
           <a:prstGeom prst="rect">
             <a:avLst/>
@@ -16904,7 +15917,7 @@
         <p:spPr>
           <a:xfrm>
             <a:off x="4162320" y="8234280"/>
-            <a:ext cx="4332960" cy="757800"/>
+            <a:ext cx="4332600" cy="757440"/>
           </a:xfrm>
           <a:prstGeom prst="rect">
             <a:avLst/>
@@ -16965,7 +15978,7 @@
         <p:spPr>
           <a:xfrm>
             <a:off x="8548920" y="9125640"/>
-            <a:ext cx="3014280" cy="9000"/>
+            <a:ext cx="3013920" cy="8640"/>
           </a:xfrm>
           <a:prstGeom prst="rect">
             <a:avLst/>
@@ -17008,7 +16021,7 @@
         <p:spPr>
           <a:xfrm>
             <a:off x="8649000" y="8234280"/>
-            <a:ext cx="2723400" cy="757800"/>
+            <a:ext cx="2723040" cy="757440"/>
           </a:xfrm>
           <a:prstGeom prst="rect">
             <a:avLst/>
@@ -17026,7 +16039,7 @@
         </p:style>
         <p:txBody>
           <a:bodyPr lIns="25560" tIns="25560" rIns="25560" bIns="25560" anchor="ctr">
-            <a:normAutofit/>
+            <a:normAutofit fontScale="92500" lnSpcReduction="9999"/>
           </a:bodyPr>
           <a:p>
             <a:pPr algn="r" defTabSz="914400">
@@ -17047,7 +16060,7 @@
                 <a:latin typeface="Courier New"/>
                 <a:ea typeface="Courier New"/>
               </a:rPr>
-              <a:t>~5 compuertas</a:t>
+              <a:t>9 (5 INV + 3 NAND + 1 NOR)</a:t>
             </a:r>
             <a:endParaRPr lang="en-US" sz="2100" b="0" u="none" strike="noStrike">
               <a:solidFill>
@@ -17069,7 +16082,7 @@
         <p:spPr>
           <a:xfrm>
             <a:off x="1047600" y="9132840"/>
-            <a:ext cx="7500600" cy="9000"/>
+            <a:ext cx="7500240" cy="8640"/>
           </a:xfrm>
           <a:prstGeom prst="rect">
             <a:avLst/>
@@ -17112,7 +16125,7 @@
         <p:spPr>
           <a:xfrm>
             <a:off x="1238400" y="9349560"/>
-            <a:ext cx="7344720" cy="394200"/>
+            <a:ext cx="7344360" cy="393840"/>
           </a:xfrm>
           <a:prstGeom prst="rect">
             <a:avLst/>
@@ -17173,7 +16186,7 @@
         <p:spPr>
           <a:xfrm>
             <a:off x="8548920" y="9132840"/>
-            <a:ext cx="3014280" cy="9000"/>
+            <a:ext cx="3013920" cy="8640"/>
           </a:xfrm>
           <a:prstGeom prst="rect">
             <a:avLst/>
@@ -17216,7 +16229,7 @@
         <p:spPr>
           <a:xfrm>
             <a:off x="8649000" y="9349560"/>
-            <a:ext cx="2723400" cy="394200"/>
+            <a:ext cx="2723040" cy="393840"/>
           </a:xfrm>
           <a:prstGeom prst="rect">
             <a:avLst/>
@@ -17255,7 +16268,7 @@
                 <a:latin typeface="Courier New"/>
                 <a:ea typeface="Courier New"/>
               </a:rPr>
-              <a:t>≈ 50</a:t>
+              <a:t>24 FA + ~37</a:t>
             </a:r>
             <a:endParaRPr lang="en-US" sz="2100" b="0" u="none" strike="noStrike">
               <a:solidFill>
@@ -17277,7 +16290,7 @@
         <p:spPr>
           <a:xfrm>
             <a:off x="12096720" y="2118240"/>
-            <a:ext cx="5143320" cy="4718880"/>
+            <a:ext cx="5142960" cy="4718520"/>
           </a:xfrm>
           <a:prstGeom prst="roundRect">
             <a:avLst>
@@ -17325,7 +16338,7 @@
         <p:spPr>
           <a:xfrm>
             <a:off x="12427920" y="2411280"/>
-            <a:ext cx="4615560" cy="757800"/>
+            <a:ext cx="4615200" cy="757440"/>
           </a:xfrm>
           <a:prstGeom prst="rect">
             <a:avLst/>
@@ -17386,7 +16399,7 @@
         <p:spPr>
           <a:xfrm>
             <a:off x="12789720" y="3302640"/>
-            <a:ext cx="4253760" cy="664200"/>
+            <a:ext cx="4253400" cy="663840"/>
           </a:xfrm>
           <a:prstGeom prst="rect">
             <a:avLst/>
@@ -17543,7 +16556,7 @@
         <p:spPr>
           <a:xfrm>
             <a:off x="12789720" y="4196160"/>
-            <a:ext cx="4253760" cy="664200"/>
+            <a:ext cx="4253400" cy="663840"/>
           </a:xfrm>
           <a:prstGeom prst="rect">
             <a:avLst/>
@@ -17652,7 +16665,7 @@
         <p:spPr>
           <a:xfrm>
             <a:off x="12789720" y="5089320"/>
-            <a:ext cx="4253760" cy="334800"/>
+            <a:ext cx="4253400" cy="334440"/>
           </a:xfrm>
           <a:prstGeom prst="rect">
             <a:avLst/>
@@ -17713,7 +16726,7 @@
         <p:spPr>
           <a:xfrm>
             <a:off x="12789720" y="5653080"/>
-            <a:ext cx="4253760" cy="929160"/>
+            <a:ext cx="4253400" cy="928800"/>
           </a:xfrm>
           <a:prstGeom prst="rect">
             <a:avLst/>
@@ -17811,7 +16824,7 @@
         <p:spPr>
           <a:xfrm>
             <a:off x="1047600" y="419040"/>
-            <a:ext cx="4070160" cy="346320"/>
+            <a:ext cx="4069800" cy="345960"/>
           </a:xfrm>
           <a:prstGeom prst="rect">
             <a:avLst/>
@@ -17884,7 +16897,7 @@
         <p:spPr>
           <a:xfrm>
             <a:off x="12556440" y="419040"/>
-            <a:ext cx="4824000" cy="346320"/>
+            <a:ext cx="4823640" cy="345960"/>
           </a:xfrm>
           <a:prstGeom prst="rect">
             <a:avLst/>
@@ -17945,7 +16958,7 @@
         <p:spPr>
           <a:xfrm>
             <a:off x="1047600" y="952560"/>
-            <a:ext cx="16678080" cy="708480"/>
+            <a:ext cx="16677720" cy="708120"/>
           </a:xfrm>
           <a:prstGeom prst="rect">
             <a:avLst/>
@@ -18006,7 +17019,7 @@
         <p:spPr>
           <a:xfrm>
             <a:off x="1047600" y="2766240"/>
-            <a:ext cx="3750120" cy="9000"/>
+            <a:ext cx="3749760" cy="8640"/>
           </a:xfrm>
           <a:prstGeom prst="rect">
             <a:avLst/>
@@ -18049,7 +17062,7 @@
         <p:spPr>
           <a:xfrm>
             <a:off x="1238400" y="2289960"/>
-            <a:ext cx="3481920" cy="342720"/>
+            <a:ext cx="3481560" cy="342360"/>
           </a:xfrm>
           <a:prstGeom prst="rect">
             <a:avLst/>
@@ -18110,7 +17123,7 @@
         <p:spPr>
           <a:xfrm>
             <a:off x="4798440" y="2766240"/>
-            <a:ext cx="4486320" cy="9000"/>
+            <a:ext cx="4485960" cy="8640"/>
           </a:xfrm>
           <a:prstGeom prst="rect">
             <a:avLst/>
@@ -18153,7 +17166,7 @@
         <p:spPr>
           <a:xfrm>
             <a:off x="4988880" y="2289960"/>
-            <a:ext cx="4239720" cy="342720"/>
+            <a:ext cx="4239360" cy="342360"/>
           </a:xfrm>
           <a:prstGeom prst="rect">
             <a:avLst/>
@@ -18214,7 +17227,7 @@
         <p:spPr>
           <a:xfrm>
             <a:off x="9285120" y="2766240"/>
-            <a:ext cx="2278080" cy="9000"/>
+            <a:ext cx="2277720" cy="8640"/>
           </a:xfrm>
           <a:prstGeom prst="rect">
             <a:avLst/>
@@ -18257,7 +17270,7 @@
         <p:spPr>
           <a:xfrm>
             <a:off x="9399240" y="2289960"/>
-            <a:ext cx="1973160" cy="342720"/>
+            <a:ext cx="1972800" cy="342360"/>
           </a:xfrm>
           <a:prstGeom prst="rect">
             <a:avLst/>
@@ -18318,7 +17331,7 @@
         <p:spPr>
           <a:xfrm>
             <a:off x="1047600" y="3476520"/>
-            <a:ext cx="3750120" cy="9000"/>
+            <a:ext cx="3749760" cy="8640"/>
           </a:xfrm>
           <a:prstGeom prst="rect">
             <a:avLst/>
@@ -18361,7 +17374,7 @@
         <p:spPr>
           <a:xfrm>
             <a:off x="1238400" y="2944800"/>
-            <a:ext cx="3481920" cy="397800"/>
+            <a:ext cx="3481560" cy="397440"/>
           </a:xfrm>
           <a:prstGeom prst="rect">
             <a:avLst/>
@@ -18422,7 +17435,7 @@
         <p:spPr>
           <a:xfrm>
             <a:off x="4798440" y="3476520"/>
-            <a:ext cx="4486320" cy="9000"/>
+            <a:ext cx="4485960" cy="8640"/>
           </a:xfrm>
           <a:prstGeom prst="rect">
             <a:avLst/>
@@ -18465,7 +17478,7 @@
         <p:spPr>
           <a:xfrm>
             <a:off x="4988880" y="2944800"/>
-            <a:ext cx="4239720" cy="397800"/>
+            <a:ext cx="4239360" cy="397440"/>
           </a:xfrm>
           <a:prstGeom prst="rect">
             <a:avLst/>
@@ -18526,7 +17539,7 @@
         <p:spPr>
           <a:xfrm>
             <a:off x="9285120" y="3476520"/>
-            <a:ext cx="2278080" cy="9000"/>
+            <a:ext cx="2277720" cy="8640"/>
           </a:xfrm>
           <a:prstGeom prst="rect">
             <a:avLst/>
@@ -18569,7 +17582,7 @@
         <p:spPr>
           <a:xfrm>
             <a:off x="9399240" y="2944800"/>
-            <a:ext cx="1973160" cy="397800"/>
+            <a:ext cx="1972800" cy="397440"/>
           </a:xfrm>
           <a:prstGeom prst="rect">
             <a:avLst/>
@@ -18630,7 +17643,7 @@
         <p:spPr>
           <a:xfrm>
             <a:off x="1047600" y="4186440"/>
-            <a:ext cx="3750120" cy="9000"/>
+            <a:ext cx="3749760" cy="8640"/>
           </a:xfrm>
           <a:prstGeom prst="rect">
             <a:avLst/>
@@ -18673,7 +17686,7 @@
         <p:spPr>
           <a:xfrm>
             <a:off x="1238400" y="3655080"/>
-            <a:ext cx="3481920" cy="397800"/>
+            <a:ext cx="3481560" cy="397440"/>
           </a:xfrm>
           <a:prstGeom prst="rect">
             <a:avLst/>
@@ -18734,7 +17747,7 @@
         <p:spPr>
           <a:xfrm>
             <a:off x="4798440" y="4186440"/>
-            <a:ext cx="4486320" cy="9000"/>
+            <a:ext cx="4485960" cy="8640"/>
           </a:xfrm>
           <a:prstGeom prst="rect">
             <a:avLst/>
@@ -18777,7 +17790,7 @@
         <p:spPr>
           <a:xfrm>
             <a:off x="4988880" y="3655080"/>
-            <a:ext cx="4239720" cy="397800"/>
+            <a:ext cx="4239360" cy="397440"/>
           </a:xfrm>
           <a:prstGeom prst="rect">
             <a:avLst/>
@@ -18838,7 +17851,7 @@
         <p:spPr>
           <a:xfrm>
             <a:off x="9285120" y="4186440"/>
-            <a:ext cx="2278080" cy="9000"/>
+            <a:ext cx="2277720" cy="8640"/>
           </a:xfrm>
           <a:prstGeom prst="rect">
             <a:avLst/>
@@ -18881,7 +17894,7 @@
         <p:spPr>
           <a:xfrm>
             <a:off x="9399240" y="3655080"/>
-            <a:ext cx="1973160" cy="397800"/>
+            <a:ext cx="1972800" cy="397440"/>
           </a:xfrm>
           <a:prstGeom prst="rect">
             <a:avLst/>
@@ -18942,7 +17955,7 @@
         <p:spPr>
           <a:xfrm>
             <a:off x="1047600" y="4896720"/>
-            <a:ext cx="3750120" cy="9000"/>
+            <a:ext cx="3749760" cy="8640"/>
           </a:xfrm>
           <a:prstGeom prst="rect">
             <a:avLst/>
@@ -18985,7 +17998,7 @@
         <p:spPr>
           <a:xfrm>
             <a:off x="1238400" y="4365000"/>
-            <a:ext cx="3481920" cy="397800"/>
+            <a:ext cx="3481560" cy="397440"/>
           </a:xfrm>
           <a:prstGeom prst="rect">
             <a:avLst/>
@@ -19046,7 +18059,7 @@
         <p:spPr>
           <a:xfrm>
             <a:off x="4798440" y="4896720"/>
-            <a:ext cx="4486320" cy="9000"/>
+            <a:ext cx="4485960" cy="8640"/>
           </a:xfrm>
           <a:prstGeom prst="rect">
             <a:avLst/>
@@ -19089,7 +18102,7 @@
         <p:spPr>
           <a:xfrm>
             <a:off x="4988880" y="4365000"/>
-            <a:ext cx="4239720" cy="397800"/>
+            <a:ext cx="4239360" cy="397440"/>
           </a:xfrm>
           <a:prstGeom prst="rect">
             <a:avLst/>
@@ -19150,7 +18163,7 @@
         <p:spPr>
           <a:xfrm>
             <a:off x="9285120" y="4896720"/>
-            <a:ext cx="2278080" cy="9000"/>
+            <a:ext cx="2277720" cy="8640"/>
           </a:xfrm>
           <a:prstGeom prst="rect">
             <a:avLst/>
@@ -19193,7 +18206,7 @@
         <p:spPr>
           <a:xfrm>
             <a:off x="9399240" y="4365000"/>
-            <a:ext cx="1973160" cy="397800"/>
+            <a:ext cx="1972800" cy="397440"/>
           </a:xfrm>
           <a:prstGeom prst="rect">
             <a:avLst/>
@@ -19254,7 +18267,7 @@
         <p:spPr>
           <a:xfrm>
             <a:off x="1047600" y="5606640"/>
-            <a:ext cx="3750120" cy="9000"/>
+            <a:ext cx="3749760" cy="8640"/>
           </a:xfrm>
           <a:prstGeom prst="rect">
             <a:avLst/>
@@ -19297,7 +18310,7 @@
         <p:spPr>
           <a:xfrm>
             <a:off x="1238400" y="5075280"/>
-            <a:ext cx="3481920" cy="397800"/>
+            <a:ext cx="3481560" cy="397440"/>
           </a:xfrm>
           <a:prstGeom prst="rect">
             <a:avLst/>
@@ -19358,7 +18371,7 @@
         <p:spPr>
           <a:xfrm>
             <a:off x="4798440" y="5606640"/>
-            <a:ext cx="4486320" cy="9000"/>
+            <a:ext cx="4485960" cy="8640"/>
           </a:xfrm>
           <a:prstGeom prst="rect">
             <a:avLst/>
@@ -19401,7 +18414,7 @@
         <p:spPr>
           <a:xfrm>
             <a:off x="4988880" y="5075280"/>
-            <a:ext cx="4239720" cy="397800"/>
+            <a:ext cx="4239360" cy="397440"/>
           </a:xfrm>
           <a:prstGeom prst="rect">
             <a:avLst/>
@@ -19462,7 +18475,7 @@
         <p:spPr>
           <a:xfrm>
             <a:off x="9285120" y="5606640"/>
-            <a:ext cx="2278080" cy="9000"/>
+            <a:ext cx="2277720" cy="8640"/>
           </a:xfrm>
           <a:prstGeom prst="rect">
             <a:avLst/>
@@ -19505,7 +18518,7 @@
         <p:spPr>
           <a:xfrm>
             <a:off x="9399240" y="5075280"/>
-            <a:ext cx="1973160" cy="397800"/>
+            <a:ext cx="1972800" cy="397440"/>
           </a:xfrm>
           <a:prstGeom prst="rect">
             <a:avLst/>
@@ -19566,7 +18579,7 @@
         <p:spPr>
           <a:xfrm>
             <a:off x="1047600" y="5613840"/>
-            <a:ext cx="8236800" cy="9000"/>
+            <a:ext cx="8236440" cy="8640"/>
           </a:xfrm>
           <a:prstGeom prst="rect">
             <a:avLst/>
@@ -19609,7 +18622,7 @@
         <p:spPr>
           <a:xfrm>
             <a:off x="1238400" y="5830560"/>
-            <a:ext cx="8102880" cy="394200"/>
+            <a:ext cx="8102520" cy="393840"/>
           </a:xfrm>
           <a:prstGeom prst="rect">
             <a:avLst/>
@@ -19670,7 +18683,7 @@
         <p:spPr>
           <a:xfrm>
             <a:off x="9285120" y="5613840"/>
-            <a:ext cx="2278080" cy="9000"/>
+            <a:ext cx="2277720" cy="8640"/>
           </a:xfrm>
           <a:prstGeom prst="rect">
             <a:avLst/>
@@ -19713,7 +18726,7 @@
         <p:spPr>
           <a:xfrm>
             <a:off x="9399240" y="5830560"/>
-            <a:ext cx="1973160" cy="394200"/>
+            <a:ext cx="1972800" cy="393840"/>
           </a:xfrm>
           <a:prstGeom prst="rect">
             <a:avLst/>
@@ -19774,7 +18787,7 @@
         <p:spPr>
           <a:xfrm>
             <a:off x="12096720" y="2118240"/>
-            <a:ext cx="5143320" cy="5844960"/>
+            <a:ext cx="5142960" cy="5844600"/>
           </a:xfrm>
           <a:prstGeom prst="roundRect">
             <a:avLst>
@@ -19822,7 +18835,7 @@
         <p:spPr>
           <a:xfrm>
             <a:off x="12427920" y="2411280"/>
-            <a:ext cx="4615560" cy="397800"/>
+            <a:ext cx="4615200" cy="397440"/>
           </a:xfrm>
           <a:prstGeom prst="rect">
             <a:avLst/>
@@ -19883,7 +18896,7 @@
         <p:spPr>
           <a:xfrm>
             <a:off x="12789720" y="2942640"/>
-            <a:ext cx="4253760" cy="1555920"/>
+            <a:ext cx="4253400" cy="1555560"/>
           </a:xfrm>
           <a:prstGeom prst="rect">
             <a:avLst/>
@@ -20004,7 +19017,7 @@
         <p:spPr>
           <a:xfrm>
             <a:off x="12789720" y="4727520"/>
-            <a:ext cx="4253760" cy="961560"/>
+            <a:ext cx="4253400" cy="961200"/>
           </a:xfrm>
           <a:prstGeom prst="rect">
             <a:avLst/>
@@ -20055,10 +19068,10 @@
                 <a:latin typeface="Arial"/>
                 <a:ea typeface="Arial"/>
               </a:rPr>
-              <a:t>flip-</a:t>
-            </a:r>
-            <a:r>
-              <a:rPr lang="en-US" sz="1800" b="1" u="none" strike="noStrike">
+              <a:t>flip-flops de salida obligatorios </a:t>
+            </a:r>
+            <a:r>
+              <a:rPr lang="en-US" sz="1800" b="0" u="none" strike="noStrike">
                 <a:solidFill>
                   <a:srgbClr val="F3F2EE"/>
                 </a:solidFill>
@@ -20067,7 +19080,19 @@
                 <a:latin typeface="Arial"/>
                 <a:ea typeface="Arial"/>
               </a:rPr>
-              <a:t>flops de salida obligatorios </a:t>
+              <a:t>y entrega </a:t>
+            </a:r>
+            <a:r>
+              <a:rPr lang="en-US" sz="1800" b="0" u="none" strike="noStrike">
+                <a:solidFill>
+                  <a:srgbClr val="F3F2EE"/>
+                </a:solidFill>
+                <a:effectLst/>
+                <a:uFillTx/>
+                <a:latin typeface="Courier New"/>
+                <a:ea typeface="Courier New"/>
+              </a:rPr>
+              <a:t>o_D </a:t>
             </a:r>
             <a:r>
               <a:rPr lang="en-US" sz="1800" b="0" u="none" strike="noStrike">
@@ -20079,30 +19104,6 @@
                 <a:latin typeface="Arial"/>
                 <a:ea typeface="Arial"/>
               </a:rPr>
-              <a:t>y entrega </a:t>
-            </a:r>
-            <a:r>
-              <a:rPr lang="en-US" sz="1800" b="0" u="none" strike="noStrike">
-                <a:solidFill>
-                  <a:srgbClr val="F3F2EE"/>
-                </a:solidFill>
-                <a:effectLst/>
-                <a:uFillTx/>
-                <a:latin typeface="Courier New"/>
-                <a:ea typeface="Courier New"/>
-              </a:rPr>
-              <a:t>o_D </a:t>
-            </a:r>
-            <a:r>
-              <a:rPr lang="en-US" sz="1800" b="0" u="none" strike="noStrike">
-                <a:solidFill>
-                  <a:srgbClr val="F3F2EE"/>
-                </a:solidFill>
-                <a:effectLst/>
-                <a:uFillTx/>
-                <a:latin typeface="Arial"/>
-                <a:ea typeface="Arial"/>
-              </a:rPr>
               <a:t>sincrónica.</a:t>
             </a:r>
             <a:endParaRPr lang="en-US" sz="1800" b="0" u="none" strike="noStrike">
@@ -20125,7 +19126,7 @@
         <p:spPr>
           <a:xfrm>
             <a:off x="12789720" y="5918040"/>
-            <a:ext cx="4253760" cy="632160"/>
+            <a:ext cx="4253400" cy="631800"/>
           </a:xfrm>
           <a:prstGeom prst="rect">
             <a:avLst/>
@@ -20186,7 +19187,7 @@
         <p:spPr>
           <a:xfrm>
             <a:off x="12789720" y="6779160"/>
-            <a:ext cx="4253760" cy="929160"/>
+            <a:ext cx="4253400" cy="928800"/>
           </a:xfrm>
           <a:prstGeom prst="rect">
             <a:avLst/>
@@ -20225,31 +19226,7 @@
                 <a:latin typeface="Arial"/>
                 <a:ea typeface="Arial"/>
               </a:rPr>
-              <a:t>No se necesitan registros intermedios </a:t>
-            </a:r>
-            <a:r>
-              <a:rPr lang="en-US" sz="1800" b="0" u="none" strike="noStrike">
-                <a:solidFill>
-                  <a:srgbClr val="F3F2EE"/>
-                </a:solidFill>
-                <a:effectLst/>
-                <a:uFillTx/>
-                <a:latin typeface="Arial"/>
-                <a:ea typeface="Arial"/>
-              </a:rPr>
-              <a:t>de pipeline en la versión base (la </a:t>
-            </a:r>
-            <a:r>
-              <a:rPr lang="en-US" sz="1800" b="0" u="none" strike="noStrike">
-                <a:solidFill>
-                  <a:srgbClr val="F3F2EE"/>
-                </a:solidFill>
-                <a:effectLst/>
-                <a:uFillTx/>
-                <a:latin typeface="Arial"/>
-                <a:ea typeface="Arial"/>
-              </a:rPr>
-              <a:t>aritmética es multiciclo).</a:t>
+              <a:t>No se necesitan registros intermedios de pipeline en la versión base (la aritmética es multiciclo).</a:t>
             </a:r>
             <a:endParaRPr lang="en-US" sz="1800" b="0" u="none" strike="noStrike">
               <a:solidFill>
@@ -20308,7 +19285,7 @@
         <p:spPr>
           <a:xfrm>
             <a:off x="1047600" y="419040"/>
-            <a:ext cx="4522320" cy="346320"/>
+            <a:ext cx="4521960" cy="345960"/>
           </a:xfrm>
           <a:prstGeom prst="rect">
             <a:avLst/>
@@ -20381,7 +19358,7 @@
         <p:spPr>
           <a:xfrm>
             <a:off x="13581000" y="419040"/>
-            <a:ext cx="3768480" cy="346320"/>
+            <a:ext cx="3768120" cy="345960"/>
           </a:xfrm>
           <a:prstGeom prst="rect">
             <a:avLst/>
@@ -20442,7 +19419,7 @@
         <p:spPr>
           <a:xfrm>
             <a:off x="1047600" y="952560"/>
-            <a:ext cx="16678080" cy="708480"/>
+            <a:ext cx="16677720" cy="708120"/>
           </a:xfrm>
           <a:prstGeom prst="rect">
             <a:avLst/>
@@ -20503,7 +19480,7 @@
         <p:spPr>
           <a:xfrm>
             <a:off x="1047600" y="1813680"/>
-            <a:ext cx="16678080" cy="603360"/>
+            <a:ext cx="16677720" cy="603000"/>
           </a:xfrm>
           <a:prstGeom prst="rect">
             <a:avLst/>
@@ -20564,7 +19541,7 @@
         <p:spPr>
           <a:xfrm>
             <a:off x="1047600" y="2874600"/>
-            <a:ext cx="10830600" cy="521280"/>
+            <a:ext cx="10830240" cy="520920"/>
           </a:xfrm>
           <a:prstGeom prst="rect">
             <a:avLst/>
@@ -20649,7 +19626,7 @@
         <p:spPr>
           <a:xfrm>
             <a:off x="1047600" y="4444560"/>
-            <a:ext cx="6390360" cy="9000"/>
+            <a:ext cx="6390000" cy="8640"/>
           </a:xfrm>
           <a:prstGeom prst="rect">
             <a:avLst/>
@@ -20692,7 +19669,7 @@
         <p:spPr>
           <a:xfrm>
             <a:off x="1238400" y="3967920"/>
-            <a:ext cx="6201000" cy="342720"/>
+            <a:ext cx="6200640" cy="342360"/>
           </a:xfrm>
           <a:prstGeom prst="rect">
             <a:avLst/>
@@ -20753,7 +19730,7 @@
         <p:spPr>
           <a:xfrm>
             <a:off x="7438320" y="4444560"/>
-            <a:ext cx="4124520" cy="9000"/>
+            <a:ext cx="4124160" cy="8640"/>
           </a:xfrm>
           <a:prstGeom prst="rect">
             <a:avLst/>
@@ -20796,7 +19773,7 @@
         <p:spPr>
           <a:xfrm>
             <a:off x="7505280" y="3967920"/>
-            <a:ext cx="3867480" cy="342720"/>
+            <a:ext cx="3867120" cy="342360"/>
           </a:xfrm>
           <a:prstGeom prst="rect">
             <a:avLst/>
@@ -20857,7 +19834,7 @@
         <p:spPr>
           <a:xfrm>
             <a:off x="1047600" y="5195520"/>
-            <a:ext cx="6390360" cy="9000"/>
+            <a:ext cx="6390000" cy="8640"/>
           </a:xfrm>
           <a:prstGeom prst="rect">
             <a:avLst/>
@@ -20900,7 +19877,7 @@
         <p:spPr>
           <a:xfrm>
             <a:off x="1238400" y="4623120"/>
-            <a:ext cx="6201000" cy="438480"/>
+            <a:ext cx="6200640" cy="438120"/>
           </a:xfrm>
           <a:prstGeom prst="rect">
             <a:avLst/>
@@ -20985,7 +19962,7 @@
         <p:spPr>
           <a:xfrm>
             <a:off x="7438320" y="5195520"/>
-            <a:ext cx="4124520" cy="9000"/>
+            <a:ext cx="4124160" cy="8640"/>
           </a:xfrm>
           <a:prstGeom prst="rect">
             <a:avLst/>
@@ -21028,7 +20005,7 @@
         <p:spPr>
           <a:xfrm>
             <a:off x="7505280" y="4623120"/>
-            <a:ext cx="3867480" cy="438480"/>
+            <a:ext cx="3867120" cy="438120"/>
           </a:xfrm>
           <a:prstGeom prst="rect">
             <a:avLst/>
@@ -21089,7 +20066,7 @@
         <p:spPr>
           <a:xfrm>
             <a:off x="1047600" y="5905440"/>
-            <a:ext cx="6390360" cy="9000"/>
+            <a:ext cx="6390000" cy="8640"/>
           </a:xfrm>
           <a:prstGeom prst="rect">
             <a:avLst/>
@@ -21132,7 +20109,7 @@
         <p:spPr>
           <a:xfrm>
             <a:off x="1238400" y="5374080"/>
-            <a:ext cx="6201000" cy="397800"/>
+            <a:ext cx="6200640" cy="397440"/>
           </a:xfrm>
           <a:prstGeom prst="rect">
             <a:avLst/>
@@ -21193,7 +20170,7 @@
         <p:spPr>
           <a:xfrm>
             <a:off x="7438320" y="5905440"/>
-            <a:ext cx="4124520" cy="9000"/>
+            <a:ext cx="4124160" cy="8640"/>
           </a:xfrm>
           <a:prstGeom prst="rect">
             <a:avLst/>
@@ -21236,7 +20213,7 @@
         <p:spPr>
           <a:xfrm>
             <a:off x="7505280" y="5374080"/>
-            <a:ext cx="3867480" cy="397800"/>
+            <a:ext cx="3867120" cy="397440"/>
           </a:xfrm>
           <a:prstGeom prst="rect">
             <a:avLst/>
@@ -21297,7 +20274,7 @@
         <p:spPr>
           <a:xfrm>
             <a:off x="1047600" y="6615720"/>
-            <a:ext cx="6390360" cy="9000"/>
+            <a:ext cx="6390000" cy="8640"/>
           </a:xfrm>
           <a:prstGeom prst="rect">
             <a:avLst/>
@@ -21340,7 +20317,7 @@
         <p:spPr>
           <a:xfrm>
             <a:off x="1238400" y="6084000"/>
-            <a:ext cx="6201000" cy="397800"/>
+            <a:ext cx="6200640" cy="397440"/>
           </a:xfrm>
           <a:prstGeom prst="rect">
             <a:avLst/>
@@ -21379,19 +20356,7 @@
                 <a:latin typeface="Courier New"/>
                 <a:ea typeface="Courier New"/>
               </a:rPr>
-              <a:t>ADD① → ADD②/③ (interconex. + </a:t>
-            </a:r>
-            <a:r>
-              <a:rPr lang="en-US" sz="2100" b="0" u="none" strike="noStrike">
-                <a:solidFill>
-                  <a:srgbClr val="F3F2EE"/>
-                </a:solidFill>
-                <a:effectLst/>
-                <a:uFillTx/>
-                <a:latin typeface="Courier New"/>
-                <a:ea typeface="Courier New"/>
-              </a:rPr>
-              <a:t>lógica)</a:t>
+              <a:t>ADD① → ADD②/③ (interconex. + lógica)</a:t>
             </a:r>
             <a:endParaRPr lang="en-US" sz="2100" b="0" u="none" strike="noStrike">
               <a:solidFill>
@@ -21413,7 +20378,7 @@
         <p:spPr>
           <a:xfrm>
             <a:off x="7438320" y="6615720"/>
-            <a:ext cx="4124520" cy="9000"/>
+            <a:ext cx="4124160" cy="8640"/>
           </a:xfrm>
           <a:prstGeom prst="rect">
             <a:avLst/>
@@ -21456,7 +20421,7 @@
         <p:spPr>
           <a:xfrm>
             <a:off x="7505280" y="6084000"/>
-            <a:ext cx="3867480" cy="397800"/>
+            <a:ext cx="3867120" cy="397440"/>
           </a:xfrm>
           <a:prstGeom prst="rect">
             <a:avLst/>
@@ -21517,7 +20482,7 @@
         <p:spPr>
           <a:xfrm>
             <a:off x="1047600" y="7325640"/>
-            <a:ext cx="6390360" cy="9000"/>
+            <a:ext cx="6390000" cy="8640"/>
           </a:xfrm>
           <a:prstGeom prst="rect">
             <a:avLst/>
@@ -21560,7 +20525,7 @@
         <p:spPr>
           <a:xfrm>
             <a:off x="1238400" y="6794280"/>
-            <a:ext cx="6201000" cy="397800"/>
+            <a:ext cx="6200640" cy="397440"/>
           </a:xfrm>
           <a:prstGeom prst="rect">
             <a:avLst/>
@@ -21621,7 +20586,7 @@
         <p:spPr>
           <a:xfrm>
             <a:off x="7438320" y="7325640"/>
-            <a:ext cx="4124520" cy="9000"/>
+            <a:ext cx="4124160" cy="8640"/>
           </a:xfrm>
           <a:prstGeom prst="rect">
             <a:avLst/>
@@ -21664,7 +20629,7 @@
         <p:spPr>
           <a:xfrm>
             <a:off x="7505280" y="6794280"/>
-            <a:ext cx="3867480" cy="397800"/>
+            <a:ext cx="3867120" cy="397440"/>
           </a:xfrm>
           <a:prstGeom prst="rect">
             <a:avLst/>
@@ -21725,7 +20690,7 @@
         <p:spPr>
           <a:xfrm>
             <a:off x="1047600" y="8035920"/>
-            <a:ext cx="6390360" cy="9000"/>
+            <a:ext cx="6390000" cy="8640"/>
           </a:xfrm>
           <a:prstGeom prst="rect">
             <a:avLst/>
@@ -21768,7 +20733,7 @@
         <p:spPr>
           <a:xfrm>
             <a:off x="1238400" y="7504200"/>
-            <a:ext cx="6201000" cy="397800"/>
+            <a:ext cx="6200640" cy="397440"/>
           </a:xfrm>
           <a:prstGeom prst="rect">
             <a:avLst/>
@@ -21829,7 +20794,7 @@
         <p:spPr>
           <a:xfrm>
             <a:off x="7438320" y="8035920"/>
-            <a:ext cx="4124520" cy="9000"/>
+            <a:ext cx="4124160" cy="8640"/>
           </a:xfrm>
           <a:prstGeom prst="rect">
             <a:avLst/>
@@ -21872,7 +20837,7 @@
         <p:spPr>
           <a:xfrm>
             <a:off x="7505280" y="7504200"/>
-            <a:ext cx="3867480" cy="397800"/>
+            <a:ext cx="3867120" cy="397440"/>
           </a:xfrm>
           <a:prstGeom prst="rect">
             <a:avLst/>
@@ -21933,7 +20898,7 @@
         <p:spPr>
           <a:xfrm>
             <a:off x="1047600" y="8042760"/>
-            <a:ext cx="6390360" cy="9000"/>
+            <a:ext cx="6390000" cy="8640"/>
           </a:xfrm>
           <a:prstGeom prst="rect">
             <a:avLst/>
@@ -21976,7 +20941,7 @@
         <p:spPr>
           <a:xfrm>
             <a:off x="1238400" y="8259480"/>
-            <a:ext cx="6201000" cy="394200"/>
+            <a:ext cx="6200640" cy="393840"/>
           </a:xfrm>
           <a:prstGeom prst="rect">
             <a:avLst/>
@@ -22037,7 +21002,7 @@
         <p:spPr>
           <a:xfrm>
             <a:off x="7438320" y="8042760"/>
-            <a:ext cx="4124520" cy="9000"/>
+            <a:ext cx="4124160" cy="8640"/>
           </a:xfrm>
           <a:prstGeom prst="rect">
             <a:avLst/>
@@ -22080,7 +21045,7 @@
         <p:spPr>
           <a:xfrm>
             <a:off x="7505280" y="8259480"/>
-            <a:ext cx="3867480" cy="394200"/>
+            <a:ext cx="3867120" cy="393840"/>
           </a:xfrm>
           <a:prstGeom prst="rect">
             <a:avLst/>
@@ -22141,7 +21106,7 @@
         <p:spPr>
           <a:xfrm>
             <a:off x="12096720" y="2874600"/>
-            <a:ext cx="5143320" cy="3302640"/>
+            <a:ext cx="5142960" cy="3302280"/>
           </a:xfrm>
           <a:prstGeom prst="roundRect">
             <a:avLst>
@@ -22189,7 +21154,7 @@
         <p:spPr>
           <a:xfrm>
             <a:off x="12484800" y="3224520"/>
-            <a:ext cx="4497840" cy="438480"/>
+            <a:ext cx="4497480" cy="438120"/>
           </a:xfrm>
           <a:prstGeom prst="rect">
             <a:avLst/>
@@ -22274,7 +21239,7 @@
         <p:spPr>
           <a:xfrm>
             <a:off x="12484800" y="3796920"/>
-            <a:ext cx="4497840" cy="875880"/>
+            <a:ext cx="4497480" cy="875520"/>
           </a:xfrm>
           <a:prstGeom prst="rect">
             <a:avLst/>
@@ -22347,7 +21312,7 @@
         <p:spPr>
           <a:xfrm>
             <a:off x="12484800" y="4787640"/>
-            <a:ext cx="4497840" cy="1077840"/>
+            <a:ext cx="4497480" cy="1077480"/>
           </a:xfrm>
           <a:prstGeom prst="rect">
             <a:avLst/>
@@ -22420,7 +21385,7 @@
         <p:spPr>
           <a:xfrm>
             <a:off x="12096720" y="6387480"/>
-            <a:ext cx="5143320" cy="3697560"/>
+            <a:ext cx="5142960" cy="3697200"/>
           </a:xfrm>
           <a:prstGeom prst="roundRect">
             <a:avLst>
@@ -22468,7 +21433,7 @@
         <p:spPr>
           <a:xfrm>
             <a:off x="12484800" y="6737400"/>
-            <a:ext cx="4497840" cy="397800"/>
+            <a:ext cx="4497480" cy="397440"/>
           </a:xfrm>
           <a:prstGeom prst="rect">
             <a:avLst/>
@@ -22529,7 +21494,7 @@
         <p:spPr>
           <a:xfrm>
             <a:off x="12484800" y="7268760"/>
-            <a:ext cx="4497840" cy="2504160"/>
+            <a:ext cx="4497480" cy="2503800"/>
           </a:xfrm>
           <a:prstGeom prst="rect">
             <a:avLst/>
@@ -22568,10 +21533,10 @@
                 <a:latin typeface="Arial"/>
                 <a:ea typeface="Arial"/>
               </a:rPr>
-              <a:t>La cadena de adders (≈ 1.58 ns) limita; el resto es </a:t>
-            </a:r>
-            <a:r>
-              <a:rPr lang="en-US" sz="2100" b="0" u="none" strike="noStrike">
+              <a:t>La cadena de adders (≈ 1.58 ns) limita; el resto es overhead de FF. </a:t>
+            </a:r>
+            <a:r>
+              <a:rPr lang="en-US" sz="2100" b="1" u="none" strike="noStrike">
                 <a:solidFill>
                   <a:srgbClr val="BAB7B2"/>
                 </a:solidFill>
@@ -22580,10 +21545,10 @@
                 <a:latin typeface="Arial"/>
                 <a:ea typeface="Arial"/>
               </a:rPr>
-              <a:t>overhead de FF. </a:t>
-            </a:r>
-            <a:r>
-              <a:rPr lang="en-US" sz="2100" b="1" u="none" strike="noStrike">
+              <a:t>No </a:t>
+            </a:r>
+            <a:r>
+              <a:rPr lang="en-US" sz="2100" b="0" u="none" strike="noStrike">
                 <a:solidFill>
                   <a:srgbClr val="BAB7B2"/>
                 </a:solidFill>
@@ -22592,55 +21557,7 @@
                 <a:latin typeface="Arial"/>
                 <a:ea typeface="Arial"/>
               </a:rPr>
-              <a:t>No </a:t>
-            </a:r>
-            <a:r>
-              <a:rPr lang="en-US" sz="2100" b="0" u="none" strike="noStrike">
-                <a:solidFill>
-                  <a:srgbClr val="BAB7B2"/>
-                </a:solidFill>
-                <a:effectLst/>
-                <a:uFillTx/>
-                <a:latin typeface="Arial"/>
-                <a:ea typeface="Arial"/>
-              </a:rPr>
-              <a:t>se puede declarar multiciclo </a:t>
-            </a:r>
-            <a:r>
-              <a:rPr lang="en-US" sz="2100" b="0" u="none" strike="noStrike">
-                <a:solidFill>
-                  <a:srgbClr val="BAB7B2"/>
-                </a:solidFill>
-                <a:effectLst/>
-                <a:uFillTx/>
-                <a:latin typeface="Arial"/>
-                <a:ea typeface="Arial"/>
-              </a:rPr>
-              <a:t>"gratis": el registro de salida captura una fase distinta </a:t>
-            </a:r>
-            <a:r>
-              <a:rPr lang="en-US" sz="2100" b="0" u="none" strike="noStrike">
-                <a:solidFill>
-                  <a:srgbClr val="BAB7B2"/>
-                </a:solidFill>
-                <a:effectLst/>
-                <a:uFillTx/>
-                <a:latin typeface="Arial"/>
-                <a:ea typeface="Arial"/>
-              </a:rPr>
-              <a:t>cada ciclo. Para exponer el margen de 4 ciclos hace </a:t>
-            </a:r>
-            <a:r>
-              <a:rPr lang="en-US" sz="2100" b="0" u="none" strike="noStrike">
-                <a:solidFill>
-                  <a:srgbClr val="BAB7B2"/>
-                </a:solidFill>
-                <a:effectLst/>
-                <a:uFillTx/>
-                <a:latin typeface="Arial"/>
-                <a:ea typeface="Arial"/>
-              </a:rPr>
-              <a:t>falta registrar </a:t>
+              <a:t>se puede declarar multiciclo "gratis": el registro de salida captura una fase distinta cada ciclo. Para exponer el margen de 4 ciclos hace falta registrar </a:t>
             </a:r>
             <a:r>
               <a:rPr lang="en-US" sz="2100" b="0" u="none" strike="noStrike">
@@ -22723,7 +21640,7 @@
         <p:spPr>
           <a:xfrm>
             <a:off x="1047600" y="419040"/>
-            <a:ext cx="8442000" cy="346320"/>
+            <a:ext cx="8441640" cy="345960"/>
           </a:xfrm>
           <a:prstGeom prst="rect">
             <a:avLst/>
@@ -22796,7 +21713,7 @@
         <p:spPr>
           <a:xfrm>
             <a:off x="13727520" y="419040"/>
-            <a:ext cx="3618000" cy="346320"/>
+            <a:ext cx="3617640" cy="345960"/>
           </a:xfrm>
           <a:prstGeom prst="rect">
             <a:avLst/>
@@ -22857,7 +21774,7 @@
         <p:spPr>
           <a:xfrm>
             <a:off x="1047600" y="952560"/>
-            <a:ext cx="16678080" cy="708480"/>
+            <a:ext cx="16677720" cy="708120"/>
           </a:xfrm>
           <a:prstGeom prst="rect">
             <a:avLst/>
@@ -22930,7 +21847,7 @@
         <p:spPr>
           <a:xfrm>
             <a:off x="1047600" y="2305440"/>
-            <a:ext cx="8512920" cy="9000"/>
+            <a:ext cx="8512560" cy="8640"/>
           </a:xfrm>
           <a:prstGeom prst="rect">
             <a:avLst/>
@@ -22973,7 +21890,7 @@
         <p:spPr>
           <a:xfrm>
             <a:off x="1219320" y="1870560"/>
-            <a:ext cx="8425440" cy="377280"/>
+            <a:ext cx="8425080" cy="376920"/>
           </a:xfrm>
           <a:prstGeom prst="rect">
             <a:avLst/>
@@ -23034,7 +21951,7 @@
         <p:spPr>
           <a:xfrm>
             <a:off x="9560880" y="2305440"/>
-            <a:ext cx="3384720" cy="9000"/>
+            <a:ext cx="3384360" cy="8640"/>
           </a:xfrm>
           <a:prstGeom prst="rect">
             <a:avLst/>
@@ -23077,7 +21994,7 @@
         <p:spPr>
           <a:xfrm>
             <a:off x="9630720" y="1870560"/>
-            <a:ext cx="3143160" cy="377280"/>
+            <a:ext cx="3142800" cy="376920"/>
           </a:xfrm>
           <a:prstGeom prst="rect">
             <a:avLst/>
@@ -23162,7 +22079,7 @@
         <p:spPr>
           <a:xfrm>
             <a:off x="12945960" y="2305440"/>
-            <a:ext cx="2147040" cy="9000"/>
+            <a:ext cx="2146680" cy="8640"/>
           </a:xfrm>
           <a:prstGeom prst="rect">
             <a:avLst/>
@@ -23205,7 +22122,7 @@
         <p:spPr>
           <a:xfrm>
             <a:off x="13041000" y="1870560"/>
-            <a:ext cx="1880280" cy="377280"/>
+            <a:ext cx="1879920" cy="376920"/>
           </a:xfrm>
           <a:prstGeom prst="rect">
             <a:avLst/>
@@ -23266,7 +22183,7 @@
         <p:spPr>
           <a:xfrm>
             <a:off x="15093000" y="2305440"/>
-            <a:ext cx="2146680" cy="9000"/>
+            <a:ext cx="2146320" cy="8640"/>
           </a:xfrm>
           <a:prstGeom prst="rect">
             <a:avLst/>
@@ -23309,7 +22226,7 @@
         <p:spPr>
           <a:xfrm>
             <a:off x="15188400" y="1870560"/>
-            <a:ext cx="1879920" cy="377280"/>
+            <a:ext cx="1879560" cy="376920"/>
           </a:xfrm>
           <a:prstGeom prst="rect">
             <a:avLst/>
@@ -23370,7 +22287,7 @@
         <p:spPr>
           <a:xfrm>
             <a:off x="1047600" y="3209760"/>
-            <a:ext cx="8512920" cy="9000"/>
+            <a:ext cx="8512560" cy="8640"/>
           </a:xfrm>
           <a:prstGeom prst="rect">
             <a:avLst/>
@@ -23413,7 +22330,7 @@
         <p:spPr>
           <a:xfrm>
             <a:off x="1219320" y="2419920"/>
-            <a:ext cx="4614480" cy="380520"/>
+            <a:ext cx="4614120" cy="380160"/>
           </a:xfrm>
           <a:prstGeom prst="rect">
             <a:avLst/>
@@ -23474,7 +22391,7 @@
         <p:spPr>
           <a:xfrm>
             <a:off x="1219320" y="2809440"/>
-            <a:ext cx="8415000" cy="346320"/>
+            <a:ext cx="8414640" cy="345960"/>
           </a:xfrm>
           <a:prstGeom prst="rect">
             <a:avLst/>
@@ -23535,7 +22452,7 @@
         <p:spPr>
           <a:xfrm>
             <a:off x="9560880" y="3209760"/>
-            <a:ext cx="3384720" cy="9000"/>
+            <a:ext cx="3384360" cy="8640"/>
           </a:xfrm>
           <a:prstGeom prst="rect">
             <a:avLst/>
@@ -23578,7 +22495,7 @@
         <p:spPr>
           <a:xfrm>
             <a:off x="9630720" y="2407680"/>
-            <a:ext cx="3143160" cy="744480"/>
+            <a:ext cx="3142800" cy="744120"/>
           </a:xfrm>
           <a:prstGeom prst="rect">
             <a:avLst/>
@@ -23639,7 +22556,7 @@
         <p:spPr>
           <a:xfrm>
             <a:off x="12945960" y="3209760"/>
-            <a:ext cx="2147040" cy="9000"/>
+            <a:ext cx="2146680" cy="8640"/>
           </a:xfrm>
           <a:prstGeom prst="rect">
             <a:avLst/>
@@ -23682,7 +22599,7 @@
         <p:spPr>
           <a:xfrm>
             <a:off x="13041000" y="2407680"/>
-            <a:ext cx="1880280" cy="744480"/>
+            <a:ext cx="1879920" cy="744120"/>
           </a:xfrm>
           <a:prstGeom prst="rect">
             <a:avLst/>
@@ -23743,7 +22660,7 @@
         <p:spPr>
           <a:xfrm>
             <a:off x="15093000" y="3209760"/>
-            <a:ext cx="2146680" cy="9000"/>
+            <a:ext cx="2146320" cy="8640"/>
           </a:xfrm>
           <a:prstGeom prst="rect">
             <a:avLst/>
@@ -23786,7 +22703,7 @@
         <p:spPr>
           <a:xfrm>
             <a:off x="15188400" y="2407680"/>
-            <a:ext cx="1879920" cy="744480"/>
+            <a:ext cx="1879560" cy="744120"/>
           </a:xfrm>
           <a:prstGeom prst="rect">
             <a:avLst/>
@@ -23847,7 +22764,7 @@
         <p:spPr>
           <a:xfrm>
             <a:off x="1047600" y="4114080"/>
-            <a:ext cx="8512920" cy="9000"/>
+            <a:ext cx="8512560" cy="8640"/>
           </a:xfrm>
           <a:prstGeom prst="rect">
             <a:avLst/>
@@ -23890,7 +22807,7 @@
         <p:spPr>
           <a:xfrm>
             <a:off x="1219320" y="3324240"/>
-            <a:ext cx="5438880" cy="380520"/>
+            <a:ext cx="5438520" cy="380160"/>
           </a:xfrm>
           <a:prstGeom prst="rect">
             <a:avLst/>
@@ -23951,7 +22868,7 @@
         <p:spPr>
           <a:xfrm>
             <a:off x="1219320" y="3713760"/>
-            <a:ext cx="8415000" cy="346320"/>
+            <a:ext cx="8414640" cy="345960"/>
           </a:xfrm>
           <a:prstGeom prst="rect">
             <a:avLst/>
@@ -24012,7 +22929,7 @@
         <p:spPr>
           <a:xfrm>
             <a:off x="9560880" y="4114080"/>
-            <a:ext cx="3384720" cy="9000"/>
+            <a:ext cx="3384360" cy="8640"/>
           </a:xfrm>
           <a:prstGeom prst="rect">
             <a:avLst/>
@@ -24055,7 +22972,7 @@
         <p:spPr>
           <a:xfrm>
             <a:off x="9630720" y="3312000"/>
-            <a:ext cx="3143160" cy="744480"/>
+            <a:ext cx="3142800" cy="744120"/>
           </a:xfrm>
           <a:prstGeom prst="rect">
             <a:avLst/>
@@ -24116,7 +23033,7 @@
         <p:spPr>
           <a:xfrm>
             <a:off x="12945960" y="4114080"/>
-            <a:ext cx="2147040" cy="9000"/>
+            <a:ext cx="2146680" cy="8640"/>
           </a:xfrm>
           <a:prstGeom prst="rect">
             <a:avLst/>
@@ -24159,7 +23076,7 @@
         <p:spPr>
           <a:xfrm>
             <a:off x="13041000" y="3312000"/>
-            <a:ext cx="1880280" cy="744480"/>
+            <a:ext cx="1879920" cy="744120"/>
           </a:xfrm>
           <a:prstGeom prst="rect">
             <a:avLst/>
@@ -24220,7 +23137,7 @@
         <p:spPr>
           <a:xfrm>
             <a:off x="15093000" y="4114080"/>
-            <a:ext cx="2146680" cy="9000"/>
+            <a:ext cx="2146320" cy="8640"/>
           </a:xfrm>
           <a:prstGeom prst="rect">
             <a:avLst/>
@@ -24263,7 +23180,7 @@
         <p:spPr>
           <a:xfrm>
             <a:off x="15188400" y="3312000"/>
-            <a:ext cx="1879920" cy="744480"/>
+            <a:ext cx="1879560" cy="744120"/>
           </a:xfrm>
           <a:prstGeom prst="rect">
             <a:avLst/>
@@ -24324,7 +23241,7 @@
         <p:spPr>
           <a:xfrm>
             <a:off x="1047600" y="4121280"/>
-            <a:ext cx="16192080" cy="903960"/>
+            <a:ext cx="16191720" cy="903600"/>
           </a:xfrm>
           <a:prstGeom prst="rect">
             <a:avLst/>
@@ -24369,7 +23286,7 @@
         <p:spPr>
           <a:xfrm>
             <a:off x="1047600" y="5018400"/>
-            <a:ext cx="8512920" cy="9000"/>
+            <a:ext cx="8512560" cy="8640"/>
           </a:xfrm>
           <a:prstGeom prst="rect">
             <a:avLst/>
@@ -24412,7 +23329,7 @@
         <p:spPr>
           <a:xfrm>
             <a:off x="1219320" y="4228560"/>
-            <a:ext cx="4944240" cy="380520"/>
+            <a:ext cx="4943880" cy="380160"/>
           </a:xfrm>
           <a:prstGeom prst="rect">
             <a:avLst/>
@@ -24473,7 +23390,7 @@
         <p:spPr>
           <a:xfrm>
             <a:off x="6339960" y="4214160"/>
-            <a:ext cx="2316240" cy="402120"/>
+            <a:ext cx="2315880" cy="401760"/>
           </a:xfrm>
           <a:prstGeom prst="rect">
             <a:avLst/>
@@ -24534,7 +23451,7 @@
         <p:spPr>
           <a:xfrm>
             <a:off x="1219320" y="4618080"/>
-            <a:ext cx="8415000" cy="346320"/>
+            <a:ext cx="8414640" cy="345960"/>
           </a:xfrm>
           <a:prstGeom prst="rect">
             <a:avLst/>
@@ -24595,7 +23512,7 @@
         <p:spPr>
           <a:xfrm>
             <a:off x="9560880" y="5018400"/>
-            <a:ext cx="3384720" cy="9000"/>
+            <a:ext cx="3384360" cy="8640"/>
           </a:xfrm>
           <a:prstGeom prst="rect">
             <a:avLst/>
@@ -24638,7 +23555,7 @@
         <p:spPr>
           <a:xfrm>
             <a:off x="9630720" y="4216680"/>
-            <a:ext cx="3143160" cy="744480"/>
+            <a:ext cx="3142800" cy="744120"/>
           </a:xfrm>
           <a:prstGeom prst="rect">
             <a:avLst/>
@@ -24699,7 +23616,7 @@
         <p:spPr>
           <a:xfrm>
             <a:off x="12945960" y="5018400"/>
-            <a:ext cx="2147040" cy="9000"/>
+            <a:ext cx="2146680" cy="8640"/>
           </a:xfrm>
           <a:prstGeom prst="rect">
             <a:avLst/>
@@ -24742,7 +23659,7 @@
         <p:spPr>
           <a:xfrm>
             <a:off x="13041000" y="4216680"/>
-            <a:ext cx="1880280" cy="744480"/>
+            <a:ext cx="1879920" cy="744120"/>
           </a:xfrm>
           <a:prstGeom prst="rect">
             <a:avLst/>
@@ -24803,7 +23720,7 @@
         <p:spPr>
           <a:xfrm>
             <a:off x="15093000" y="5018400"/>
-            <a:ext cx="2146680" cy="9000"/>
+            <a:ext cx="2146320" cy="8640"/>
           </a:xfrm>
           <a:prstGeom prst="rect">
             <a:avLst/>
@@ -24846,7 +23763,7 @@
         <p:spPr>
           <a:xfrm>
             <a:off x="15188400" y="4216680"/>
-            <a:ext cx="1879920" cy="744480"/>
+            <a:ext cx="1879560" cy="744120"/>
           </a:xfrm>
           <a:prstGeom prst="rect">
             <a:avLst/>
@@ -24907,7 +23824,7 @@
         <p:spPr>
           <a:xfrm>
             <a:off x="1047600" y="5957280"/>
-            <a:ext cx="8512920" cy="9000"/>
+            <a:ext cx="8512560" cy="8640"/>
           </a:xfrm>
           <a:prstGeom prst="rect">
             <a:avLst/>
@@ -24950,7 +23867,7 @@
         <p:spPr>
           <a:xfrm>
             <a:off x="1219320" y="5118840"/>
-            <a:ext cx="5603400" cy="402120"/>
+            <a:ext cx="5603040" cy="401760"/>
           </a:xfrm>
           <a:prstGeom prst="rect">
             <a:avLst/>
@@ -25011,7 +23928,7 @@
         <p:spPr>
           <a:xfrm>
             <a:off x="1219320" y="5522760"/>
-            <a:ext cx="8415000" cy="380520"/>
+            <a:ext cx="8414640" cy="380160"/>
           </a:xfrm>
           <a:prstGeom prst="rect">
             <a:avLst/>
@@ -25096,7 +24013,7 @@
         <p:spPr>
           <a:xfrm>
             <a:off x="9560880" y="5957280"/>
-            <a:ext cx="3384720" cy="9000"/>
+            <a:ext cx="3384360" cy="8640"/>
           </a:xfrm>
           <a:prstGeom prst="rect">
             <a:avLst/>
@@ -25139,7 +24056,7 @@
         <p:spPr>
           <a:xfrm>
             <a:off x="9630720" y="5121000"/>
-            <a:ext cx="3143160" cy="778680"/>
+            <a:ext cx="3142800" cy="778320"/>
           </a:xfrm>
           <a:prstGeom prst="rect">
             <a:avLst/>
@@ -25200,7 +24117,7 @@
         <p:spPr>
           <a:xfrm>
             <a:off x="12945960" y="5957280"/>
-            <a:ext cx="2147040" cy="9000"/>
+            <a:ext cx="2146680" cy="8640"/>
           </a:xfrm>
           <a:prstGeom prst="rect">
             <a:avLst/>
@@ -25243,7 +24160,7 @@
         <p:spPr>
           <a:xfrm>
             <a:off x="13041000" y="5121000"/>
-            <a:ext cx="1880280" cy="778680"/>
+            <a:ext cx="1879920" cy="778320"/>
           </a:xfrm>
           <a:prstGeom prst="rect">
             <a:avLst/>
@@ -25304,7 +24221,7 @@
         <p:spPr>
           <a:xfrm>
             <a:off x="15093000" y="5957280"/>
-            <a:ext cx="2146680" cy="9000"/>
+            <a:ext cx="2146320" cy="8640"/>
           </a:xfrm>
           <a:prstGeom prst="rect">
             <a:avLst/>
@@ -25347,7 +24264,7 @@
         <p:spPr>
           <a:xfrm>
             <a:off x="15188400" y="5121000"/>
-            <a:ext cx="1879920" cy="778680"/>
+            <a:ext cx="1879560" cy="778320"/>
           </a:xfrm>
           <a:prstGeom prst="rect">
             <a:avLst/>
@@ -25408,7 +24325,7 @@
         <p:spPr>
           <a:xfrm>
             <a:off x="1047600" y="6861600"/>
-            <a:ext cx="8512920" cy="9000"/>
+            <a:ext cx="8512560" cy="8640"/>
           </a:xfrm>
           <a:prstGeom prst="rect">
             <a:avLst/>
@@ -25451,7 +24368,7 @@
         <p:spPr>
           <a:xfrm>
             <a:off x="1219320" y="6071760"/>
-            <a:ext cx="4944240" cy="380520"/>
+            <a:ext cx="4943880" cy="380160"/>
           </a:xfrm>
           <a:prstGeom prst="rect">
             <a:avLst/>
@@ -25512,7 +24429,7 @@
         <p:spPr>
           <a:xfrm>
             <a:off x="1219320" y="6461280"/>
-            <a:ext cx="8415000" cy="346320"/>
+            <a:ext cx="8414640" cy="345960"/>
           </a:xfrm>
           <a:prstGeom prst="rect">
             <a:avLst/>
@@ -25573,7 +24490,7 @@
         <p:spPr>
           <a:xfrm>
             <a:off x="9560880" y="6861600"/>
-            <a:ext cx="3384720" cy="9000"/>
+            <a:ext cx="3384360" cy="8640"/>
           </a:xfrm>
           <a:prstGeom prst="rect">
             <a:avLst/>
@@ -25616,7 +24533,7 @@
         <p:spPr>
           <a:xfrm>
             <a:off x="9630720" y="6059520"/>
-            <a:ext cx="3143160" cy="744480"/>
+            <a:ext cx="3142800" cy="744120"/>
           </a:xfrm>
           <a:prstGeom prst="rect">
             <a:avLst/>
@@ -25677,7 +24594,7 @@
         <p:spPr>
           <a:xfrm>
             <a:off x="12945960" y="6861600"/>
-            <a:ext cx="2147040" cy="9000"/>
+            <a:ext cx="2146680" cy="8640"/>
           </a:xfrm>
           <a:prstGeom prst="rect">
             <a:avLst/>
@@ -25720,7 +24637,7 @@
         <p:spPr>
           <a:xfrm>
             <a:off x="13041000" y="6059520"/>
-            <a:ext cx="1880280" cy="744480"/>
+            <a:ext cx="1879920" cy="744120"/>
           </a:xfrm>
           <a:prstGeom prst="rect">
             <a:avLst/>
@@ -25781,7 +24698,7 @@
         <p:spPr>
           <a:xfrm>
             <a:off x="15093000" y="6861600"/>
-            <a:ext cx="2146680" cy="9000"/>
+            <a:ext cx="2146320" cy="8640"/>
           </a:xfrm>
           <a:prstGeom prst="rect">
             <a:avLst/>
@@ -25824,7 +24741,7 @@
         <p:spPr>
           <a:xfrm>
             <a:off x="15188400" y="6059520"/>
-            <a:ext cx="1879920" cy="744480"/>
+            <a:ext cx="1879560" cy="744120"/>
           </a:xfrm>
           <a:prstGeom prst="rect">
             <a:avLst/>
@@ -25885,7 +24802,7 @@
         <p:spPr>
           <a:xfrm>
             <a:off x="1047600" y="7325640"/>
-            <a:ext cx="7943400" cy="2122920"/>
+            <a:ext cx="7943040" cy="2122560"/>
           </a:xfrm>
           <a:prstGeom prst="roundRect">
             <a:avLst>
@@ -25933,7 +24850,7 @@
         <p:spPr>
           <a:xfrm>
             <a:off x="1321560" y="7542360"/>
-            <a:ext cx="7617600" cy="397800"/>
+            <a:ext cx="7617240" cy="397440"/>
           </a:xfrm>
           <a:prstGeom prst="rect">
             <a:avLst/>
@@ -25994,7 +24911,7 @@
         <p:spPr>
           <a:xfrm>
             <a:off x="1321560" y="7997760"/>
-            <a:ext cx="7617600" cy="1272240"/>
+            <a:ext cx="7617240" cy="1271880"/>
           </a:xfrm>
           <a:prstGeom prst="rect">
             <a:avLst/>
@@ -26103,7 +25020,7 @@
         <p:spPr>
           <a:xfrm>
             <a:off x="9296280" y="7325640"/>
-            <a:ext cx="7943400" cy="2122920"/>
+            <a:ext cx="7943040" cy="2122560"/>
           </a:xfrm>
           <a:prstGeom prst="roundRect">
             <a:avLst>
@@ -26151,7 +25068,7 @@
         <p:spPr>
           <a:xfrm>
             <a:off x="9570240" y="7542360"/>
-            <a:ext cx="7617600" cy="397800"/>
+            <a:ext cx="7617240" cy="397440"/>
           </a:xfrm>
           <a:prstGeom prst="rect">
             <a:avLst/>
@@ -26212,7 +25129,7 @@
         <p:spPr>
           <a:xfrm>
             <a:off x="9570240" y="7997760"/>
-            <a:ext cx="7617600" cy="749880"/>
+            <a:ext cx="7617240" cy="749520"/>
           </a:xfrm>
           <a:prstGeom prst="rect">
             <a:avLst/>
@@ -26406,7 +25323,7 @@
         <p:spPr>
           <a:xfrm>
             <a:off x="1047600" y="419040"/>
-            <a:ext cx="5728320" cy="346320"/>
+            <a:ext cx="5727960" cy="345960"/>
           </a:xfrm>
           <a:prstGeom prst="rect">
             <a:avLst/>
@@ -26457,19 +25374,7 @@
                 <a:latin typeface="Courier New"/>
                 <a:ea typeface="Courier New"/>
               </a:rPr>
-              <a:t>DIAGRAMA </a:t>
-            </a:r>
-            <a:r>
-              <a:rPr lang="en-US" sz="1800" b="0" u="none" spc="71" strike="noStrike">
-                <a:solidFill>
-                  <a:srgbClr val="7C8186"/>
-                </a:solidFill>
-                <a:effectLst/>
-                <a:uFillTx/>
-                <a:latin typeface="Courier New"/>
-                <a:ea typeface="Courier New"/>
-              </a:rPr>
-              <a:t>DETALLADO DEL DATAPATH</a:t>
+              <a:t>DIAGRAMA DETALLADO DEL DATAPATH</a:t>
             </a:r>
             <a:endParaRPr lang="en-US" sz="1800" b="0" u="none" strike="noStrike">
               <a:solidFill>
@@ -26491,7 +25396,7 @@
         <p:spPr>
           <a:xfrm>
             <a:off x="13141800" y="419040"/>
-            <a:ext cx="4221000" cy="346320"/>
+            <a:ext cx="4220640" cy="345960"/>
           </a:xfrm>
           <a:prstGeom prst="rect">
             <a:avLst/>
@@ -26552,7 +25457,7 @@
         <p:spPr>
           <a:xfrm>
             <a:off x="1047600" y="952560"/>
-            <a:ext cx="16678080" cy="708480"/>
+            <a:ext cx="16677720" cy="708120"/>
           </a:xfrm>
           <a:prstGeom prst="rect">
             <a:avLst/>
@@ -26591,19 +25496,7 @@
                 <a:latin typeface="Arial"/>
                 <a:ea typeface="Arial"/>
               </a:rPr>
-              <a:t>Datapath — registro → núcleo → MUX → </a:t>
-            </a:r>
-            <a:r>
-              <a:rPr lang="en-US" sz="4800" b="1" u="none" spc="-71" strike="noStrike">
-                <a:solidFill>
-                  <a:srgbClr val="F3F2EE"/>
-                </a:solidFill>
-                <a:effectLst/>
-                <a:uFillTx/>
-                <a:latin typeface="Arial"/>
-                <a:ea typeface="Arial"/>
-              </a:rPr>
-              <a:t>salida</a:t>
+              <a:t>Datapath — registro → núcleo → MUX → salida</a:t>
             </a:r>
             <a:endParaRPr lang="en-US" sz="4800" b="0" u="none" strike="noStrike">
               <a:solidFill>
@@ -26625,7 +25518,7 @@
         <p:spPr>
           <a:xfrm>
             <a:off x="1047600" y="2118240"/>
-            <a:ext cx="8572320" cy="7329960"/>
+            <a:ext cx="8571960" cy="7329600"/>
           </a:xfrm>
           <a:prstGeom prst="roundRect">
             <a:avLst>
@@ -26677,7 +25570,7 @@
         <p:spPr>
           <a:xfrm>
             <a:off x="2390760" y="2354040"/>
-            <a:ext cx="5886000" cy="6858720"/>
+            <a:ext cx="5885640" cy="6858360"/>
           </a:xfrm>
           <a:prstGeom prst="rect">
             <a:avLst/>
@@ -26697,7 +25590,7 @@
         <p:spPr>
           <a:xfrm>
             <a:off x="10515600" y="2118240"/>
-            <a:ext cx="6936840" cy="1442520"/>
+            <a:ext cx="6936480" cy="1442160"/>
           </a:xfrm>
           <a:prstGeom prst="rect">
             <a:avLst/>
@@ -26796,7 +25689,19 @@
                 <a:latin typeface="Arial"/>
                 <a:ea typeface="Arial"/>
               </a:rPr>
-              <a:t>(S = x_old + </a:t>
+              <a:t>(S = x_old + x_new) y, desplazados </a:t>
+            </a:r>
+            <a:r>
+              <a:rPr lang="en-US" sz="2550" b="0" u="none" strike="noStrike">
+                <a:solidFill>
+                  <a:srgbClr val="F3F2EE"/>
+                </a:solidFill>
+                <a:effectLst/>
+                <a:uFillTx/>
+                <a:latin typeface="Courier New"/>
+                <a:ea typeface="Courier New"/>
+              </a:rPr>
+              <a:t>×2</a:t>
             </a:r>
             <a:r>
               <a:rPr lang="en-US" sz="2550" b="0" u="none" strike="noStrike">
@@ -26808,78 +25713,54 @@
                 <a:latin typeface="Arial"/>
                 <a:ea typeface="Arial"/>
               </a:rPr>
-              <a:t>x_new) y, desplazados </a:t>
+              <a:t>, a </a:t>
             </a:r>
             <a:r>
               <a:rPr lang="en-US" sz="2550" b="0" u="none" strike="noStrike">
                 <a:solidFill>
-                  <a:srgbClr val="F3F2EE"/>
-                </a:solidFill>
-                <a:effectLst/>
-                <a:uFillTx/>
-                <a:latin typeface="Courier New"/>
-                <a:ea typeface="Courier New"/>
-              </a:rPr>
-              <a:t>×2</a:t>
-            </a:r>
-            <a:r>
-              <a:rPr lang="en-US" sz="2550" b="0" u="none" strike="noStrike">
-                <a:solidFill>
-                  <a:srgbClr val="F3F2EE"/>
+                  <a:srgbClr val="F7AD30"/>
                 </a:solidFill>
                 <a:effectLst/>
                 <a:uFillTx/>
                 <a:latin typeface="Arial"/>
                 <a:ea typeface="Arial"/>
               </a:rPr>
-              <a:t>, a </a:t>
+              <a:t>ADD ② </a:t>
             </a:r>
             <a:r>
               <a:rPr lang="en-US" sz="2550" b="0" u="none" strike="noStrike">
                 <a:solidFill>
-                  <a:srgbClr val="F7AD30"/>
+                  <a:srgbClr val="F3F2EE"/>
                 </a:solidFill>
                 <a:effectLst/>
                 <a:uFillTx/>
                 <a:latin typeface="Arial"/>
                 <a:ea typeface="Arial"/>
               </a:rPr>
-              <a:t>ADD ② </a:t>
+              <a:t>y </a:t>
             </a:r>
             <a:r>
               <a:rPr lang="en-US" sz="2550" b="0" u="none" strike="noStrike">
                 <a:solidFill>
-                  <a:srgbClr val="F3F2EE"/>
+                  <a:srgbClr val="F7AD30"/>
                 </a:solidFill>
                 <a:effectLst/>
                 <a:uFillTx/>
                 <a:latin typeface="Arial"/>
                 <a:ea typeface="Arial"/>
               </a:rPr>
-              <a:t>y </a:t>
+              <a:t>ADD ③ </a:t>
             </a:r>
             <a:r>
               <a:rPr lang="en-US" sz="2550" b="0" u="none" strike="noStrike">
                 <a:solidFill>
-                  <a:srgbClr val="F7AD30"/>
+                  <a:srgbClr val="F3F2EE"/>
                 </a:solidFill>
                 <a:effectLst/>
                 <a:uFillTx/>
                 <a:latin typeface="Arial"/>
                 <a:ea typeface="Arial"/>
               </a:rPr>
-              <a:t>ADD ③ </a:t>
-            </a:r>
-            <a:r>
-              <a:rPr lang="en-US" sz="2550" b="0" u="none" strike="noStrike">
-                <a:solidFill>
-                  <a:srgbClr val="F3F2EE"/>
-                </a:solidFill>
-                <a:effectLst/>
-                <a:uFillTx/>
-                <a:latin typeface="Arial"/>
-                <a:ea typeface="Arial"/>
-              </a:rPr>
               <a:t>.</a:t>
             </a:r>
             <a:endParaRPr lang="en-US" sz="2550" b="0" u="none" strike="noStrike">
@@ -26902,7 +25783,7 @@
         <p:spPr>
           <a:xfrm>
             <a:off x="10515600" y="3789720"/>
-            <a:ext cx="6936840" cy="958680"/>
+            <a:ext cx="6936480" cy="958320"/>
           </a:xfrm>
           <a:prstGeom prst="rect">
             <a:avLst/>
@@ -26977,19 +25858,7 @@
                 <a:latin typeface="Arial"/>
                 <a:ea typeface="Arial"/>
               </a:rPr>
-              <a:t>— en las tres ramas </a:t>
-            </a:r>
-            <a:r>
-              <a:rPr lang="en-US" sz="2550" b="0" u="none" strike="noStrike">
-                <a:solidFill>
-                  <a:srgbClr val="F3F2EE"/>
-                </a:solidFill>
-                <a:effectLst/>
-                <a:uFillTx/>
-                <a:latin typeface="Arial"/>
-                <a:ea typeface="Arial"/>
-              </a:rPr>
-              <a:t>aritméticas.</a:t>
+              <a:t>— en las tres ramas aritméticas.</a:t>
             </a:r>
             <a:endParaRPr lang="en-US" sz="2550" b="0" u="none" strike="noStrike">
               <a:solidFill>
@@ -27011,7 +25880,7 @@
         <p:spPr>
           <a:xfrm>
             <a:off x="10515600" y="4977360"/>
-            <a:ext cx="6936840" cy="1395720"/>
+            <a:ext cx="6936480" cy="1395360"/>
           </a:xfrm>
           <a:prstGeom prst="rect">
             <a:avLst/>
@@ -27108,7 +25977,7 @@
         <p:spPr>
           <a:xfrm>
             <a:off x="10515600" y="6602040"/>
-            <a:ext cx="6936840" cy="1488960"/>
+            <a:ext cx="6936480" cy="1488600"/>
           </a:xfrm>
           <a:prstGeom prst="rect">
             <a:avLst/>
@@ -27159,7 +26028,19 @@
                 <a:latin typeface="Courier New"/>
                 <a:ea typeface="Courier New"/>
               </a:rPr>
-              <a:t>sel = </a:t>
+              <a:t>sel = cuenta[1:0] </a:t>
+            </a:r>
+            <a:r>
+              <a:rPr lang="en-US" sz="2550" b="0" u="none" strike="noStrike">
+                <a:solidFill>
+                  <a:srgbClr val="F3F2EE"/>
+                </a:solidFill>
+                <a:effectLst/>
+                <a:uFillTx/>
+                <a:latin typeface="Arial"/>
+                <a:ea typeface="Arial"/>
+              </a:rPr>
+              <a:t>; el registro de salida sincroniza </a:t>
             </a:r>
             <a:r>
               <a:rPr lang="en-US" sz="2550" b="0" u="none" strike="noStrike">
@@ -27171,7 +26052,7 @@
                 <a:latin typeface="Courier New"/>
                 <a:ea typeface="Courier New"/>
               </a:rPr>
-              <a:t>cuenta[1:0] </a:t>
+              <a:t>o_D</a:t>
             </a:r>
             <a:r>
               <a:rPr lang="en-US" sz="2550" b="0" u="none" strike="noStrike">
@@ -27183,30 +26064,6 @@
                 <a:latin typeface="Arial"/>
                 <a:ea typeface="Arial"/>
               </a:rPr>
-              <a:t>; el registro de salida sincroniza </a:t>
-            </a:r>
-            <a:r>
-              <a:rPr lang="en-US" sz="2550" b="0" u="none" strike="noStrike">
-                <a:solidFill>
-                  <a:srgbClr val="F3F2EE"/>
-                </a:solidFill>
-                <a:effectLst/>
-                <a:uFillTx/>
-                <a:latin typeface="Courier New"/>
-                <a:ea typeface="Courier New"/>
-              </a:rPr>
-              <a:t>o_D</a:t>
-            </a:r>
-            <a:r>
-              <a:rPr lang="en-US" sz="2550" b="0" u="none" strike="noStrike">
-                <a:solidFill>
-                  <a:srgbClr val="F3F2EE"/>
-                </a:solidFill>
-                <a:effectLst/>
-                <a:uFillTx/>
-                <a:latin typeface="Arial"/>
-                <a:ea typeface="Arial"/>
-              </a:rPr>
               <a:t>.</a:t>
             </a:r>
             <a:endParaRPr lang="en-US" sz="2550" b="0" u="none" strike="noStrike">
@@ -27229,7 +26086,7 @@
         <p:spPr>
           <a:xfrm>
             <a:off x="10153800" y="8661960"/>
-            <a:ext cx="209160" cy="209160"/>
+            <a:ext cx="208800" cy="208800"/>
           </a:xfrm>
           <a:prstGeom prst="roundRect">
             <a:avLst>
@@ -27279,7 +26136,7 @@
         <p:spPr>
           <a:xfrm>
             <a:off x="10496520" y="8595360"/>
-            <a:ext cx="1515960" cy="380520"/>
+            <a:ext cx="1515600" cy="380160"/>
           </a:xfrm>
           <a:prstGeom prst="rect">
             <a:avLst/>
@@ -27340,7 +26197,7 @@
         <p:spPr>
           <a:xfrm>
             <a:off x="12355920" y="8661960"/>
-            <a:ext cx="209160" cy="209160"/>
+            <a:ext cx="208800" cy="208800"/>
           </a:xfrm>
           <a:prstGeom prst="roundRect">
             <a:avLst>
@@ -27390,7 +26247,7 @@
         <p:spPr>
           <a:xfrm>
             <a:off x="12698640" y="8595360"/>
-            <a:ext cx="1676160" cy="380520"/>
+            <a:ext cx="1675800" cy="380160"/>
           </a:xfrm>
           <a:prstGeom prst="rect">
             <a:avLst/>
@@ -27451,7 +26308,7 @@
         <p:spPr>
           <a:xfrm>
             <a:off x="14717880" y="8661960"/>
-            <a:ext cx="209160" cy="209160"/>
+            <a:ext cx="208800" cy="208800"/>
           </a:xfrm>
           <a:prstGeom prst="roundRect">
             <a:avLst>
@@ -27501,7 +26358,7 @@
         <p:spPr>
           <a:xfrm>
             <a:off x="15060960" y="8580960"/>
-            <a:ext cx="1195920" cy="402120"/>
+            <a:ext cx="1195560" cy="401760"/>
           </a:xfrm>
           <a:prstGeom prst="rect">
             <a:avLst/>
@@ -27562,7 +26419,7 @@
         <p:spPr>
           <a:xfrm>
             <a:off x="10153800" y="9288720"/>
-            <a:ext cx="209160" cy="209160"/>
+            <a:ext cx="208800" cy="208800"/>
           </a:xfrm>
           <a:prstGeom prst="roundRect">
             <a:avLst>
@@ -27612,7 +26469,7 @@
         <p:spPr>
           <a:xfrm>
             <a:off x="10496520" y="9222120"/>
-            <a:ext cx="555840" cy="380520"/>
+            <a:ext cx="555480" cy="380160"/>
           </a:xfrm>
           <a:prstGeom prst="rect">
             <a:avLst/>
@@ -27673,7 +26530,7 @@
         <p:spPr>
           <a:xfrm>
             <a:off x="11395800" y="9288720"/>
-            <a:ext cx="209160" cy="209160"/>
+            <a:ext cx="208800" cy="208800"/>
           </a:xfrm>
           <a:prstGeom prst="roundRect">
             <a:avLst>
@@ -27723,7 +26580,7 @@
         <p:spPr>
           <a:xfrm>
             <a:off x="11738520" y="9222120"/>
-            <a:ext cx="555840" cy="380520"/>
+            <a:ext cx="555480" cy="380160"/>
           </a:xfrm>
           <a:prstGeom prst="rect">
             <a:avLst/>
